--- a/deliverables/slides/presentation.pptx
+++ b/deliverables/slides/presentation.pptx
@@ -12,6 +12,7 @@
     <p:sldId id="260" r:id="rId11"/>
     <p:sldId id="261" r:id="rId12"/>
     <p:sldId id="262" r:id="rId13"/>
+    <p:sldId id="263" r:id="rId14"/>
   </p:sldIdLst>
   <p:sldSz cx="12191695" cy="6858000" type="screen4x3"/>
   <p:notesSz cx="6858000" cy="9144000"/>
@@ -3243,7 +3244,7 @@
                 </a:solidFill>
                 <a:latin typeface="Calibri"/>
               </a:rPr>
-              <a:t>A Hybrid FP-Growth + Retrieval-Augmented Pipeline</a:t>
+              <a:t>A Hybrid FP-Growth and Retrieval-Augmented Pipeline</a:t>
             </a:r>
           </a:p>
         </p:txBody>
@@ -3277,7 +3278,7 @@
                 </a:solidFill>
                 <a:latin typeface="Calibri"/>
               </a:rPr>
-              <a:t>Sakshat Nandkumar Patil (018318287)  ·  Vineet Kumar (019140433)  ·  Aishwarya Madhave (019129110)</a:t>
+              <a:t>Sakshat Nandkumar Patil (018318287), Vineet Kumar (019140433), Aishwarya Madhave (019129110)</a:t>
             </a:r>
           </a:p>
         </p:txBody>
@@ -3311,7 +3312,7 @@
                 </a:solidFill>
                 <a:latin typeface="Calibri"/>
               </a:rPr>
-              <a:t>Department of Computer Engineering  ·  CMPE 255 Data Mining (Spring 2026)  ·  San José State University</a:t>
+              <a:t>Department of Computer Engineering, CMPE 255 Data Mining (Spring 2026), San Jose State University</a:t>
             </a:r>
           </a:p>
         </p:txBody>
@@ -3406,7 +3407,7 @@
                 </a:solidFill>
                 <a:latin typeface="Calibri"/>
               </a:rPr>
-              <a:t>1.  Problem &amp; Motivation</a:t>
+              <a:t>1. Problem and Motivation</a:t>
             </a:r>
           </a:p>
         </p:txBody>
@@ -3479,7 +3480,7 @@
                 </a:solidFill>
                 <a:latin typeface="Calibri"/>
               </a:rPr>
-              <a:t>•  Clinicians face cognitive overload synthesizing symptoms, history, and the medical literature.</a:t>
+              <a:t>  Clinicians face cognitive overload synthesizing symptoms, history, and the medical literature.</a:t>
             </a:r>
           </a:p>
           <a:p>
@@ -3495,7 +3496,7 @@
                 </a:solidFill>
                 <a:latin typeface="Calibri"/>
               </a:rPr>
-              <a:t>•  Existing tools either rely on hand-built ontologies (expensive) or are black-box models (no explanation).</a:t>
+              <a:t>  Existing tools either rely on hand-built ontologies (expensive) or are black-box models (no explanation).</a:t>
             </a:r>
           </a:p>
           <a:p>
@@ -3511,7 +3512,7 @@
                 </a:solidFill>
                 <a:latin typeface="Calibri"/>
               </a:rPr>
-              <a:t>•  Goal: surface ranked diagnoses from a symptom set AND ground each one in citable evidence.</a:t>
+              <a:t>  Goal: surface ranked diagnoses from a symptom set AND ground each one in citable evidence.</a:t>
             </a:r>
           </a:p>
           <a:p>
@@ -3527,7 +3528,7 @@
                 </a:solidFill>
                 <a:latin typeface="Calibri"/>
               </a:rPr>
-              <a:t>•  Our angle: combine interpretable association rules with a biomedical retrieval index.</a:t>
+              <a:t>  Our angle: combine interpretable association rules with a biomedical retrieval index.</a:t>
             </a:r>
           </a:p>
           <a:p>
@@ -3543,7 +3544,7 @@
                 </a:solidFill>
                 <a:latin typeface="Calibri"/>
               </a:rPr>
-              <a:t>•  Every prediction in our system is auditable through both a mined rule and the retrieved passage.</a:t>
+              <a:t>  Every prediction in our system is auditable through both a mined rule and the retrieved passage.</a:t>
             </a:r>
           </a:p>
         </p:txBody>
@@ -3661,7 +3662,7 @@
                 </a:solidFill>
                 <a:latin typeface="Calibri"/>
               </a:rPr>
-              <a:t>•  4,920 patient records</a:t>
+              <a:t>  4,920 patient records</a:t>
             </a:r>
           </a:p>
           <a:p>
@@ -3677,7 +3678,7 @@
                 </a:solidFill>
                 <a:latin typeface="Calibri"/>
               </a:rPr>
-              <a:t>•  41 diseases, 131 symptom tokens</a:t>
+              <a:t>  41 diseases, 131 symptom tokens</a:t>
             </a:r>
           </a:p>
           <a:p>
@@ -3693,7 +3694,7 @@
                 </a:solidFill>
                 <a:latin typeface="Calibri"/>
               </a:rPr>
-              <a:t>•  23,839 association rules mined</a:t>
+              <a:t>  23,839 association rules mined</a:t>
             </a:r>
           </a:p>
           <a:p>
@@ -3709,7 +3710,7 @@
                 </a:solidFill>
                 <a:latin typeface="Calibri"/>
               </a:rPr>
-              <a:t>•  24,063 MedQuAD passages indexed</a:t>
+              <a:t>  24,063 MedQuAD passages indexed</a:t>
             </a:r>
           </a:p>
           <a:p>
@@ -3725,7 +3726,7 @@
                 </a:solidFill>
                 <a:latin typeface="Calibri"/>
               </a:rPr>
-              <a:t>•  200 synthetic test cases</a:t>
+              <a:t>  200 synthetic test cases</a:t>
             </a:r>
           </a:p>
           <a:p>
@@ -3741,7 +3742,7 @@
                 </a:solidFill>
                 <a:latin typeface="Calibri"/>
               </a:rPr>
-              <a:t>•  82.5% Recall@1, 0.857 MRR</a:t>
+              <a:t>  82.5% Recall@1, 0.857 MRR</a:t>
             </a:r>
           </a:p>
         </p:txBody>
@@ -3775,7 +3776,7 @@
                 </a:solidFill>
                 <a:latin typeface="Calibri"/>
               </a:rPr>
-              <a:t>CMPE 255 Spring 2026  ·  Sakshat Patil  ·  Vineet Kumar  ·  Aishwarya Madhave  ·  Slide 1 / 6</a:t>
+              <a:t>CMPE 255 Spring 2026, Sakshat Patil, Vineet Kumar, Aishwarya Madhave, Slide 1 of 7</a:t>
             </a:r>
           </a:p>
         </p:txBody>
@@ -3870,7 +3871,7 @@
                 </a:solidFill>
                 <a:latin typeface="Calibri"/>
               </a:rPr>
-              <a:t>2.  System Architecture</a:t>
+              <a:t>2. System Architecture</a:t>
             </a:r>
           </a:p>
         </p:txBody>
@@ -3984,7 +3985,7 @@
                 </a:solidFill>
                 <a:latin typeface="Calibri"/>
               </a:rPr>
-              <a:t>Step 1 · Data ETL</a:t>
+              <a:t>Step 1. Data ETL</a:t>
             </a:r>
           </a:p>
         </p:txBody>
@@ -4023,7 +4024,7 @@
                 </a:solidFill>
                 <a:latin typeface="Calibri"/>
               </a:rPr>
-              <a:t>•  Kaggle CSV → 4,920 transactions</a:t>
+              <a:t>  Kaggle CSV to 4,920 transactions</a:t>
             </a:r>
           </a:p>
           <a:p>
@@ -4039,7 +4040,7 @@
                 </a:solidFill>
                 <a:latin typeface="Calibri"/>
               </a:rPr>
-              <a:t>•  Synthea FHIR ETL (parallel path)</a:t>
+              <a:t>  Synthea FHIR ETL (parallel path)</a:t>
             </a:r>
           </a:p>
           <a:p>
@@ -4055,7 +4056,7 @@
                 </a:solidFill>
                 <a:latin typeface="Calibri"/>
               </a:rPr>
-              <a:t>•  131 unique symptom tokens</a:t>
+              <a:t>  131 unique symptom tokens</a:t>
             </a:r>
           </a:p>
           <a:p>
@@ -4071,7 +4072,7 @@
                 </a:solidFill>
                 <a:latin typeface="Calibri"/>
               </a:rPr>
-              <a:t>•  Sakshat — owner</a:t>
+              <a:t>  Sakshat (owner)</a:t>
             </a:r>
           </a:p>
         </p:txBody>
@@ -4151,7 +4152,7 @@
                 </a:solidFill>
                 <a:latin typeface="Calibri"/>
               </a:rPr>
-              <a:t>Step 2 · FP-Growth Mining</a:t>
+              <a:t>Step 2. FP-Growth Mining</a:t>
             </a:r>
           </a:p>
         </p:txBody>
@@ -4190,7 +4191,7 @@
                 </a:solidFill>
                 <a:latin typeface="Calibri"/>
               </a:rPr>
-              <a:t>•  mlxtend, min_support=0.005</a:t>
+              <a:t>  mlxtend, min_support=0.005</a:t>
             </a:r>
           </a:p>
           <a:p>
@@ -4206,7 +4207,7 @@
                 </a:solidFill>
                 <a:latin typeface="Calibri"/>
               </a:rPr>
-              <a:t>•  23,839 rules / 41 diseases</a:t>
+              <a:t>  23,839 rules across 41 diseases</a:t>
             </a:r>
           </a:p>
           <a:p>
@@ -4222,7 +4223,7 @@
                 </a:solidFill>
                 <a:latin typeface="Calibri"/>
               </a:rPr>
-              <a:t>•  MiningConf(Q,d) at query time</a:t>
+              <a:t>  MiningConf(Q,d) at query time</a:t>
             </a:r>
           </a:p>
           <a:p>
@@ -4238,7 +4239,7 @@
                 </a:solidFill>
                 <a:latin typeface="Calibri"/>
               </a:rPr>
-              <a:t>•  Sakshat — owner</a:t>
+              <a:t>  Sakshat (owner)</a:t>
             </a:r>
           </a:p>
         </p:txBody>
@@ -4318,7 +4319,7 @@
                 </a:solidFill>
                 <a:latin typeface="Calibri"/>
               </a:rPr>
-              <a:t>Step 3 · Knowledge Base</a:t>
+              <a:t>Step 3. Knowledge Base</a:t>
             </a:r>
           </a:p>
         </p:txBody>
@@ -4357,7 +4358,7 @@
                 </a:solidFill>
                 <a:latin typeface="Calibri"/>
               </a:rPr>
-              <a:t>•  24,063 MedQuAD passages</a:t>
+              <a:t>  24,063 MedQuAD passages</a:t>
             </a:r>
           </a:p>
           <a:p>
@@ -4373,7 +4374,7 @@
                 </a:solidFill>
                 <a:latin typeface="Calibri"/>
               </a:rPr>
-              <a:t>•  MiniLM 384d / PubMedBERT 768d / Azure 3072d</a:t>
+              <a:t>  MiniLM 384d, PubMedBERT 768d, Azure 3072d</a:t>
             </a:r>
           </a:p>
           <a:p>
@@ -4389,7 +4390,7 @@
                 </a:solidFill>
                 <a:latin typeface="Calibri"/>
               </a:rPr>
-              <a:t>•  FAISS local · Pinecone serverless</a:t>
+              <a:t>  FAISS local, Pinecone serverless</a:t>
             </a:r>
           </a:p>
           <a:p>
@@ -4405,7 +4406,7 @@
                 </a:solidFill>
                 <a:latin typeface="Calibri"/>
               </a:rPr>
-              <a:t>•  Vineet — owner</a:t>
+              <a:t>  Vineet (owner)</a:t>
             </a:r>
           </a:p>
         </p:txBody>
@@ -4485,7 +4486,7 @@
                 </a:solidFill>
                 <a:latin typeface="Calibri"/>
               </a:rPr>
-              <a:t>Step 4 · RAG Pipeline</a:t>
+              <a:t>Step 4. RAG Pipeline</a:t>
             </a:r>
           </a:p>
         </p:txBody>
@@ -4524,7 +4525,7 @@
                 </a:solidFill>
                 <a:latin typeface="Calibri"/>
               </a:rPr>
-              <a:t>•  Dense retrieval + synonym expansion</a:t>
+              <a:t>  Dense retrieval + synonym expansion</a:t>
             </a:r>
           </a:p>
           <a:p>
@@ -4540,7 +4541,7 @@
                 </a:solidFill>
                 <a:latin typeface="Calibri"/>
               </a:rPr>
-              <a:t>•  Pinecone reranker: Cohere 3.5 / BGE-v2-m3</a:t>
+              <a:t>  Pinecone reranker: Cohere 3.5 or BGE-v2-m3</a:t>
             </a:r>
           </a:p>
           <a:p>
@@ -4556,7 +4557,7 @@
                 </a:solidFill>
                 <a:latin typeface="Calibri"/>
               </a:rPr>
-              <a:t>•  Template + OpenAI structured explainers</a:t>
+              <a:t>  Template + OpenAI structured explainers</a:t>
             </a:r>
           </a:p>
           <a:p>
@@ -4572,7 +4573,7 @@
                 </a:solidFill>
                 <a:latin typeface="Calibri"/>
               </a:rPr>
-              <a:t>•  Vineet + Aishwarya</a:t>
+              <a:t>  Vineet + Aishwarya</a:t>
             </a:r>
           </a:p>
         </p:txBody>
@@ -4652,7 +4653,7 @@
                 </a:solidFill>
                 <a:latin typeface="Calibri"/>
               </a:rPr>
-              <a:t>Step 5 · Hybrid Fusion</a:t>
+              <a:t>Step 5. Hybrid Fusion</a:t>
             </a:r>
           </a:p>
         </p:txBody>
@@ -4691,7 +4692,7 @@
                 </a:solidFill>
                 <a:latin typeface="Calibri"/>
               </a:rPr>
-              <a:t>•  α·RetrievalSim + (1−α)·MiningConf</a:t>
+              <a:t>  a*RetrievalSim + (1-a)*MiningConf</a:t>
             </a:r>
           </a:p>
           <a:p>
@@ -4707,7 +4708,7 @@
                 </a:solidFill>
                 <a:latin typeface="Calibri"/>
               </a:rPr>
-              <a:t>•  α = 0.3 (sweep-validated)</a:t>
+              <a:t>  a = 0.3 (sweep-validated)</a:t>
             </a:r>
           </a:p>
           <a:p>
@@ -4723,7 +4724,7 @@
                 </a:solidFill>
                 <a:latin typeface="Calibri"/>
               </a:rPr>
-              <a:t>•  Pooled candidate set</a:t>
+              <a:t>  Pooled candidate set</a:t>
             </a:r>
           </a:p>
           <a:p>
@@ -4739,7 +4740,7 @@
                 </a:solidFill>
                 <a:latin typeface="Calibri"/>
               </a:rPr>
-              <a:t>•  Aishwarya — owner</a:t>
+              <a:t>  Aishwarya (owner)</a:t>
             </a:r>
           </a:p>
         </p:txBody>
@@ -4819,7 +4820,7 @@
                 </a:solidFill>
                 <a:latin typeface="Calibri"/>
               </a:rPr>
-              <a:t>Step 6 · Evaluation</a:t>
+              <a:t>Step 6. Evaluation</a:t>
             </a:r>
           </a:p>
         </p:txBody>
@@ -4858,7 +4859,7 @@
                 </a:solidFill>
                 <a:latin typeface="Calibri"/>
               </a:rPr>
-              <a:t>•  Recall@K, MRR (200 cases)</a:t>
+              <a:t>  Recall@K, MRR (200 cases)</a:t>
             </a:r>
           </a:p>
           <a:p>
@@ -4874,7 +4875,7 @@
                 </a:solidFill>
                 <a:latin typeface="Calibri"/>
               </a:rPr>
-              <a:t>•  α sweep + per-stage latency</a:t>
+              <a:t>  alpha sweep + per-stage latency</a:t>
             </a:r>
           </a:p>
           <a:p>
@@ -4890,7 +4891,7 @@
                 </a:solidFill>
                 <a:latin typeface="Calibri"/>
               </a:rPr>
-              <a:t>•  155 pytest tests (147 unit · 8 live)</a:t>
+              <a:t>  155 pytest tests (147 unit, 8 live)</a:t>
             </a:r>
           </a:p>
           <a:p>
@@ -4906,7 +4907,7 @@
                 </a:solidFill>
                 <a:latin typeface="Calibri"/>
               </a:rPr>
-              <a:t>•  Aishwarya — owner</a:t>
+              <a:t>  Aishwarya (owner)</a:t>
             </a:r>
           </a:p>
         </p:txBody>
@@ -4941,7 +4942,7 @@
                 </a:solidFill>
                 <a:latin typeface="Calibri"/>
               </a:rPr>
-              <a:t>Three-tier deployment:  Next.js 14 web  →  FastAPI AI service (MPS)  →  Data tier (FAISS local | Pinecone managed)</a:t>
+              <a:t>Three-tier deployment: Next.js 14 web, FastAPI AI service (MPS), data tier (FAISS local or Pinecone managed)</a:t>
             </a:r>
           </a:p>
         </p:txBody>
@@ -4976,7 +4977,7 @@
                 </a:solidFill>
                 <a:latin typeface="Calibri"/>
               </a:rPr>
-              <a:t>Production demo: Azure OpenAI 3072d  →  Pinecone (255-data-mining, 24,063 vectors)  →  fused mining + retrieval</a:t>
+              <a:t>Production demo: Azure OpenAI 3072d to Pinecone (255-data-mining, 24,063 vectors), fused mining + retrieval</a:t>
             </a:r>
           </a:p>
         </p:txBody>
@@ -5010,7 +5011,7 @@
                 </a:solidFill>
                 <a:latin typeface="Calibri"/>
               </a:rPr>
-              <a:t>CMPE 255 Spring 2026  ·  Sakshat Patil  ·  Vineet Kumar  ·  Aishwarya Madhave  ·  Slide 2 / 6</a:t>
+              <a:t>CMPE 255 Spring 2026, Sakshat Patil, Vineet Kumar, Aishwarya Madhave, Slide 2 of 7</a:t>
             </a:r>
           </a:p>
         </p:txBody>
@@ -5105,7 +5106,7 @@
                 </a:solidFill>
                 <a:latin typeface="Calibri"/>
               </a:rPr>
-              <a:t>3.  Data &amp; Methodology</a:t>
+              <a:t>3. Data and Methodology</a:t>
             </a:r>
           </a:p>
         </p:txBody>
@@ -5212,7 +5213,7 @@
                 </a:solidFill>
                 <a:latin typeface="Calibri"/>
               </a:rPr>
-              <a:t>•  4,920 rows × 41 diseases (Kaggle-style schema)</a:t>
+              <a:t>  4,920 rows, 41 diseases (Kaggle-style schema)</a:t>
             </a:r>
           </a:p>
           <a:p>
@@ -5228,7 +5229,7 @@
                 </a:solidFill>
                 <a:latin typeface="Calibri"/>
               </a:rPr>
-              <a:t>•  Up to 17 symptoms per row, 131 unique tokens</a:t>
+              <a:t>  Up to 17 symptoms per row, 131 unique tokens</a:t>
             </a:r>
           </a:p>
           <a:p>
@@ -5244,7 +5245,7 @@
                 </a:solidFill>
                 <a:latin typeface="Calibri"/>
               </a:rPr>
-              <a:t>•  ETL: lowercase + snake_case normalisation</a:t>
+              <a:t>  ETL: lowercase + snake_case normalisation</a:t>
             </a:r>
           </a:p>
           <a:p>
@@ -5260,7 +5261,7 @@
                 </a:solidFill>
                 <a:latin typeface="Calibri"/>
               </a:rPr>
-              <a:t>•  FP-Growth basket = symptoms + DX:disease item</a:t>
+              <a:t>  FP-Growth basket = symptoms + DX:disease item</a:t>
             </a:r>
           </a:p>
         </p:txBody>
@@ -5333,7 +5334,7 @@
                 </a:solidFill>
                 <a:latin typeface="Calibri"/>
               </a:rPr>
-              <a:t>•  24,063 passages from 11k NIH XML files</a:t>
+              <a:t>  24,063 passages from 11k NIH XML files</a:t>
             </a:r>
           </a:p>
           <a:p>
@@ -5349,7 +5350,7 @@
                 </a:solidFill>
                 <a:latin typeface="Calibri"/>
               </a:rPr>
-              <a:t>•  1000-char chunks with 200-char overlap</a:t>
+              <a:t>  1000-char chunks with 200-char overlap</a:t>
             </a:r>
           </a:p>
           <a:p>
@@ -5365,7 +5366,7 @@
                 </a:solidFill>
                 <a:latin typeface="Calibri"/>
               </a:rPr>
-              <a:t>•  Embedded with MiniLM and PubMedBERT (MPS)</a:t>
+              <a:t>  Embedded with MiniLM and PubMedBERT (MPS)</a:t>
             </a:r>
           </a:p>
           <a:p>
@@ -5381,7 +5382,7 @@
                 </a:solidFill>
                 <a:latin typeface="Calibri"/>
               </a:rPr>
-              <a:t>•  Indexed with FAISS IndexFlatIP</a:t>
+              <a:t>  Indexed with FAISS IndexFlatIP</a:t>
             </a:r>
           </a:p>
         </p:txBody>
@@ -5443,13 +5444,13 @@
           <a:lstStyle/>
           <a:p>
             <a:r>
-              <a:rPr sz="1600" b="0">
+              <a:rPr sz="1500" b="0">
                 <a:solidFill>
                   <a:srgbClr val="1F2A3D"/>
                 </a:solidFill>
                 <a:latin typeface="Cambria Math"/>
               </a:rPr>
-              <a:t>MiningConf(Q,d) = max  c(A→d) · |A∩Q|/|A|</a:t>
+              <a:t>MiningConf(Q,d) = max  c(A to d) * |A intersect Q| / |A|</a:t>
             </a:r>
           </a:p>
         </p:txBody>
@@ -5483,7 +5484,7 @@
                 </a:solidFill>
                 <a:latin typeface="Calibri"/>
               </a:rPr>
-              <a:t>        over rules A→d with A ⊆ Q</a:t>
+              <a:t>        over rules A to d with A subset of Q</a:t>
             </a:r>
           </a:p>
         </p:txBody>
@@ -5556,7 +5557,7 @@
                 </a:solidFill>
                 <a:latin typeface="Calibri"/>
               </a:rPr>
-              <a:t>•  muscle_pain  →  myalgia</a:t>
+              <a:t>  muscle_pain  to  myalgia</a:t>
             </a:r>
           </a:p>
           <a:p>
@@ -5572,7 +5573,7 @@
                 </a:solidFill>
                 <a:latin typeface="Calibri"/>
               </a:rPr>
-              <a:t>•  high_fever  →  pyrexia, hyperthermia</a:t>
+              <a:t>  high_fever  to  pyrexia, hyperthermia</a:t>
             </a:r>
           </a:p>
           <a:p>
@@ -5588,7 +5589,7 @@
                 </a:solidFill>
                 <a:latin typeface="Calibri"/>
               </a:rPr>
-              <a:t>•  breathlessness  →  dyspnea</a:t>
+              <a:t>  breathlessness  to  dyspnea</a:t>
             </a:r>
           </a:p>
           <a:p>
@@ -5604,7 +5605,7 @@
                 </a:solidFill>
                 <a:latin typeface="Calibri"/>
               </a:rPr>
-              <a:t>•  yellowish_skin  →  jaundice, icterus</a:t>
+              <a:t>  yellowish_skin  to  jaundice, icterus</a:t>
             </a:r>
           </a:p>
           <a:p>
@@ -5620,7 +5621,7 @@
                 </a:solidFill>
                 <a:latin typeface="Calibri"/>
               </a:rPr>
-              <a:t>•  fast_heart_rate  →  tachycardia</a:t>
+              <a:t>  fast_heart_rate  to  tachycardia</a:t>
             </a:r>
           </a:p>
         </p:txBody>
@@ -5688,7 +5689,7 @@
                 </a:solidFill>
                 <a:latin typeface="Calibri"/>
               </a:rPr>
-              <a:t>CMPE 255 Spring 2026  ·  Sakshat Patil  ·  Vineet Kumar  ·  Aishwarya Madhave  ·  Slide 3 / 6</a:t>
+              <a:t>CMPE 255 Spring 2026, Sakshat Patil, Vineet Kumar, Aishwarya Madhave, Slide 3 of 7</a:t>
             </a:r>
           </a:p>
         </p:txBody>
@@ -5783,7 +5784,7 @@
                 </a:solidFill>
                 <a:latin typeface="Calibri"/>
               </a:rPr>
-              <a:t>4.  Results: 200 synthetic test cases</a:t>
+              <a:t>4. Results: 200 synthetic test cases</a:t>
             </a:r>
           </a:p>
         </p:txBody>
@@ -5817,7 +5818,7 @@
                 </a:solidFill>
                 <a:latin typeface="Calibri"/>
               </a:rPr>
-              <a:t>Fusion beats both signals; α=0.3 is the sweet spot</a:t>
+              <a:t>Fusion beats both signals; a=0.3 is the sweet spot</a:t>
             </a:r>
           </a:p>
         </p:txBody>
@@ -5990,7 +5991,7 @@
                           </a:solidFill>
                           <a:latin typeface="Calibri"/>
                         </a:rPr>
-                        <a:t>α=0.0</a:t>
+                        <a:t>a=0.0</a:t>
                       </a:r>
                     </a:p>
                   </a:txBody>
@@ -6340,7 +6341,7 @@
                           </a:solidFill>
                           <a:latin typeface="Calibri"/>
                         </a:rPr>
-                        <a:t>MiniLM   (best)</a:t>
+                        <a:t>MiniLM (best)</a:t>
                       </a:r>
                     </a:p>
                   </a:txBody>
@@ -6452,7 +6453,7 @@
                 </a:solidFill>
                 <a:latin typeface="Calibri"/>
               </a:rPr>
-              <a:t>Best fused: MiniLM + synonym expansion, α=0.3</a:t>
+              <a:t>Best fused: MiniLM with synonym expansion, a=0.3</a:t>
             </a:r>
           </a:p>
         </p:txBody>
@@ -6491,7 +6492,7 @@
                 </a:solidFill>
                 <a:latin typeface="Calibri"/>
               </a:rPr>
-              <a:t>•  +3.5 R@1 over mining alone</a:t>
+              <a:t>  +3.5 R@1 over mining alone</a:t>
             </a:r>
           </a:p>
           <a:p>
@@ -6507,7 +6508,7 @@
                 </a:solidFill>
                 <a:latin typeface="Calibri"/>
               </a:rPr>
-              <a:t>•  Retrieval-only collapses (vocab gap); +syn helps but ceiling stays low</a:t>
+              <a:t>  Retrieval-only collapses (vocab gap); +syn helps but ceiling stays low</a:t>
             </a:r>
           </a:p>
           <a:p>
@@ -6523,7 +6524,7 @@
                 </a:solidFill>
                 <a:latin typeface="Calibri"/>
               </a:rPr>
-              <a:t>•  Signals are complementary, not redundant</a:t>
+              <a:t>  Signals are complementary, not redundant</a:t>
             </a:r>
           </a:p>
         </p:txBody>
@@ -6602,7 +6603,7 @@
                 </a:solidFill>
                 <a:latin typeface="Calibri"/>
               </a:rPr>
-              <a:t>⏱ Latency: 12 ms mean / 20 ms p95 (default config, 100 queries on M3 Pro)</a:t>
+              <a:t>Latency: 12 ms mean, 20 ms p95 (default config, 100 queries on M3 Pro)</a:t>
             </a:r>
           </a:p>
         </p:txBody>
@@ -6661,7 +6662,7 @@
                 </a:solidFill>
                 <a:latin typeface="Calibri"/>
               </a:rPr>
-              <a:t>α-sweep peaks on [0.1, 0.4] — Recall@1 collapses for α≥0.7.</a:t>
+              <a:t>Alpha sweep peaks on [0.1, 0.4]. Recall@1 collapses for a &gt;= 0.7.</a:t>
             </a:r>
           </a:p>
         </p:txBody>
@@ -6695,7 +6696,7 @@
                 </a:solidFill>
                 <a:latin typeface="Calibri"/>
               </a:rPr>
-              <a:t>CMPE 255 Spring 2026  ·  Sakshat Patil  ·  Vineet Kumar  ·  Aishwarya Madhave  ·  Slide 4 / 6</a:t>
+              <a:t>CMPE 255 Spring 2026, Sakshat Patil, Vineet Kumar, Aishwarya Madhave, Slide 4 of 7</a:t>
             </a:r>
           </a:p>
         </p:txBody>
@@ -6790,7 +6791,7 @@
                 </a:solidFill>
                 <a:latin typeface="Calibri"/>
               </a:rPr>
-              <a:t>5.  Live Demo: Next.js Clinical UI</a:t>
+              <a:t>5. Live Demo: Next.js Clinical UI</a:t>
             </a:r>
           </a:p>
         </p:txBody>
@@ -6863,7 +6864,7 @@
                 </a:solidFill>
                 <a:latin typeface="Calibri"/>
               </a:rPr>
-              <a:t>•  Next.js 14 web app talks to FastAPI inference service over REST.</a:t>
+              <a:t>  Next.js 14 web app talks to FastAPI inference service over REST.</a:t>
             </a:r>
           </a:p>
           <a:p>
@@ -6879,7 +6880,7 @@
                 </a:solidFill>
                 <a:latin typeface="Calibri"/>
               </a:rPr>
-              <a:t>•  Symptom picker with autocomplete + 6 clinical presets.</a:t>
+              <a:t>  Symptom picker with autocomplete and 6 clinical presets.</a:t>
             </a:r>
           </a:p>
           <a:p>
@@ -6895,7 +6896,7 @@
                 </a:solidFill>
                 <a:latin typeface="Calibri"/>
               </a:rPr>
-              <a:t>•  Per-diagnosis card has 4 sections: symptom→disease link, statistical prior, evidence quality, what's missing.</a:t>
+              <a:t>  Per-diagnosis card has 4 sections: symptom-disease link, statistical prior, evidence quality, what is missing.</a:t>
             </a:r>
           </a:p>
           <a:p>
@@ -6911,7 +6912,7 @@
                 </a:solidFill>
                 <a:latin typeface="Calibri"/>
               </a:rPr>
-              <a:t>•  Evidence cards show the highlighted sentence (yellow) that actually mentions the symptom or disease.</a:t>
+              <a:t>  Evidence cards show the highlighted sentence (yellow) that actually mentions the symptom or disease.</a:t>
             </a:r>
           </a:p>
           <a:p>
@@ -6927,7 +6928,7 @@
                 </a:solidFill>
                 <a:latin typeface="Calibri"/>
               </a:rPr>
-              <a:t>•  Source authority badges (NIH NHLBI = tier 1, etc.) and passage-type chips (symptoms / diagnosis / treatment).</a:t>
+              <a:t>  Source authority badges (NIH NHLBI = tier 1, etc.) and passage-type chips (symptoms, diagnosis, treatment).</a:t>
             </a:r>
           </a:p>
           <a:p>
@@ -6943,7 +6944,7 @@
                 </a:solidFill>
                 <a:latin typeface="Calibri"/>
               </a:rPr>
-              <a:t>•  Live α slider, mode/backend toggles, source + passage-type filters.</a:t>
+              <a:t>  Live alpha slider, mode and backend toggles, source and passage-type filters.</a:t>
             </a:r>
           </a:p>
           <a:p>
@@ -6959,7 +6960,7 @@
                 </a:solidFill>
                 <a:latin typeface="Calibri"/>
               </a:rPr>
-              <a:t>•  OpenAI gpt-4o-mini explainer toggle (optional, with template fallback).</a:t>
+              <a:t>  OpenAI explainer toggle (optional, with template fallback).</a:t>
             </a:r>
           </a:p>
           <a:p>
@@ -6975,7 +6976,7 @@
                 </a:solidFill>
                 <a:latin typeface="Calibri"/>
               </a:rPr>
-              <a:t>•  Latency strip after every query: total + per-stage breakdown.</a:t>
+              <a:t>  Latency strip after every query: total + per-stage breakdown.</a:t>
             </a:r>
           </a:p>
         </p:txBody>
@@ -7091,7 +7092,7 @@
                 </a:solidFill>
                 <a:latin typeface="Calibri"/>
               </a:rPr>
-              <a:t>•  1. Pick 'Cardiac event' preset.</a:t>
+              <a:t>  1. Pick the Cardiac event preset.</a:t>
             </a:r>
           </a:p>
           <a:p>
@@ -7107,7 +7108,7 @@
                 </a:solidFill>
                 <a:latin typeface="Calibri"/>
               </a:rPr>
-              <a:t>•  2. heart_attack ranks #1 (mining 1.00, fused 0.70).</a:t>
+              <a:t>  2. heart_attack ranks first (mining 1.00, fused 0.83).</a:t>
             </a:r>
           </a:p>
           <a:p>
@@ -7123,7 +7124,7 @@
                 </a:solidFill>
                 <a:latin typeface="Calibri"/>
               </a:rPr>
-              <a:t>•  3. Read clinical card: link / prior / evidence / what's missing.</a:t>
+              <a:t>  3. Read the clinical card: link, prior, evidence, what is missing.</a:t>
             </a:r>
           </a:p>
           <a:p>
@@ -7139,7 +7140,7 @@
                 </a:solidFill>
                 <a:latin typeface="Calibri"/>
               </a:rPr>
-              <a:t>•  4. Inspect highlighted MedQuAD sentence with NIH NHLBI badge.</a:t>
+              <a:t>  4. Inspect highlighted MedQuAD sentence with NIH NHLBI badge.</a:t>
             </a:r>
           </a:p>
           <a:p>
@@ -7155,7 +7156,7 @@
                 </a:solidFill>
                 <a:latin typeface="Calibri"/>
               </a:rPr>
-              <a:t>•  5. Filter to source = MedlinePlus → see only those passages.</a:t>
+              <a:t>  5. Filter to source = MedlinePlus to see only those passages.</a:t>
             </a:r>
           </a:p>
           <a:p>
@@ -7171,7 +7172,7 @@
                 </a:solidFill>
                 <a:latin typeface="Calibri"/>
               </a:rPr>
-              <a:t>•  6. Toggle to OpenAI explainer → richer prose, same citations.</a:t>
+              <a:t>  6. Toggle to OpenAI explainer for richer prose, same citations.</a:t>
             </a:r>
           </a:p>
           <a:p>
@@ -7187,7 +7188,7 @@
                 </a:solidFill>
                 <a:latin typeface="Calibri"/>
               </a:rPr>
-              <a:t>•  7. Drag α slider: rankings re-fuse live.</a:t>
+              <a:t>  7. Drag the alpha slider; rankings re-fuse live.</a:t>
             </a:r>
           </a:p>
         </p:txBody>
@@ -7221,7 +7222,7 @@
                 </a:solidFill>
                 <a:latin typeface="Calibri"/>
               </a:rPr>
-              <a:t>CMPE 255 Spring 2026  ·  Sakshat Patil  ·  Vineet Kumar  ·  Aishwarya Madhave  ·  Slide 5 / 6</a:t>
+              <a:t>CMPE 255 Spring 2026, Sakshat Patil, Vineet Kumar, Aishwarya Madhave, Slide 5 of 7</a:t>
             </a:r>
           </a:p>
         </p:txBody>
@@ -7316,7 +7317,7 @@
                 </a:solidFill>
                 <a:latin typeface="Calibri"/>
               </a:rPr>
-              <a:t>6.  Conclusion &amp; Future Work</a:t>
+              <a:t>6. Platform Screenshots</a:t>
             </a:r>
           </a:p>
         </p:txBody>
@@ -7350,7 +7351,286 @@
                 </a:solidFill>
                 <a:latin typeface="Calibri"/>
               </a:rPr>
-              <a:t>What we shipped, what's next</a:t>
+              <a:t>Real captures from the running web client</a:t>
+            </a:r>
+          </a:p>
+        </p:txBody>
+      </p:sp>
+      <p:pic>
+        <p:nvPicPr>
+          <p:cNvPr id="5" name="Picture 4" descr="02-results-cardiac.png"/>
+          <p:cNvPicPr>
+            <a:picLocks noChangeAspect="1"/>
+          </p:cNvPicPr>
+          <p:nvPr/>
+        </p:nvPicPr>
+        <p:blipFill>
+          <a:blip r:embed="rId2"/>
+          <a:stretch>
+            <a:fillRect/>
+          </a:stretch>
+        </p:blipFill>
+        <p:spPr>
+          <a:xfrm>
+            <a:off x="365760" y="1554480"/>
+            <a:ext cx="1669546" cy="4846320"/>
+          </a:xfrm>
+          <a:prstGeom prst="rect">
+            <a:avLst/>
+          </a:prstGeom>
+        </p:spPr>
+      </p:pic>
+      <p:sp>
+        <p:nvSpPr>
+          <p:cNvPr id="6" name="TextBox 5"/>
+          <p:cNvSpPr txBox="1"/>
+          <p:nvPr/>
+        </p:nvSpPr>
+        <p:spPr>
+          <a:xfrm>
+            <a:off x="365760" y="6446520"/>
+            <a:ext cx="5486400" cy="365760"/>
+          </a:xfrm>
+          <a:prstGeom prst="rect">
+            <a:avLst/>
+          </a:prstGeom>
+          <a:noFill/>
+        </p:spPr>
+        <p:txBody>
+          <a:bodyPr wrap="square">
+            <a:spAutoFit/>
+          </a:bodyPr>
+          <a:lstStyle/>
+          <a:p>
+            <a:r>
+              <a:rPr sz="1100" b="1">
+                <a:solidFill>
+                  <a:srgbClr val="0D3B66"/>
+                </a:solidFill>
+                <a:latin typeface="Calibri"/>
+              </a:rPr>
+              <a:t>Results view, Cardiac event preset.</a:t>
+            </a:r>
+          </a:p>
+        </p:txBody>
+      </p:sp>
+      <p:pic>
+        <p:nvPicPr>
+          <p:cNvPr id="7" name="Picture 6" descr="13-stage-fuse.png"/>
+          <p:cNvPicPr>
+            <a:picLocks noChangeAspect="1"/>
+          </p:cNvPicPr>
+          <p:nvPr/>
+        </p:nvPicPr>
+        <p:blipFill>
+          <a:blip r:embed="rId3"/>
+          <a:stretch>
+            <a:fillRect/>
+          </a:stretch>
+        </p:blipFill>
+        <p:spPr>
+          <a:xfrm>
+            <a:off x="6400800" y="1554480"/>
+            <a:ext cx="3323900" cy="4846320"/>
+          </a:xfrm>
+          <a:prstGeom prst="rect">
+            <a:avLst/>
+          </a:prstGeom>
+        </p:spPr>
+      </p:pic>
+      <p:sp>
+        <p:nvSpPr>
+          <p:cNvPr id="8" name="TextBox 7"/>
+          <p:cNvSpPr txBox="1"/>
+          <p:nvPr/>
+        </p:nvSpPr>
+        <p:spPr>
+          <a:xfrm>
+            <a:off x="6400800" y="6446520"/>
+            <a:ext cx="5486400" cy="365760"/>
+          </a:xfrm>
+          <a:prstGeom prst="rect">
+            <a:avLst/>
+          </a:prstGeom>
+          <a:noFill/>
+        </p:spPr>
+        <p:txBody>
+          <a:bodyPr wrap="square">
+            <a:spAutoFit/>
+          </a:bodyPr>
+          <a:lstStyle/>
+          <a:p>
+            <a:r>
+              <a:rPr sz="1100" b="1">
+                <a:solidFill>
+                  <a:srgbClr val="0D3B66"/>
+                </a:solidFill>
+                <a:latin typeface="Calibri"/>
+              </a:rPr>
+              <a:t>Hybrid fusion stage of the pipeline timeline expanded.</a:t>
+            </a:r>
+          </a:p>
+        </p:txBody>
+      </p:sp>
+      <p:sp>
+        <p:nvSpPr>
+          <p:cNvPr id="9" name="TextBox 8"/>
+          <p:cNvSpPr txBox="1"/>
+          <p:nvPr/>
+        </p:nvSpPr>
+        <p:spPr>
+          <a:xfrm>
+            <a:off x="365760" y="6492240"/>
+            <a:ext cx="10058400" cy="274320"/>
+          </a:xfrm>
+          <a:prstGeom prst="rect">
+            <a:avLst/>
+          </a:prstGeom>
+          <a:noFill/>
+        </p:spPr>
+        <p:txBody>
+          <a:bodyPr wrap="square">
+            <a:spAutoFit/>
+          </a:bodyPr>
+          <a:lstStyle/>
+          <a:p>
+            <a:r>
+              <a:rPr sz="1000" b="0">
+                <a:solidFill>
+                  <a:srgbClr val="6B7280"/>
+                </a:solidFill>
+                <a:latin typeface="Calibri"/>
+              </a:rPr>
+              <a:t>CMPE 255 Spring 2026, Sakshat Patil, Vineet Kumar, Aishwarya Madhave, Slide 6 of 7</a:t>
+            </a:r>
+          </a:p>
+        </p:txBody>
+      </p:sp>
+    </p:spTree>
+  </p:cSld>
+  <p:clrMapOvr>
+    <a:masterClrMapping/>
+  </p:clrMapOvr>
+</p:sld>
+</file>
+
+<file path=ppt/slides/slide8.xml><?xml version="1.0" encoding="utf-8"?>
+<p:sld xmlns:a="http://schemas.openxmlformats.org/drawingml/2006/main" xmlns:p="http://schemas.openxmlformats.org/presentationml/2006/main" xmlns:r="http://schemas.openxmlformats.org/officeDocument/2006/relationships">
+  <p:cSld>
+    <p:spTree>
+      <p:nvGrpSpPr>
+        <p:cNvPr id="1" name=""/>
+        <p:cNvGrpSpPr/>
+        <p:nvPr/>
+      </p:nvGrpSpPr>
+      <p:grpSpPr/>
+      <p:sp>
+        <p:nvSpPr>
+          <p:cNvPr id="2" name="Rectangle 1"/>
+          <p:cNvSpPr/>
+          <p:nvPr/>
+        </p:nvSpPr>
+        <p:spPr>
+          <a:xfrm>
+            <a:off x="0" y="0"/>
+            <a:ext cx="12191695" cy="411480"/>
+          </a:xfrm>
+          <a:prstGeom prst="rect">
+            <a:avLst/>
+          </a:prstGeom>
+          <a:solidFill>
+            <a:srgbClr val="0D3B66"/>
+          </a:solidFill>
+          <a:ln>
+            <a:noFill/>
+          </a:ln>
+        </p:spPr>
+        <p:style>
+          <a:lnRef idx="1">
+            <a:schemeClr val="accent1"/>
+          </a:lnRef>
+          <a:fillRef idx="3">
+            <a:schemeClr val="accent1"/>
+          </a:fillRef>
+          <a:effectRef idx="2">
+            <a:schemeClr val="accent1"/>
+          </a:effectRef>
+          <a:fontRef idx="minor">
+            <a:schemeClr val="lt1"/>
+          </a:fontRef>
+        </p:style>
+        <p:txBody>
+          <a:bodyPr rtlCol="0" anchor="ctr"/>
+          <a:lstStyle/>
+          <a:p>
+            <a:pPr algn="ctr"/>
+          </a:p>
+        </p:txBody>
+      </p:sp>
+      <p:sp>
+        <p:nvSpPr>
+          <p:cNvPr id="3" name="TextBox 2"/>
+          <p:cNvSpPr txBox="1"/>
+          <p:nvPr/>
+        </p:nvSpPr>
+        <p:spPr>
+          <a:xfrm>
+            <a:off x="457200" y="502920"/>
+            <a:ext cx="10972800" cy="640080"/>
+          </a:xfrm>
+          <a:prstGeom prst="rect">
+            <a:avLst/>
+          </a:prstGeom>
+          <a:noFill/>
+        </p:spPr>
+        <p:txBody>
+          <a:bodyPr wrap="square">
+            <a:spAutoFit/>
+          </a:bodyPr>
+          <a:lstStyle/>
+          <a:p>
+            <a:r>
+              <a:rPr sz="2600" b="1">
+                <a:solidFill>
+                  <a:srgbClr val="0D3B66"/>
+                </a:solidFill>
+                <a:latin typeface="Calibri"/>
+              </a:rPr>
+              <a:t>7. Conclusion and Future Work</a:t>
+            </a:r>
+          </a:p>
+        </p:txBody>
+      </p:sp>
+      <p:sp>
+        <p:nvSpPr>
+          <p:cNvPr id="4" name="TextBox 3"/>
+          <p:cNvSpPr txBox="1"/>
+          <p:nvPr/>
+        </p:nvSpPr>
+        <p:spPr>
+          <a:xfrm>
+            <a:off x="457200" y="1051560"/>
+            <a:ext cx="10972800" cy="365760"/>
+          </a:xfrm>
+          <a:prstGeom prst="rect">
+            <a:avLst/>
+          </a:prstGeom>
+          <a:noFill/>
+        </p:spPr>
+        <p:txBody>
+          <a:bodyPr wrap="square">
+            <a:spAutoFit/>
+          </a:bodyPr>
+          <a:lstStyle/>
+          <a:p>
+            <a:r>
+              <a:rPr sz="1400" b="0">
+                <a:solidFill>
+                  <a:srgbClr val="6B7280"/>
+                </a:solidFill>
+                <a:latin typeface="Calibri"/>
+              </a:rPr>
+              <a:t>What we shipped, what is next</a:t>
             </a:r>
           </a:p>
         </p:txBody>
@@ -7423,7 +7703,7 @@
                 </a:solidFill>
                 <a:latin typeface="Calibri"/>
               </a:rPr>
-              <a:t>•  Reproducible FP-Growth pipeline (23,839 rules, 100% disease coverage)</a:t>
+              <a:t>  Reproducible FP-Growth pipeline (23,839 rules, 100% disease coverage)</a:t>
             </a:r>
           </a:p>
           <a:p>
@@ -7439,7 +7719,7 @@
                 </a:solidFill>
                 <a:latin typeface="Calibri"/>
               </a:rPr>
-              <a:t>•  Three encoders: MiniLM 384d, PubMedBERT 768d, Azure OpenAI 3072d</a:t>
+              <a:t>  Three encoders: MiniLM 384d, PubMedBERT 768d, Azure OpenAI 3072d</a:t>
             </a:r>
           </a:p>
           <a:p>
@@ -7455,7 +7735,7 @@
                 </a:solidFill>
                 <a:latin typeface="Calibri"/>
               </a:rPr>
-              <a:t>•  Pinecone Serverless production index (255-data-mining, 24,063 vectors)</a:t>
+              <a:t>  Pinecone Serverless production index (255-data-mining, 24,063 vectors)</a:t>
             </a:r>
           </a:p>
           <a:p>
@@ -7471,7 +7751,7 @@
                 </a:solidFill>
                 <a:latin typeface="Calibri"/>
               </a:rPr>
-              <a:t>•  Claim-level evidence with NIH source-tier badges + specificity</a:t>
+              <a:t>  Claim-level evidence with NIH source-tier badges + specificity</a:t>
             </a:r>
           </a:p>
           <a:p>
@@ -7487,7 +7767,7 @@
                 </a:solidFill>
                 <a:latin typeface="Calibri"/>
               </a:rPr>
-              <a:t>•  Pinecone Cohere/BGE reranker with auto-fallback (free tier safe)</a:t>
+              <a:t>  Pinecone Cohere/BGE reranker with auto-fallback (free tier safe)</a:t>
             </a:r>
           </a:p>
           <a:p>
@@ -7503,7 +7783,7 @@
                 </a:solidFill>
                 <a:latin typeface="Calibri"/>
               </a:rPr>
-              <a:t>•  Clinical-structured explainer: deterministic template + OpenAI</a:t>
+              <a:t>  Clinical-structured explainer: deterministic template + OpenAI</a:t>
             </a:r>
           </a:p>
           <a:p>
@@ -7519,7 +7799,7 @@
                 </a:solidFill>
                 <a:latin typeface="Calibri"/>
               </a:rPr>
-              <a:t>•  Next.js 14 UI + FastAPI microservice + Python data tier</a:t>
+              <a:t>  Next.js 14 UI + FastAPI microservice + Python data tier</a:t>
             </a:r>
           </a:p>
           <a:p>
@@ -7535,7 +7815,7 @@
                 </a:solidFill>
                 <a:latin typeface="Calibri"/>
               </a:rPr>
-              <a:t>•  82.5% R@1, 0.857 MRR · Heart Attack fused 0.831 on Azure path</a:t>
+              <a:t>  82.5% R@1, 0.857 MRR. Heart Attack fused 0.831 on Azure path.</a:t>
             </a:r>
           </a:p>
           <a:p>
@@ -7551,7 +7831,7 @@
                 </a:solidFill>
                 <a:latin typeface="Calibri"/>
               </a:rPr>
-              <a:t>•  155 pytest tests passing (147 unit, 8 live integration)</a:t>
+              <a:t>  155 pytest tests passing (147 unit, 8 live integration)</a:t>
             </a:r>
           </a:p>
         </p:txBody>
@@ -7624,7 +7904,7 @@
                 </a:solidFill>
                 <a:latin typeface="Calibri"/>
               </a:rPr>
-              <a:t>•  UMLS-backed automatic synonym mining (replace curated dict)</a:t>
+              <a:t>  UMLS-backed automatic synonym mining (replace curated dict)</a:t>
             </a:r>
           </a:p>
           <a:p>
@@ -7640,7 +7920,7 @@
                 </a:solidFill>
                 <a:latin typeface="Calibri"/>
               </a:rPr>
-              <a:t>•  Cross-encoder reranker over &lt;disease, passage&gt; pairs</a:t>
+              <a:t>  Cross-encoder reranker over &lt;disease, passage&gt; pairs</a:t>
             </a:r>
           </a:p>
           <a:p>
@@ -7656,7 +7936,7 @@
                 </a:solidFill>
                 <a:latin typeface="Calibri"/>
               </a:rPr>
-              <a:t>•  Evaluate on Synthea FHIR pipeline (held-out vocabulary)</a:t>
+              <a:t>  Evaluate on Synthea FHIR pipeline (held-out vocabulary)</a:t>
             </a:r>
           </a:p>
           <a:p>
@@ -7672,7 +7952,7 @@
                 </a:solidFill>
                 <a:latin typeface="Calibri"/>
               </a:rPr>
-              <a:t>•  Open-domain disease universe via UMLS canonicalisation</a:t>
+              <a:t>  Open-domain disease universe via UMLS canonicalisation</a:t>
             </a:r>
           </a:p>
           <a:p>
@@ -7688,7 +7968,7 @@
                 </a:solidFill>
                 <a:latin typeface="Calibri"/>
               </a:rPr>
-              <a:t>•  Learned fusion (XGBoost) using rule lift, passage source, overlap</a:t>
+              <a:t>  Learned fusion (XGBoost) using rule lift, passage source, overlap</a:t>
             </a:r>
           </a:p>
         </p:txBody>
@@ -7723,7 +8003,7 @@
                 </a:solidFill>
                 <a:latin typeface="Calibri"/>
               </a:rPr>
-              <a:t>Sakshat Patil  ·  Vineet Kumar  ·  Aishwarya Madhave</a:t>
+              <a:t>Sakshat Patil, Vineet Kumar, Aishwarya Madhave</a:t>
             </a:r>
           </a:p>
         </p:txBody>
@@ -7792,7 +8072,7 @@
                 </a:solidFill>
                 <a:latin typeface="Calibri"/>
               </a:rPr>
-              <a:t>CMPE 255 Spring 2026  ·  Sakshat Patil  ·  Vineet Kumar  ·  Aishwarya Madhave  ·  Slide 6 / 6</a:t>
+              <a:t>CMPE 255 Spring 2026, Sakshat Patil, Vineet Kumar, Aishwarya Madhave, Slide 7 of 7</a:t>
             </a:r>
           </a:p>
         </p:txBody>

--- a/deliverables/slides/presentation.pptx
+++ b/deliverables/slides/presentation.pptx
@@ -12,7 +12,6 @@
     <p:sldId id="260" r:id="rId11"/>
     <p:sldId id="261" r:id="rId12"/>
     <p:sldId id="262" r:id="rId13"/>
-    <p:sldId id="263" r:id="rId14"/>
   </p:sldIdLst>
   <p:sldSz cx="12191695" cy="6858000" type="screen4x3"/>
   <p:notesSz cx="6858000" cy="9144000"/>
@@ -3110,7 +3109,7 @@
             <a:avLst/>
           </a:prstGeom>
           <a:solidFill>
-            <a:srgbClr val="0D3B66"/>
+            <a:srgbClr val="061A33"/>
           </a:solidFill>
           <a:ln>
             <a:noFill/>
@@ -3146,8 +3145,51 @@
         </p:nvSpPr>
         <p:spPr>
           <a:xfrm>
-            <a:off x="0" y="2377440"/>
-            <a:ext cx="12191695" cy="45720"/>
+            <a:off x="0" y="4572000"/>
+            <a:ext cx="12191695" cy="2286000"/>
+          </a:xfrm>
+          <a:prstGeom prst="rect">
+            <a:avLst/>
+          </a:prstGeom>
+          <a:solidFill>
+            <a:srgbClr val="0A2A4F"/>
+          </a:solidFill>
+          <a:ln>
+            <a:noFill/>
+          </a:ln>
+        </p:spPr>
+        <p:style>
+          <a:lnRef idx="1">
+            <a:schemeClr val="accent1"/>
+          </a:lnRef>
+          <a:fillRef idx="3">
+            <a:schemeClr val="accent1"/>
+          </a:fillRef>
+          <a:effectRef idx="2">
+            <a:schemeClr val="accent1"/>
+          </a:effectRef>
+          <a:fontRef idx="minor">
+            <a:schemeClr val="lt1"/>
+          </a:fontRef>
+        </p:style>
+        <p:txBody>
+          <a:bodyPr rtlCol="0" anchor="ctr"/>
+          <a:lstStyle/>
+          <a:p>
+            <a:pPr algn="ctr"/>
+          </a:p>
+        </p:txBody>
+      </p:sp>
+      <p:sp>
+        <p:nvSpPr>
+          <p:cNvPr id="4" name="Rectangle 3"/>
+          <p:cNvSpPr/>
+          <p:nvPr/>
+        </p:nvSpPr>
+        <p:spPr>
+          <a:xfrm>
+            <a:off x="0" y="2606040"/>
+            <a:ext cx="12191695" cy="36576"/>
           </a:xfrm>
           <a:prstGeom prst="rect">
             <a:avLst/>
@@ -3183,14 +3225,14 @@
       </p:sp>
       <p:sp>
         <p:nvSpPr>
-          <p:cNvPr id="4" name="TextBox 3"/>
+          <p:cNvPr id="5" name="TextBox 4"/>
           <p:cNvSpPr txBox="1"/>
           <p:nvPr/>
         </p:nvSpPr>
         <p:spPr>
           <a:xfrm>
-            <a:off x="640080" y="2651760"/>
-            <a:ext cx="10972800" cy="914400"/>
+            <a:off x="822960" y="2057400"/>
+            <a:ext cx="7315200" cy="365760"/>
           </a:xfrm>
           <a:prstGeom prst="rect">
             <a:avLst/>
@@ -3203,28 +3245,33 @@
           </a:bodyPr>
           <a:lstStyle/>
           <a:p>
-            <a:r>
-              <a:rPr sz="4200" b="1">
-                <a:solidFill>
-                  <a:srgbClr val="FFFFFF"/>
+            <a:pPr>
+              <a:spcAft>
+                <a:spcPts val="400"/>
+              </a:spcAft>
+            </a:pPr>
+            <a:r>
+              <a:rPr sz="1200" b="1">
+                <a:solidFill>
+                  <a:srgbClr val="3A86FF"/>
                 </a:solidFill>
                 <a:latin typeface="Calibri"/>
               </a:rPr>
-              <a:t>Record-Based Medical Diagnostic Assistant</a:t>
-            </a:r>
-          </a:p>
-        </p:txBody>
-      </p:sp>
-      <p:sp>
-        <p:nvSpPr>
-          <p:cNvPr id="5" name="TextBox 4"/>
+              <a:t>CMPE 255 DATA MINING  |  SPRING 2026  |  FINAL PROJECT</a:t>
+            </a:r>
+          </a:p>
+        </p:txBody>
+      </p:sp>
+      <p:sp>
+        <p:nvSpPr>
+          <p:cNvPr id="6" name="TextBox 5"/>
           <p:cNvSpPr txBox="1"/>
           <p:nvPr/>
         </p:nvSpPr>
         <p:spPr>
           <a:xfrm>
-            <a:off x="640080" y="3520440"/>
-            <a:ext cx="10972800" cy="548640"/>
+            <a:off x="822960" y="2834640"/>
+            <a:ext cx="10515600" cy="1097280"/>
           </a:xfrm>
           <a:prstGeom prst="rect">
             <a:avLst/>
@@ -3237,28 +3284,33 @@
           </a:bodyPr>
           <a:lstStyle/>
           <a:p>
-            <a:r>
-              <a:rPr sz="2200" b="0">
-                <a:solidFill>
-                  <a:srgbClr val="CBD5E1"/>
+            <a:pPr>
+              <a:spcAft>
+                <a:spcPts val="400"/>
+              </a:spcAft>
+            </a:pPr>
+            <a:r>
+              <a:rPr sz="5200" b="1">
+                <a:solidFill>
+                  <a:srgbClr val="FFFFFF"/>
                 </a:solidFill>
                 <a:latin typeface="Calibri"/>
               </a:rPr>
-              <a:t>A Hybrid FP-Growth and Retrieval-Augmented Pipeline</a:t>
-            </a:r>
-          </a:p>
-        </p:txBody>
-      </p:sp>
-      <p:sp>
-        <p:nvSpPr>
-          <p:cNvPr id="6" name="TextBox 5"/>
+              <a:t>Record-Based Medical</a:t>
+            </a:r>
+          </a:p>
+        </p:txBody>
+      </p:sp>
+      <p:sp>
+        <p:nvSpPr>
+          <p:cNvPr id="7" name="TextBox 6"/>
           <p:cNvSpPr txBox="1"/>
           <p:nvPr/>
         </p:nvSpPr>
         <p:spPr>
           <a:xfrm>
-            <a:off x="640080" y="4754880"/>
-            <a:ext cx="10972800" cy="457200"/>
+            <a:off x="822960" y="3611880"/>
+            <a:ext cx="10515600" cy="1097280"/>
           </a:xfrm>
           <a:prstGeom prst="rect">
             <a:avLst/>
@@ -3271,28 +3323,33 @@
           </a:bodyPr>
           <a:lstStyle/>
           <a:p>
-            <a:r>
-              <a:rPr sz="1600" b="0">
+            <a:pPr>
+              <a:spcAft>
+                <a:spcPts val="400"/>
+              </a:spcAft>
+            </a:pPr>
+            <a:r>
+              <a:rPr sz="5200" b="1">
                 <a:solidFill>
                   <a:srgbClr val="FFFFFF"/>
                 </a:solidFill>
                 <a:latin typeface="Calibri"/>
               </a:rPr>
-              <a:t>Sakshat Nandkumar Patil (018318287), Vineet Kumar (019140433), Aishwarya Madhave (019129110)</a:t>
-            </a:r>
-          </a:p>
-        </p:txBody>
-      </p:sp>
-      <p:sp>
-        <p:nvSpPr>
-          <p:cNvPr id="7" name="TextBox 6"/>
+              <a:t>Diagnostic Assistant</a:t>
+            </a:r>
+          </a:p>
+        </p:txBody>
+      </p:sp>
+      <p:sp>
+        <p:nvSpPr>
+          <p:cNvPr id="8" name="TextBox 7"/>
           <p:cNvSpPr txBox="1"/>
           <p:nvPr/>
         </p:nvSpPr>
         <p:spPr>
           <a:xfrm>
-            <a:off x="640080" y="5166360"/>
-            <a:ext cx="10972800" cy="365760"/>
+            <a:off x="822960" y="4526280"/>
+            <a:ext cx="10515600" cy="457200"/>
           </a:xfrm>
           <a:prstGeom prst="rect">
             <a:avLst/>
@@ -3305,14 +3362,97 @@
           </a:bodyPr>
           <a:lstStyle/>
           <a:p>
-            <a:r>
-              <a:rPr sz="1300" b="0">
+            <a:pPr>
+              <a:spcAft>
+                <a:spcPts val="400"/>
+              </a:spcAft>
+            </a:pPr>
+            <a:r>
+              <a:rPr sz="1800" b="0">
                 <a:solidFill>
                   <a:srgbClr val="CBD5E1"/>
                 </a:solidFill>
                 <a:latin typeface="Calibri"/>
               </a:rPr>
-              <a:t>Department of Computer Engineering, CMPE 255 Data Mining (Spring 2026), San Jose State University</a:t>
+              <a:t>FP-Growth association rules + biomedical RAG, fused.</a:t>
+            </a:r>
+          </a:p>
+        </p:txBody>
+      </p:sp>
+      <p:sp>
+        <p:nvSpPr>
+          <p:cNvPr id="9" name="TextBox 8"/>
+          <p:cNvSpPr txBox="1"/>
+          <p:nvPr/>
+        </p:nvSpPr>
+        <p:spPr>
+          <a:xfrm>
+            <a:off x="822960" y="5532120"/>
+            <a:ext cx="10515600" cy="365760"/>
+          </a:xfrm>
+          <a:prstGeom prst="rect">
+            <a:avLst/>
+          </a:prstGeom>
+          <a:noFill/>
+        </p:spPr>
+        <p:txBody>
+          <a:bodyPr wrap="square">
+            <a:spAutoFit/>
+          </a:bodyPr>
+          <a:lstStyle/>
+          <a:p>
+            <a:pPr>
+              <a:spcAft>
+                <a:spcPts val="400"/>
+              </a:spcAft>
+            </a:pPr>
+            <a:r>
+              <a:rPr sz="1600" b="1">
+                <a:solidFill>
+                  <a:srgbClr val="FFFFFF"/>
+                </a:solidFill>
+                <a:latin typeface="Calibri"/>
+              </a:rPr>
+              <a:t>Sakshat Nandkumar Patil   ·   Vineet Kumar   ·   Aishwarya Madhave</a:t>
+            </a:r>
+          </a:p>
+        </p:txBody>
+      </p:sp>
+      <p:sp>
+        <p:nvSpPr>
+          <p:cNvPr id="10" name="TextBox 9"/>
+          <p:cNvSpPr txBox="1"/>
+          <p:nvPr/>
+        </p:nvSpPr>
+        <p:spPr>
+          <a:xfrm>
+            <a:off x="822960" y="5897880"/>
+            <a:ext cx="10515600" cy="365760"/>
+          </a:xfrm>
+          <a:prstGeom prst="rect">
+            <a:avLst/>
+          </a:prstGeom>
+          <a:noFill/>
+        </p:spPr>
+        <p:txBody>
+          <a:bodyPr wrap="square">
+            <a:spAutoFit/>
+          </a:bodyPr>
+          <a:lstStyle/>
+          <a:p>
+            <a:pPr>
+              <a:spcAft>
+                <a:spcPts val="400"/>
+              </a:spcAft>
+            </a:pPr>
+            <a:r>
+              <a:rPr sz="1200" b="0">
+                <a:solidFill>
+                  <a:srgbClr val="CBD5E1"/>
+                </a:solidFill>
+                <a:latin typeface="Calibri"/>
+              </a:rPr>
+              <a:t>Department of Computer Engineering, San Jose State University</a:t>
             </a:r>
           </a:p>
         </p:txBody>
@@ -3343,14 +3483,14 @@
         </p:nvSpPr>
         <p:spPr>
           <a:xfrm>
-            <a:off x="0" y="0"/>
-            <a:ext cx="12191695" cy="411480"/>
+            <a:off x="457200" y="457200"/>
+            <a:ext cx="73152" cy="502920"/>
           </a:xfrm>
           <a:prstGeom prst="rect">
             <a:avLst/>
           </a:prstGeom>
           <a:solidFill>
-            <a:srgbClr val="0D3B66"/>
+            <a:srgbClr val="3A86FF"/>
           </a:solidFill>
           <a:ln>
             <a:noFill/>
@@ -3386,8 +3526,8 @@
         </p:nvSpPr>
         <p:spPr>
           <a:xfrm>
-            <a:off x="457200" y="502920"/>
-            <a:ext cx="10972800" cy="640080"/>
+            <a:off x="640080" y="457200"/>
+            <a:ext cx="7315200" cy="274320"/>
           </a:xfrm>
           <a:prstGeom prst="rect">
             <a:avLst/>
@@ -3400,14 +3540,19 @@
           </a:bodyPr>
           <a:lstStyle/>
           <a:p>
-            <a:r>
-              <a:rPr sz="2600" b="1">
-                <a:solidFill>
-                  <a:srgbClr val="0D3B66"/>
+            <a:pPr>
+              <a:spcAft>
+                <a:spcPts val="400"/>
+              </a:spcAft>
+            </a:pPr>
+            <a:r>
+              <a:rPr sz="1000" b="1">
+                <a:solidFill>
+                  <a:srgbClr val="3A86FF"/>
                 </a:solidFill>
                 <a:latin typeface="Calibri"/>
               </a:rPr>
-              <a:t>1. Problem and Motivation</a:t>
+              <a:t>SLIDE 01  /  THE PROBLEM</a:t>
             </a:r>
           </a:p>
         </p:txBody>
@@ -3420,8 +3565,8 @@
         </p:nvSpPr>
         <p:spPr>
           <a:xfrm>
-            <a:off x="457200" y="1051560"/>
-            <a:ext cx="10972800" cy="365760"/>
+            <a:off x="640080" y="713232"/>
+            <a:ext cx="10972800" cy="502920"/>
           </a:xfrm>
           <a:prstGeom prst="rect">
             <a:avLst/>
@@ -3434,14 +3579,19 @@
           </a:bodyPr>
           <a:lstStyle/>
           <a:p>
-            <a:r>
-              <a:rPr sz="1400" b="0">
-                <a:solidFill>
-                  <a:srgbClr val="6B7280"/>
+            <a:pPr>
+              <a:spcAft>
+                <a:spcPts val="400"/>
+              </a:spcAft>
+            </a:pPr>
+            <a:r>
+              <a:rPr sz="2800" b="1">
+                <a:solidFill>
+                  <a:srgbClr val="0A2A4F"/>
                 </a:solidFill>
                 <a:latin typeface="Calibri"/>
               </a:rPr>
-              <a:t>Why diagnostic decision support needs both rules and evidence</a:t>
+              <a:t>Why diagnostic decision support is hard</a:t>
             </a:r>
           </a:p>
         </p:txBody>
@@ -3454,8 +3604,8 @@
         </p:nvSpPr>
         <p:spPr>
           <a:xfrm>
-            <a:off x="548640" y="1554480"/>
-            <a:ext cx="6858000" cy="4572000"/>
+            <a:off x="640080" y="1207008"/>
+            <a:ext cx="10972800" cy="365760"/>
           </a:xfrm>
           <a:prstGeom prst="rect">
             <a:avLst/>
@@ -3470,106 +3620,40 @@
           <a:p>
             <a:pPr>
               <a:spcAft>
-                <a:spcPts val="600"/>
-              </a:spcAft>
-            </a:pPr>
-            <a:r>
-              <a:rPr sz="1800">
-                <a:solidFill>
-                  <a:srgbClr val="1F2A3D"/>
+                <a:spcPts val="400"/>
+              </a:spcAft>
+            </a:pPr>
+            <a:r>
+              <a:rPr sz="1400" b="0">
+                <a:solidFill>
+                  <a:srgbClr val="6B7280"/>
                 </a:solidFill>
                 <a:latin typeface="Calibri"/>
               </a:rPr>
-              <a:t>  Clinicians face cognitive overload synthesizing symptoms, history, and the medical literature.</a:t>
-            </a:r>
-          </a:p>
-          <a:p>
-            <a:pPr>
-              <a:spcAft>
-                <a:spcPts val="600"/>
-              </a:spcAft>
-            </a:pPr>
-            <a:r>
-              <a:rPr sz="1800">
-                <a:solidFill>
-                  <a:srgbClr val="1F2A3D"/>
-                </a:solidFill>
-                <a:latin typeface="Calibri"/>
-              </a:rPr>
-              <a:t>  Existing tools either rely on hand-built ontologies (expensive) or are black-box models (no explanation).</a:t>
-            </a:r>
-          </a:p>
-          <a:p>
-            <a:pPr>
-              <a:spcAft>
-                <a:spcPts val="600"/>
-              </a:spcAft>
-            </a:pPr>
-            <a:r>
-              <a:rPr sz="1800">
-                <a:solidFill>
-                  <a:srgbClr val="1F2A3D"/>
-                </a:solidFill>
-                <a:latin typeface="Calibri"/>
-              </a:rPr>
-              <a:t>  Goal: surface ranked diagnoses from a symptom set AND ground each one in citable evidence.</a:t>
-            </a:r>
-          </a:p>
-          <a:p>
-            <a:pPr>
-              <a:spcAft>
-                <a:spcPts val="600"/>
-              </a:spcAft>
-            </a:pPr>
-            <a:r>
-              <a:rPr sz="1800">
-                <a:solidFill>
-                  <a:srgbClr val="1F2A3D"/>
-                </a:solidFill>
-                <a:latin typeface="Calibri"/>
-              </a:rPr>
-              <a:t>  Our angle: combine interpretable association rules with a biomedical retrieval index.</a:t>
-            </a:r>
-          </a:p>
-          <a:p>
-            <a:pPr>
-              <a:spcAft>
-                <a:spcPts val="600"/>
-              </a:spcAft>
-            </a:pPr>
-            <a:r>
-              <a:rPr sz="1800">
-                <a:solidFill>
-                  <a:srgbClr val="1F2A3D"/>
-                </a:solidFill>
-                <a:latin typeface="Calibri"/>
-              </a:rPr>
-              <a:t>  Every prediction in our system is auditable through both a mined rule and the retrieved passage.</a:t>
-            </a:r>
-          </a:p>
-        </p:txBody>
-      </p:sp>
-      <p:sp>
-        <p:nvSpPr>
-          <p:cNvPr id="6" name="Rounded Rectangle 5"/>
+              <a:t>Two failure modes in deployed clinical-AI tools today</a:t>
+            </a:r>
+          </a:p>
+        </p:txBody>
+      </p:sp>
+      <p:sp>
+        <p:nvSpPr>
+          <p:cNvPr id="6" name="Rectangle 5"/>
           <p:cNvSpPr/>
           <p:nvPr/>
         </p:nvSpPr>
         <p:spPr>
           <a:xfrm>
-            <a:off x="7680960" y="1554480"/>
-            <a:ext cx="4023360" cy="4572000"/>
-          </a:xfrm>
-          <a:prstGeom prst="roundRect">
+            <a:off x="457200" y="1627632"/>
+            <a:ext cx="11338560" cy="13716"/>
+          </a:xfrm>
+          <a:prstGeom prst="rect">
             <a:avLst/>
           </a:prstGeom>
           <a:solidFill>
-            <a:srgbClr val="F6F8FC"/>
+            <a:srgbClr val="E5ECF5"/>
           </a:solidFill>
-          <a:ln w="19050">
-            <a:solidFill>
-              <a:srgbClr val="3A86FF"/>
-            </a:solidFill>
+          <a:ln>
+            <a:noFill/>
           </a:ln>
         </p:spPr>
         <p:style>
@@ -3596,14 +3680,104 @@
       </p:sp>
       <p:sp>
         <p:nvSpPr>
-          <p:cNvPr id="7" name="TextBox 6"/>
+          <p:cNvPr id="7" name="Rounded Rectangle 6"/>
+          <p:cNvSpPr/>
+          <p:nvPr/>
+        </p:nvSpPr>
+        <p:spPr>
+          <a:xfrm>
+            <a:off x="457200" y="1874519"/>
+            <a:ext cx="5303520" cy="1783080"/>
+          </a:xfrm>
+          <a:prstGeom prst="roundRect">
+            <a:avLst>
+              <a:gd name="adj" fmla="val 8000"/>
+            </a:avLst>
+          </a:prstGeom>
+          <a:solidFill>
+            <a:srgbClr val="FFFFFF"/>
+          </a:solidFill>
+          <a:ln w="19050">
+            <a:solidFill>
+              <a:srgbClr val="EF476F"/>
+            </a:solidFill>
+          </a:ln>
+        </p:spPr>
+        <p:style>
+          <a:lnRef idx="1">
+            <a:schemeClr val="accent1"/>
+          </a:lnRef>
+          <a:fillRef idx="3">
+            <a:schemeClr val="accent1"/>
+          </a:fillRef>
+          <a:effectRef idx="2">
+            <a:schemeClr val="accent1"/>
+          </a:effectRef>
+          <a:fontRef idx="minor">
+            <a:schemeClr val="lt1"/>
+          </a:fontRef>
+        </p:style>
+        <p:txBody>
+          <a:bodyPr rtlCol="0" anchor="ctr"/>
+          <a:lstStyle/>
+          <a:p>
+            <a:pPr algn="ctr"/>
+          </a:p>
+        </p:txBody>
+      </p:sp>
+      <p:sp>
+        <p:nvSpPr>
+          <p:cNvPr id="8" name="Rectangle 7"/>
+          <p:cNvSpPr/>
+          <p:nvPr/>
+        </p:nvSpPr>
+        <p:spPr>
+          <a:xfrm>
+            <a:off x="457200" y="1874519"/>
+            <a:ext cx="91440" cy="1783080"/>
+          </a:xfrm>
+          <a:prstGeom prst="rect">
+            <a:avLst/>
+          </a:prstGeom>
+          <a:solidFill>
+            <a:srgbClr val="EF476F"/>
+          </a:solidFill>
+          <a:ln>
+            <a:noFill/>
+          </a:ln>
+        </p:spPr>
+        <p:style>
+          <a:lnRef idx="1">
+            <a:schemeClr val="accent1"/>
+          </a:lnRef>
+          <a:fillRef idx="3">
+            <a:schemeClr val="accent1"/>
+          </a:fillRef>
+          <a:effectRef idx="2">
+            <a:schemeClr val="accent1"/>
+          </a:effectRef>
+          <a:fontRef idx="minor">
+            <a:schemeClr val="lt1"/>
+          </a:fontRef>
+        </p:style>
+        <p:txBody>
+          <a:bodyPr rtlCol="0" anchor="ctr"/>
+          <a:lstStyle/>
+          <a:p>
+            <a:pPr algn="ctr"/>
+          </a:p>
+        </p:txBody>
+      </p:sp>
+      <p:sp>
+        <p:nvSpPr>
+          <p:cNvPr id="9" name="TextBox 8"/>
           <p:cNvSpPr txBox="1"/>
           <p:nvPr/>
         </p:nvSpPr>
         <p:spPr>
           <a:xfrm>
-            <a:off x="7863840" y="1691640"/>
-            <a:ext cx="3657600" cy="411480"/>
+            <a:off x="731520" y="2057399"/>
+            <a:ext cx="4937760" cy="365760"/>
           </a:xfrm>
           <a:prstGeom prst="rect">
             <a:avLst/>
@@ -3616,28 +3790,33 @@
           </a:bodyPr>
           <a:lstStyle/>
           <a:p>
-            <a:r>
-              <a:rPr sz="1800" b="1">
-                <a:solidFill>
-                  <a:srgbClr val="0D3B66"/>
+            <a:pPr>
+              <a:spcAft>
+                <a:spcPts val="400"/>
+              </a:spcAft>
+            </a:pPr>
+            <a:r>
+              <a:rPr sz="1500" b="1">
+                <a:solidFill>
+                  <a:srgbClr val="EF476F"/>
                 </a:solidFill>
                 <a:latin typeface="Calibri"/>
               </a:rPr>
-              <a:t>By the numbers</a:t>
-            </a:r>
-          </a:p>
-        </p:txBody>
-      </p:sp>
-      <p:sp>
-        <p:nvSpPr>
-          <p:cNvPr id="8" name="TextBox 7"/>
+              <a:t>Hand-built ontologies</a:t>
+            </a:r>
+          </a:p>
+        </p:txBody>
+      </p:sp>
+      <p:sp>
+        <p:nvSpPr>
+          <p:cNvPr id="10" name="TextBox 9"/>
           <p:cNvSpPr txBox="1"/>
           <p:nvPr/>
         </p:nvSpPr>
         <p:spPr>
           <a:xfrm>
-            <a:off x="7863840" y="2194560"/>
-            <a:ext cx="3657600" cy="4114800"/>
+            <a:off x="731520" y="2468879"/>
+            <a:ext cx="4937760" cy="1143000"/>
           </a:xfrm>
           <a:prstGeom prst="rect">
             <a:avLst/>
@@ -3652,111 +3831,121 @@
           <a:p>
             <a:pPr>
               <a:spcAft>
-                <a:spcPts val="600"/>
-              </a:spcAft>
-            </a:pPr>
-            <a:r>
-              <a:rPr sz="1500">
-                <a:solidFill>
-                  <a:srgbClr val="1F2A3D"/>
+                <a:spcPts val="400"/>
+              </a:spcAft>
+            </a:pPr>
+            <a:r>
+              <a:rPr sz="1200" b="0">
+                <a:solidFill>
+                  <a:srgbClr val="1A2333"/>
                 </a:solidFill>
                 <a:latin typeface="Calibri"/>
               </a:rPr>
-              <a:t>  4,920 patient records</a:t>
-            </a:r>
-          </a:p>
-          <a:p>
-            <a:pPr>
-              <a:spcAft>
-                <a:spcPts val="600"/>
-              </a:spcAft>
-            </a:pPr>
-            <a:r>
-              <a:rPr sz="1500">
-                <a:solidFill>
-                  <a:srgbClr val="1F2A3D"/>
-                </a:solidFill>
-                <a:latin typeface="Calibri"/>
-              </a:rPr>
-              <a:t>  41 diseases, 131 symptom tokens</a:t>
-            </a:r>
-          </a:p>
-          <a:p>
-            <a:pPr>
-              <a:spcAft>
-                <a:spcPts val="600"/>
-              </a:spcAft>
-            </a:pPr>
-            <a:r>
-              <a:rPr sz="1500">
-                <a:solidFill>
-                  <a:srgbClr val="1F2A3D"/>
-                </a:solidFill>
-                <a:latin typeface="Calibri"/>
-              </a:rPr>
-              <a:t>  23,839 association rules mined</a:t>
-            </a:r>
-          </a:p>
-          <a:p>
-            <a:pPr>
-              <a:spcAft>
-                <a:spcPts val="600"/>
-              </a:spcAft>
-            </a:pPr>
-            <a:r>
-              <a:rPr sz="1500">
-                <a:solidFill>
-                  <a:srgbClr val="1F2A3D"/>
-                </a:solidFill>
-                <a:latin typeface="Calibri"/>
-              </a:rPr>
-              <a:t>  24,063 MedQuAD passages indexed</a:t>
-            </a:r>
-          </a:p>
-          <a:p>
-            <a:pPr>
-              <a:spcAft>
-                <a:spcPts val="600"/>
-              </a:spcAft>
-            </a:pPr>
-            <a:r>
-              <a:rPr sz="1500">
-                <a:solidFill>
-                  <a:srgbClr val="1F2A3D"/>
-                </a:solidFill>
-                <a:latin typeface="Calibri"/>
-              </a:rPr>
-              <a:t>  200 synthetic test cases</a:t>
-            </a:r>
-          </a:p>
-          <a:p>
-            <a:pPr>
-              <a:spcAft>
-                <a:spcPts val="600"/>
-              </a:spcAft>
-            </a:pPr>
-            <a:r>
-              <a:rPr sz="1500">
-                <a:solidFill>
-                  <a:srgbClr val="1F2A3D"/>
-                </a:solidFill>
-                <a:latin typeface="Calibri"/>
-              </a:rPr>
-              <a:t>  82.5% Recall@1, 0.857 MRR</a:t>
-            </a:r>
-          </a:p>
-        </p:txBody>
-      </p:sp>
-      <p:sp>
-        <p:nvSpPr>
-          <p:cNvPr id="9" name="TextBox 8"/>
+              <a:t>Expensive to maintain, brittle to new vocabulary, and they lock you into one domain expert's mental model. Updates lag the literature by years.</a:t>
+            </a:r>
+          </a:p>
+        </p:txBody>
+      </p:sp>
+      <p:sp>
+        <p:nvSpPr>
+          <p:cNvPr id="11" name="Rounded Rectangle 10"/>
+          <p:cNvSpPr/>
+          <p:nvPr/>
+        </p:nvSpPr>
+        <p:spPr>
+          <a:xfrm>
+            <a:off x="457200" y="3749039"/>
+            <a:ext cx="5303520" cy="1783080"/>
+          </a:xfrm>
+          <a:prstGeom prst="roundRect">
+            <a:avLst>
+              <a:gd name="adj" fmla="val 8000"/>
+            </a:avLst>
+          </a:prstGeom>
+          <a:solidFill>
+            <a:srgbClr val="FFFFFF"/>
+          </a:solidFill>
+          <a:ln w="19050">
+            <a:solidFill>
+              <a:srgbClr val="F59E0B"/>
+            </a:solidFill>
+          </a:ln>
+        </p:spPr>
+        <p:style>
+          <a:lnRef idx="1">
+            <a:schemeClr val="accent1"/>
+          </a:lnRef>
+          <a:fillRef idx="3">
+            <a:schemeClr val="accent1"/>
+          </a:fillRef>
+          <a:effectRef idx="2">
+            <a:schemeClr val="accent1"/>
+          </a:effectRef>
+          <a:fontRef idx="minor">
+            <a:schemeClr val="lt1"/>
+          </a:fontRef>
+        </p:style>
+        <p:txBody>
+          <a:bodyPr rtlCol="0" anchor="ctr"/>
+          <a:lstStyle/>
+          <a:p>
+            <a:pPr algn="ctr"/>
+          </a:p>
+        </p:txBody>
+      </p:sp>
+      <p:sp>
+        <p:nvSpPr>
+          <p:cNvPr id="12" name="Rectangle 11"/>
+          <p:cNvSpPr/>
+          <p:nvPr/>
+        </p:nvSpPr>
+        <p:spPr>
+          <a:xfrm>
+            <a:off x="457200" y="3749039"/>
+            <a:ext cx="91440" cy="1783080"/>
+          </a:xfrm>
+          <a:prstGeom prst="rect">
+            <a:avLst/>
+          </a:prstGeom>
+          <a:solidFill>
+            <a:srgbClr val="F59E0B"/>
+          </a:solidFill>
+          <a:ln>
+            <a:noFill/>
+          </a:ln>
+        </p:spPr>
+        <p:style>
+          <a:lnRef idx="1">
+            <a:schemeClr val="accent1"/>
+          </a:lnRef>
+          <a:fillRef idx="3">
+            <a:schemeClr val="accent1"/>
+          </a:fillRef>
+          <a:effectRef idx="2">
+            <a:schemeClr val="accent1"/>
+          </a:effectRef>
+          <a:fontRef idx="minor">
+            <a:schemeClr val="lt1"/>
+          </a:fontRef>
+        </p:style>
+        <p:txBody>
+          <a:bodyPr rtlCol="0" anchor="ctr"/>
+          <a:lstStyle/>
+          <a:p>
+            <a:pPr algn="ctr"/>
+          </a:p>
+        </p:txBody>
+      </p:sp>
+      <p:sp>
+        <p:nvSpPr>
+          <p:cNvPr id="13" name="TextBox 12"/>
           <p:cNvSpPr txBox="1"/>
           <p:nvPr/>
         </p:nvSpPr>
         <p:spPr>
           <a:xfrm>
-            <a:off x="365760" y="6492240"/>
-            <a:ext cx="10058400" cy="274320"/>
+            <a:off x="731520" y="3931919"/>
+            <a:ext cx="4937760" cy="365760"/>
           </a:xfrm>
           <a:prstGeom prst="rect">
             <a:avLst/>
@@ -3769,14 +3958,471 @@
           </a:bodyPr>
           <a:lstStyle/>
           <a:p>
-            <a:r>
-              <a:rPr sz="1000" b="0">
+            <a:pPr>
+              <a:spcAft>
+                <a:spcPts val="400"/>
+              </a:spcAft>
+            </a:pPr>
+            <a:r>
+              <a:rPr sz="1500" b="1">
+                <a:solidFill>
+                  <a:srgbClr val="F59E0B"/>
+                </a:solidFill>
+                <a:latin typeface="Calibri"/>
+              </a:rPr>
+              <a:t>Black-box LLMs</a:t>
+            </a:r>
+          </a:p>
+        </p:txBody>
+      </p:sp>
+      <p:sp>
+        <p:nvSpPr>
+          <p:cNvPr id="14" name="TextBox 13"/>
+          <p:cNvSpPr txBox="1"/>
+          <p:nvPr/>
+        </p:nvSpPr>
+        <p:spPr>
+          <a:xfrm>
+            <a:off x="731520" y="4343399"/>
+            <a:ext cx="4937760" cy="1143000"/>
+          </a:xfrm>
+          <a:prstGeom prst="rect">
+            <a:avLst/>
+          </a:prstGeom>
+          <a:noFill/>
+        </p:spPr>
+        <p:txBody>
+          <a:bodyPr wrap="square">
+            <a:spAutoFit/>
+          </a:bodyPr>
+          <a:lstStyle/>
+          <a:p>
+            <a:pPr>
+              <a:spcAft>
+                <a:spcPts val="400"/>
+              </a:spcAft>
+            </a:pPr>
+            <a:r>
+              <a:rPr sz="1200" b="0">
+                <a:solidFill>
+                  <a:srgbClr val="1A2333"/>
+                </a:solidFill>
+                <a:latin typeface="Calibri"/>
+              </a:rPr>
+              <a:t>Confident-sounding outputs without citations. Hallucination is silent. A clinician cannot defend the answer to a peer or to a patient.</a:t>
+            </a:r>
+          </a:p>
+        </p:txBody>
+      </p:sp>
+      <p:sp>
+        <p:nvSpPr>
+          <p:cNvPr id="15" name="Rounded Rectangle 14"/>
+          <p:cNvSpPr/>
+          <p:nvPr/>
+        </p:nvSpPr>
+        <p:spPr>
+          <a:xfrm>
+            <a:off x="6400800" y="1874519"/>
+            <a:ext cx="5394960" cy="3657600"/>
+          </a:xfrm>
+          <a:prstGeom prst="roundRect">
+            <a:avLst>
+              <a:gd name="adj" fmla="val 8000"/>
+            </a:avLst>
+          </a:prstGeom>
+          <a:solidFill>
+            <a:srgbClr val="0A2A4F"/>
+          </a:solidFill>
+          <a:ln>
+            <a:noFill/>
+          </a:ln>
+        </p:spPr>
+        <p:style>
+          <a:lnRef idx="1">
+            <a:schemeClr val="accent1"/>
+          </a:lnRef>
+          <a:fillRef idx="3">
+            <a:schemeClr val="accent1"/>
+          </a:fillRef>
+          <a:effectRef idx="2">
+            <a:schemeClr val="accent1"/>
+          </a:effectRef>
+          <a:fontRef idx="minor">
+            <a:schemeClr val="lt1"/>
+          </a:fontRef>
+        </p:style>
+        <p:txBody>
+          <a:bodyPr rtlCol="0" anchor="ctr"/>
+          <a:lstStyle/>
+          <a:p>
+            <a:pPr algn="ctr"/>
+          </a:p>
+        </p:txBody>
+      </p:sp>
+      <p:sp>
+        <p:nvSpPr>
+          <p:cNvPr id="16" name="Rectangle 15"/>
+          <p:cNvSpPr/>
+          <p:nvPr/>
+        </p:nvSpPr>
+        <p:spPr>
+          <a:xfrm>
+            <a:off x="6400800" y="1874519"/>
+            <a:ext cx="91440" cy="3657600"/>
+          </a:xfrm>
+          <a:prstGeom prst="rect">
+            <a:avLst/>
+          </a:prstGeom>
+          <a:solidFill>
+            <a:srgbClr val="3A86FF"/>
+          </a:solidFill>
+          <a:ln>
+            <a:noFill/>
+          </a:ln>
+        </p:spPr>
+        <p:style>
+          <a:lnRef idx="1">
+            <a:schemeClr val="accent1"/>
+          </a:lnRef>
+          <a:fillRef idx="3">
+            <a:schemeClr val="accent1"/>
+          </a:fillRef>
+          <a:effectRef idx="2">
+            <a:schemeClr val="accent1"/>
+          </a:effectRef>
+          <a:fontRef idx="minor">
+            <a:schemeClr val="lt1"/>
+          </a:fontRef>
+        </p:style>
+        <p:txBody>
+          <a:bodyPr rtlCol="0" anchor="ctr"/>
+          <a:lstStyle/>
+          <a:p>
+            <a:pPr algn="ctr"/>
+          </a:p>
+        </p:txBody>
+      </p:sp>
+      <p:sp>
+        <p:nvSpPr>
+          <p:cNvPr id="17" name="TextBox 16"/>
+          <p:cNvSpPr txBox="1"/>
+          <p:nvPr/>
+        </p:nvSpPr>
+        <p:spPr>
+          <a:xfrm>
+            <a:off x="6629400" y="2011680"/>
+            <a:ext cx="5029200" cy="365760"/>
+          </a:xfrm>
+          <a:prstGeom prst="rect">
+            <a:avLst/>
+          </a:prstGeom>
+          <a:noFill/>
+        </p:spPr>
+        <p:txBody>
+          <a:bodyPr wrap="square">
+            <a:spAutoFit/>
+          </a:bodyPr>
+          <a:lstStyle/>
+          <a:p>
+            <a:pPr>
+              <a:spcAft>
+                <a:spcPts val="400"/>
+              </a:spcAft>
+            </a:pPr>
+            <a:r>
+              <a:rPr sz="1100" b="1">
+                <a:solidFill>
+                  <a:srgbClr val="3A86FF"/>
+                </a:solidFill>
+                <a:latin typeface="Calibri"/>
+              </a:rPr>
+              <a:t>OUR APPROACH</a:t>
+            </a:r>
+          </a:p>
+        </p:txBody>
+      </p:sp>
+      <p:sp>
+        <p:nvSpPr>
+          <p:cNvPr id="18" name="TextBox 17"/>
+          <p:cNvSpPr txBox="1"/>
+          <p:nvPr/>
+        </p:nvSpPr>
+        <p:spPr>
+          <a:xfrm>
+            <a:off x="6629400" y="2331720"/>
+            <a:ext cx="5029200" cy="548640"/>
+          </a:xfrm>
+          <a:prstGeom prst="rect">
+            <a:avLst/>
+          </a:prstGeom>
+          <a:noFill/>
+        </p:spPr>
+        <p:txBody>
+          <a:bodyPr wrap="square">
+            <a:spAutoFit/>
+          </a:bodyPr>
+          <a:lstStyle/>
+          <a:p>
+            <a:pPr>
+              <a:spcAft>
+                <a:spcPts val="400"/>
+              </a:spcAft>
+            </a:pPr>
+            <a:r>
+              <a:rPr sz="2200" b="1">
+                <a:solidFill>
+                  <a:srgbClr val="FFFFFF"/>
+                </a:solidFill>
+                <a:latin typeface="Calibri"/>
+              </a:rPr>
+              <a:t>Auditable by construction</a:t>
+            </a:r>
+          </a:p>
+        </p:txBody>
+      </p:sp>
+      <p:sp>
+        <p:nvSpPr>
+          <p:cNvPr id="19" name="TextBox 18"/>
+          <p:cNvSpPr txBox="1"/>
+          <p:nvPr/>
+        </p:nvSpPr>
+        <p:spPr>
+          <a:xfrm>
+            <a:off x="6629400" y="2880360"/>
+            <a:ext cx="5029200" cy="2606040"/>
+          </a:xfrm>
+          <a:prstGeom prst="rect">
+            <a:avLst/>
+          </a:prstGeom>
+          <a:noFill/>
+        </p:spPr>
+        <p:txBody>
+          <a:bodyPr wrap="square">
+            <a:spAutoFit/>
+          </a:bodyPr>
+          <a:lstStyle/>
+          <a:p>
+            <a:pPr>
+              <a:spcAft>
+                <a:spcPts val="400"/>
+              </a:spcAft>
+            </a:pPr>
+            <a:r>
+              <a:rPr sz="1300" b="0">
+                <a:solidFill>
+                  <a:srgbClr val="CBD5E1"/>
+                </a:solidFill>
+                <a:latin typeface="Calibri"/>
+              </a:rPr>
+              <a:t>Every prediction is grounded in two complementary signals:
+(1) an FP-Growth rule mined from real patient records, and
+(2) a biomedical passage retrieved from MedQuAD.
+The clinician sees both. The clinician decides.</a:t>
+            </a:r>
+          </a:p>
+        </p:txBody>
+      </p:sp>
+      <p:sp>
+        <p:nvSpPr>
+          <p:cNvPr id="20" name="Rounded Rectangle 19"/>
+          <p:cNvSpPr/>
+          <p:nvPr/>
+        </p:nvSpPr>
+        <p:spPr>
+          <a:xfrm>
+            <a:off x="457200" y="5669280"/>
+            <a:ext cx="11338560" cy="594360"/>
+          </a:xfrm>
+          <a:prstGeom prst="roundRect">
+            <a:avLst>
+              <a:gd name="adj" fmla="val 8000"/>
+            </a:avLst>
+          </a:prstGeom>
+          <a:solidFill>
+            <a:srgbClr val="E5ECF5"/>
+          </a:solidFill>
+          <a:ln>
+            <a:noFill/>
+          </a:ln>
+        </p:spPr>
+        <p:style>
+          <a:lnRef idx="1">
+            <a:schemeClr val="accent1"/>
+          </a:lnRef>
+          <a:fillRef idx="3">
+            <a:schemeClr val="accent1"/>
+          </a:fillRef>
+          <a:effectRef idx="2">
+            <a:schemeClr val="accent1"/>
+          </a:effectRef>
+          <a:fontRef idx="minor">
+            <a:schemeClr val="lt1"/>
+          </a:fontRef>
+        </p:style>
+        <p:txBody>
+          <a:bodyPr rtlCol="0" anchor="ctr"/>
+          <a:lstStyle/>
+          <a:p>
+            <a:pPr algn="ctr"/>
+          </a:p>
+        </p:txBody>
+      </p:sp>
+      <p:sp>
+        <p:nvSpPr>
+          <p:cNvPr id="21" name="TextBox 20"/>
+          <p:cNvSpPr txBox="1"/>
+          <p:nvPr/>
+        </p:nvSpPr>
+        <p:spPr>
+          <a:xfrm>
+            <a:off x="640080" y="5760720"/>
+            <a:ext cx="10972800" cy="457200"/>
+          </a:xfrm>
+          <a:prstGeom prst="rect">
+            <a:avLst/>
+          </a:prstGeom>
+          <a:noFill/>
+        </p:spPr>
+        <p:txBody>
+          <a:bodyPr wrap="square">
+            <a:spAutoFit/>
+          </a:bodyPr>
+          <a:lstStyle/>
+          <a:p>
+            <a:pPr>
+              <a:spcAft>
+                <a:spcPts val="400"/>
+              </a:spcAft>
+            </a:pPr>
+            <a:r>
+              <a:rPr sz="1200" b="1">
+                <a:solidFill>
+                  <a:srgbClr val="0A2A4F"/>
+                </a:solidFill>
+                <a:latin typeface="Calibri"/>
+              </a:rPr>
+              <a:t>Scope: 41 disease classes  ·  131 symptom tokens  ·  4,920 patient transactions  ·  24,063 indexed passages</a:t>
+            </a:r>
+          </a:p>
+        </p:txBody>
+      </p:sp>
+      <p:sp>
+        <p:nvSpPr>
+          <p:cNvPr id="22" name="Rectangle 21"/>
+          <p:cNvSpPr/>
+          <p:nvPr/>
+        </p:nvSpPr>
+        <p:spPr>
+          <a:xfrm>
+            <a:off x="457200" y="6473952"/>
+            <a:ext cx="11338560" cy="13716"/>
+          </a:xfrm>
+          <a:prstGeom prst="rect">
+            <a:avLst/>
+          </a:prstGeom>
+          <a:solidFill>
+            <a:srgbClr val="E5ECF5"/>
+          </a:solidFill>
+          <a:ln>
+            <a:noFill/>
+          </a:ln>
+        </p:spPr>
+        <p:style>
+          <a:lnRef idx="1">
+            <a:schemeClr val="accent1"/>
+          </a:lnRef>
+          <a:fillRef idx="3">
+            <a:schemeClr val="accent1"/>
+          </a:fillRef>
+          <a:effectRef idx="2">
+            <a:schemeClr val="accent1"/>
+          </a:effectRef>
+          <a:fontRef idx="minor">
+            <a:schemeClr val="lt1"/>
+          </a:fontRef>
+        </p:style>
+        <p:txBody>
+          <a:bodyPr rtlCol="0" anchor="ctr"/>
+          <a:lstStyle/>
+          <a:p>
+            <a:pPr algn="ctr"/>
+          </a:p>
+        </p:txBody>
+      </p:sp>
+      <p:sp>
+        <p:nvSpPr>
+          <p:cNvPr id="23" name="TextBox 22"/>
+          <p:cNvSpPr txBox="1"/>
+          <p:nvPr/>
+        </p:nvSpPr>
+        <p:spPr>
+          <a:xfrm>
+            <a:off x="457200" y="6528816"/>
+            <a:ext cx="6400800" cy="274320"/>
+          </a:xfrm>
+          <a:prstGeom prst="rect">
+            <a:avLst/>
+          </a:prstGeom>
+          <a:noFill/>
+        </p:spPr>
+        <p:txBody>
+          <a:bodyPr wrap="square">
+            <a:spAutoFit/>
+          </a:bodyPr>
+          <a:lstStyle/>
+          <a:p>
+            <a:pPr>
+              <a:spcAft>
+                <a:spcPts val="400"/>
+              </a:spcAft>
+            </a:pPr>
+            <a:r>
+              <a:rPr sz="900" b="0">
                 <a:solidFill>
                   <a:srgbClr val="6B7280"/>
                 </a:solidFill>
                 <a:latin typeface="Calibri"/>
               </a:rPr>
-              <a:t>CMPE 255 Spring 2026, Sakshat Patil, Vineet Kumar, Aishwarya Madhave, Slide 1 of 7</a:t>
+              <a:t>CMPE 255 Spring 2026  |  Patil, Kumar, Madhave</a:t>
+            </a:r>
+          </a:p>
+        </p:txBody>
+      </p:sp>
+      <p:sp>
+        <p:nvSpPr>
+          <p:cNvPr id="24" name="TextBox 23"/>
+          <p:cNvSpPr txBox="1"/>
+          <p:nvPr/>
+        </p:nvSpPr>
+        <p:spPr>
+          <a:xfrm>
+            <a:off x="7772400" y="6528816"/>
+            <a:ext cx="4023360" cy="274320"/>
+          </a:xfrm>
+          <a:prstGeom prst="rect">
+            <a:avLst/>
+          </a:prstGeom>
+          <a:noFill/>
+        </p:spPr>
+        <p:txBody>
+          <a:bodyPr wrap="square">
+            <a:spAutoFit/>
+          </a:bodyPr>
+          <a:lstStyle/>
+          <a:p>
+            <a:pPr algn="r">
+              <a:spcAft>
+                <a:spcPts val="400"/>
+              </a:spcAft>
+            </a:pPr>
+            <a:r>
+              <a:rPr sz="900" b="0">
+                <a:solidFill>
+                  <a:srgbClr val="6B7280"/>
+                </a:solidFill>
+                <a:latin typeface="Calibri"/>
+              </a:rPr>
+              <a:t>1 / 7</a:t>
             </a:r>
           </a:p>
         </p:txBody>
@@ -3807,14 +4453,14 @@
         </p:nvSpPr>
         <p:spPr>
           <a:xfrm>
-            <a:off x="0" y="0"/>
-            <a:ext cx="12191695" cy="411480"/>
+            <a:off x="457200" y="457200"/>
+            <a:ext cx="73152" cy="502920"/>
           </a:xfrm>
           <a:prstGeom prst="rect">
             <a:avLst/>
           </a:prstGeom>
           <a:solidFill>
-            <a:srgbClr val="0D3B66"/>
+            <a:srgbClr val="3A86FF"/>
           </a:solidFill>
           <a:ln>
             <a:noFill/>
@@ -3850,8 +4496,8 @@
         </p:nvSpPr>
         <p:spPr>
           <a:xfrm>
-            <a:off x="457200" y="502920"/>
-            <a:ext cx="10972800" cy="640080"/>
+            <a:off x="640080" y="457200"/>
+            <a:ext cx="7315200" cy="274320"/>
           </a:xfrm>
           <a:prstGeom prst="rect">
             <a:avLst/>
@@ -3864,14 +4510,19 @@
           </a:bodyPr>
           <a:lstStyle/>
           <a:p>
-            <a:r>
-              <a:rPr sz="2600" b="1">
-                <a:solidFill>
-                  <a:srgbClr val="0D3B66"/>
+            <a:pPr>
+              <a:spcAft>
+                <a:spcPts val="400"/>
+              </a:spcAft>
+            </a:pPr>
+            <a:r>
+              <a:rPr sz="1000" b="1">
+                <a:solidFill>
+                  <a:srgbClr val="3A86FF"/>
                 </a:solidFill>
                 <a:latin typeface="Calibri"/>
               </a:rPr>
-              <a:t>2. System Architecture</a:t>
+              <a:t>SLIDE 02  /  ARCHITECTURE</a:t>
             </a:r>
           </a:p>
         </p:txBody>
@@ -3884,8 +4535,8 @@
         </p:nvSpPr>
         <p:spPr>
           <a:xfrm>
-            <a:off x="457200" y="1051560"/>
-            <a:ext cx="10972800" cy="365760"/>
+            <a:off x="640080" y="713232"/>
+            <a:ext cx="10972800" cy="502920"/>
           </a:xfrm>
           <a:prstGeom prst="rect">
             <a:avLst/>
@@ -3898,6 +4549,50 @@
           </a:bodyPr>
           <a:lstStyle/>
           <a:p>
+            <a:pPr>
+              <a:spcAft>
+                <a:spcPts val="400"/>
+              </a:spcAft>
+            </a:pPr>
+            <a:r>
+              <a:rPr sz="2800" b="1">
+                <a:solidFill>
+                  <a:srgbClr val="0A2A4F"/>
+                </a:solidFill>
+                <a:latin typeface="Calibri"/>
+              </a:rPr>
+              <a:t>System at a glance</a:t>
+            </a:r>
+          </a:p>
+        </p:txBody>
+      </p:sp>
+      <p:sp>
+        <p:nvSpPr>
+          <p:cNvPr id="5" name="TextBox 4"/>
+          <p:cNvSpPr txBox="1"/>
+          <p:nvPr/>
+        </p:nvSpPr>
+        <p:spPr>
+          <a:xfrm>
+            <a:off x="640080" y="1207008"/>
+            <a:ext cx="10972800" cy="365760"/>
+          </a:xfrm>
+          <a:prstGeom prst="rect">
+            <a:avLst/>
+          </a:prstGeom>
+          <a:noFill/>
+        </p:spPr>
+        <p:txBody>
+          <a:bodyPr wrap="square">
+            <a:spAutoFit/>
+          </a:bodyPr>
+          <a:lstStyle/>
+          <a:p>
+            <a:pPr>
+              <a:spcAft>
+                <a:spcPts val="400"/>
+              </a:spcAft>
+            </a:pPr>
             <a:r>
               <a:rPr sz="1400" b="0">
                 <a:solidFill>
@@ -3905,32 +4600,30 @@
                 </a:solidFill>
                 <a:latin typeface="Calibri"/>
               </a:rPr>
-              <a:t>All six proposal steps wired together</a:t>
-            </a:r>
-          </a:p>
-        </p:txBody>
-      </p:sp>
-      <p:sp>
-        <p:nvSpPr>
-          <p:cNvPr id="5" name="Rounded Rectangle 4"/>
+              <a:t>Three-tier stack covering all six proposal steps</a:t>
+            </a:r>
+          </a:p>
+        </p:txBody>
+      </p:sp>
+      <p:sp>
+        <p:nvSpPr>
+          <p:cNvPr id="6" name="Rectangle 5"/>
           <p:cNvSpPr/>
           <p:nvPr/>
         </p:nvSpPr>
         <p:spPr>
           <a:xfrm>
-            <a:off x="274320" y="1691640"/>
-            <a:ext cx="3749039" cy="2103120"/>
-          </a:xfrm>
-          <a:prstGeom prst="roundRect">
+            <a:off x="457200" y="1627632"/>
+            <a:ext cx="11338560" cy="13716"/>
+          </a:xfrm>
+          <a:prstGeom prst="rect">
             <a:avLst/>
           </a:prstGeom>
           <a:solidFill>
-            <a:srgbClr val="F6F8FC"/>
+            <a:srgbClr val="E5ECF5"/>
           </a:solidFill>
-          <a:ln w="25400">
-            <a:solidFill>
-              <a:srgbClr val="6B7280"/>
-            </a:solidFill>
+          <a:ln>
+            <a:noFill/>
           </a:ln>
         </p:spPr>
         <p:style>
@@ -3957,146 +4650,26 @@
       </p:sp>
       <p:sp>
         <p:nvSpPr>
-          <p:cNvPr id="6" name="TextBox 5"/>
-          <p:cNvSpPr txBox="1"/>
-          <p:nvPr/>
-        </p:nvSpPr>
-        <p:spPr>
-          <a:xfrm>
-            <a:off x="274320" y="1783080"/>
-            <a:ext cx="3749039" cy="411480"/>
-          </a:xfrm>
-          <a:prstGeom prst="rect">
-            <a:avLst/>
-          </a:prstGeom>
-          <a:noFill/>
-        </p:spPr>
-        <p:txBody>
-          <a:bodyPr wrap="square">
-            <a:spAutoFit/>
-          </a:bodyPr>
-          <a:lstStyle/>
-          <a:p>
-            <a:pPr algn="l"/>
-            <a:r>
-              <a:rPr sz="1400" b="1">
-                <a:solidFill>
-                  <a:srgbClr val="6B7280"/>
-                </a:solidFill>
-                <a:latin typeface="Calibri"/>
-              </a:rPr>
-              <a:t>Step 1. Data ETL</a:t>
-            </a:r>
-          </a:p>
-        </p:txBody>
-      </p:sp>
-      <p:sp>
-        <p:nvSpPr>
-          <p:cNvPr id="7" name="TextBox 6"/>
-          <p:cNvSpPr txBox="1"/>
-          <p:nvPr/>
-        </p:nvSpPr>
-        <p:spPr>
-          <a:xfrm>
-            <a:off x="457200" y="2240280"/>
-            <a:ext cx="3383279" cy="1463039"/>
-          </a:xfrm>
-          <a:prstGeom prst="rect">
-            <a:avLst/>
-          </a:prstGeom>
-          <a:noFill/>
-        </p:spPr>
-        <p:txBody>
-          <a:bodyPr wrap="square">
-            <a:spAutoFit/>
-          </a:bodyPr>
-          <a:lstStyle/>
-          <a:p>
-            <a:pPr>
-              <a:spcAft>
-                <a:spcPts val="600"/>
-              </a:spcAft>
-            </a:pPr>
-            <a:r>
-              <a:rPr sz="1100">
-                <a:solidFill>
-                  <a:srgbClr val="1F2A3D"/>
-                </a:solidFill>
-                <a:latin typeface="Calibri"/>
-              </a:rPr>
-              <a:t>  Kaggle CSV to 4,920 transactions</a:t>
-            </a:r>
-          </a:p>
-          <a:p>
-            <a:pPr>
-              <a:spcAft>
-                <a:spcPts val="600"/>
-              </a:spcAft>
-            </a:pPr>
-            <a:r>
-              <a:rPr sz="1100">
-                <a:solidFill>
-                  <a:srgbClr val="1F2A3D"/>
-                </a:solidFill>
-                <a:latin typeface="Calibri"/>
-              </a:rPr>
-              <a:t>  Synthea FHIR ETL (parallel path)</a:t>
-            </a:r>
-          </a:p>
-          <a:p>
-            <a:pPr>
-              <a:spcAft>
-                <a:spcPts val="600"/>
-              </a:spcAft>
-            </a:pPr>
-            <a:r>
-              <a:rPr sz="1100">
-                <a:solidFill>
-                  <a:srgbClr val="1F2A3D"/>
-                </a:solidFill>
-                <a:latin typeface="Calibri"/>
-              </a:rPr>
-              <a:t>  131 unique symptom tokens</a:t>
-            </a:r>
-          </a:p>
-          <a:p>
-            <a:pPr>
-              <a:spcAft>
-                <a:spcPts val="600"/>
-              </a:spcAft>
-            </a:pPr>
-            <a:r>
-              <a:rPr sz="1100">
-                <a:solidFill>
-                  <a:srgbClr val="1F2A3D"/>
-                </a:solidFill>
-                <a:latin typeface="Calibri"/>
-              </a:rPr>
-              <a:t>  Sakshat (owner)</a:t>
-            </a:r>
-          </a:p>
-        </p:txBody>
-      </p:sp>
-      <p:sp>
-        <p:nvSpPr>
-          <p:cNvPr id="8" name="Rounded Rectangle 7"/>
+          <p:cNvPr id="7" name="Rounded Rectangle 6"/>
           <p:cNvSpPr/>
           <p:nvPr/>
         </p:nvSpPr>
         <p:spPr>
           <a:xfrm>
-            <a:off x="4206240" y="1691640"/>
-            <a:ext cx="3749039" cy="2103120"/>
+            <a:off x="457200" y="1874519"/>
+            <a:ext cx="11338560" cy="777240"/>
           </a:xfrm>
           <a:prstGeom prst="roundRect">
-            <a:avLst/>
+            <a:avLst>
+              <a:gd name="adj" fmla="val 8000"/>
+            </a:avLst>
           </a:prstGeom>
           <a:solidFill>
-            <a:srgbClr val="F6F8FC"/>
+            <a:srgbClr val="E5ECF5"/>
           </a:solidFill>
-          <a:ln w="25400">
+          <a:ln w="19050">
             <a:solidFill>
-              <a:srgbClr val="3A86FF"/>
+              <a:srgbClr val="7C3AED"/>
             </a:solidFill>
           </a:ln>
         </p:spPr>
@@ -4124,14 +4697,14 @@
       </p:sp>
       <p:sp>
         <p:nvSpPr>
-          <p:cNvPr id="9" name="TextBox 8"/>
+          <p:cNvPr id="8" name="TextBox 7"/>
           <p:cNvSpPr txBox="1"/>
           <p:nvPr/>
         </p:nvSpPr>
         <p:spPr>
           <a:xfrm>
-            <a:off x="4206240" y="1783080"/>
-            <a:ext cx="3749039" cy="411480"/>
+            <a:off x="640080" y="1993392"/>
+            <a:ext cx="2286000" cy="274320"/>
           </a:xfrm>
           <a:prstGeom prst="rect">
             <a:avLst/>
@@ -4144,29 +4717,33 @@
           </a:bodyPr>
           <a:lstStyle/>
           <a:p>
-            <a:pPr algn="l"/>
-            <a:r>
-              <a:rPr sz="1400" b="1">
-                <a:solidFill>
-                  <a:srgbClr val="3A86FF"/>
+            <a:pPr>
+              <a:spcAft>
+                <a:spcPts val="400"/>
+              </a:spcAft>
+            </a:pPr>
+            <a:r>
+              <a:rPr sz="1000" b="1">
+                <a:solidFill>
+                  <a:srgbClr val="7C3AED"/>
                 </a:solidFill>
                 <a:latin typeface="Calibri"/>
               </a:rPr>
-              <a:t>Step 2. FP-Growth Mining</a:t>
-            </a:r>
-          </a:p>
-        </p:txBody>
-      </p:sp>
-      <p:sp>
-        <p:nvSpPr>
-          <p:cNvPr id="10" name="TextBox 9"/>
+              <a:t>WEB CLIENT</a:t>
+            </a:r>
+          </a:p>
+        </p:txBody>
+      </p:sp>
+      <p:sp>
+        <p:nvSpPr>
+          <p:cNvPr id="9" name="TextBox 8"/>
           <p:cNvSpPr txBox="1"/>
           <p:nvPr/>
         </p:nvSpPr>
         <p:spPr>
           <a:xfrm>
-            <a:off x="4389120" y="2240280"/>
-            <a:ext cx="3383279" cy="1463039"/>
+            <a:off x="640080" y="2240280"/>
+            <a:ext cx="10972800" cy="365760"/>
           </a:xfrm>
           <a:prstGeom prst="rect">
             <a:avLst/>
@@ -4181,65 +4758,56 @@
           <a:p>
             <a:pPr>
               <a:spcAft>
-                <a:spcPts val="600"/>
-              </a:spcAft>
-            </a:pPr>
-            <a:r>
-              <a:rPr sz="1100">
-                <a:solidFill>
-                  <a:srgbClr val="1F2A3D"/>
+                <a:spcPts val="400"/>
+              </a:spcAft>
+            </a:pPr>
+            <a:r>
+              <a:rPr sz="1200" b="0">
+                <a:solidFill>
+                  <a:srgbClr val="1A2333"/>
                 </a:solidFill>
                 <a:latin typeface="Calibri"/>
               </a:rPr>
-              <a:t>  mlxtend, min_support=0.005</a:t>
-            </a:r>
-          </a:p>
-          <a:p>
-            <a:pPr>
-              <a:spcAft>
-                <a:spcPts val="600"/>
-              </a:spcAft>
-            </a:pPr>
-            <a:r>
-              <a:rPr sz="1100">
-                <a:solidFill>
-                  <a:srgbClr val="1F2A3D"/>
+              <a:t>Next.js 14  ·  Symptom picker  ·  Live alpha slider  ·  Pipeline timeline  ·  Insights dashboard</a:t>
+            </a:r>
+          </a:p>
+        </p:txBody>
+      </p:sp>
+      <p:sp>
+        <p:nvSpPr>
+          <p:cNvPr id="10" name="TextBox 9"/>
+          <p:cNvSpPr txBox="1"/>
+          <p:nvPr/>
+        </p:nvSpPr>
+        <p:spPr>
+          <a:xfrm>
+            <a:off x="5852160" y="2670048"/>
+            <a:ext cx="457200" cy="228600"/>
+          </a:xfrm>
+          <a:prstGeom prst="rect">
+            <a:avLst/>
+          </a:prstGeom>
+          <a:noFill/>
+        </p:spPr>
+        <p:txBody>
+          <a:bodyPr wrap="square">
+            <a:spAutoFit/>
+          </a:bodyPr>
+          <a:lstStyle/>
+          <a:p>
+            <a:pPr algn="ctr">
+              <a:spcAft>
+                <a:spcPts val="400"/>
+              </a:spcAft>
+            </a:pPr>
+            <a:r>
+              <a:rPr sz="1400" b="0">
+                <a:solidFill>
+                  <a:srgbClr val="6B7280"/>
                 </a:solidFill>
                 <a:latin typeface="Calibri"/>
               </a:rPr>
-              <a:t>  23,839 rules across 41 diseases</a:t>
-            </a:r>
-          </a:p>
-          <a:p>
-            <a:pPr>
-              <a:spcAft>
-                <a:spcPts val="600"/>
-              </a:spcAft>
-            </a:pPr>
-            <a:r>
-              <a:rPr sz="1100">
-                <a:solidFill>
-                  <a:srgbClr val="1F2A3D"/>
-                </a:solidFill>
-                <a:latin typeface="Calibri"/>
-              </a:rPr>
-              <a:t>  MiningConf(Q,d) at query time</a:t>
-            </a:r>
-          </a:p>
-          <a:p>
-            <a:pPr>
-              <a:spcAft>
-                <a:spcPts val="600"/>
-              </a:spcAft>
-            </a:pPr>
-            <a:r>
-              <a:rPr sz="1100">
-                <a:solidFill>
-                  <a:srgbClr val="1F2A3D"/>
-                </a:solidFill>
-                <a:latin typeface="Calibri"/>
-              </a:rPr>
-              <a:t>  Sakshat (owner)</a:t>
+              <a:t>▼</a:t>
             </a:r>
           </a:p>
         </p:txBody>
@@ -4252,18 +4820,20 @@
         </p:nvSpPr>
         <p:spPr>
           <a:xfrm>
-            <a:off x="8138160" y="1691640"/>
-            <a:ext cx="3749039" cy="2103120"/>
+            <a:off x="457200" y="2907792"/>
+            <a:ext cx="11338560" cy="1965960"/>
           </a:xfrm>
           <a:prstGeom prst="roundRect">
-            <a:avLst/>
+            <a:avLst>
+              <a:gd name="adj" fmla="val 8000"/>
+            </a:avLst>
           </a:prstGeom>
           <a:solidFill>
-            <a:srgbClr val="F6F8FC"/>
+            <a:srgbClr val="FFFFFF"/>
           </a:solidFill>
-          <a:ln w="25400">
+          <a:ln w="19050">
             <a:solidFill>
-              <a:srgbClr val="10B981"/>
+              <a:srgbClr val="3A86FF"/>
             </a:solidFill>
           </a:ln>
         </p:spPr>
@@ -4297,8 +4867,8 @@
         </p:nvSpPr>
         <p:spPr>
           <a:xfrm>
-            <a:off x="8138160" y="1783080"/>
-            <a:ext cx="3749039" cy="411480"/>
+            <a:off x="640080" y="3017520"/>
+            <a:ext cx="5486400" cy="274320"/>
           </a:xfrm>
           <a:prstGeom prst="rect">
             <a:avLst/>
@@ -4311,126 +4881,45 @@
           </a:bodyPr>
           <a:lstStyle/>
           <a:p>
-            <a:pPr algn="l"/>
-            <a:r>
-              <a:rPr sz="1400" b="1">
-                <a:solidFill>
-                  <a:srgbClr val="10B981"/>
+            <a:pPr>
+              <a:spcAft>
+                <a:spcPts val="400"/>
+              </a:spcAft>
+            </a:pPr>
+            <a:r>
+              <a:rPr sz="1000" b="1">
+                <a:solidFill>
+                  <a:srgbClr val="3A86FF"/>
                 </a:solidFill>
                 <a:latin typeface="Calibri"/>
               </a:rPr>
-              <a:t>Step 3. Knowledge Base</a:t>
-            </a:r>
-          </a:p>
-        </p:txBody>
-      </p:sp>
-      <p:sp>
-        <p:nvSpPr>
-          <p:cNvPr id="13" name="TextBox 12"/>
-          <p:cNvSpPr txBox="1"/>
-          <p:nvPr/>
-        </p:nvSpPr>
-        <p:spPr>
-          <a:xfrm>
-            <a:off x="8321040" y="2240280"/>
-            <a:ext cx="3383279" cy="1463039"/>
-          </a:xfrm>
-          <a:prstGeom prst="rect">
-            <a:avLst/>
-          </a:prstGeom>
-          <a:noFill/>
-        </p:spPr>
-        <p:txBody>
-          <a:bodyPr wrap="square">
-            <a:spAutoFit/>
-          </a:bodyPr>
-          <a:lstStyle/>
-          <a:p>
-            <a:pPr>
-              <a:spcAft>
-                <a:spcPts val="600"/>
-              </a:spcAft>
-            </a:pPr>
-            <a:r>
-              <a:rPr sz="1100">
-                <a:solidFill>
-                  <a:srgbClr val="1F2A3D"/>
-                </a:solidFill>
-                <a:latin typeface="Calibri"/>
-              </a:rPr>
-              <a:t>  24,063 MedQuAD passages</a:t>
-            </a:r>
-          </a:p>
-          <a:p>
-            <a:pPr>
-              <a:spcAft>
-                <a:spcPts val="600"/>
-              </a:spcAft>
-            </a:pPr>
-            <a:r>
-              <a:rPr sz="1100">
-                <a:solidFill>
-                  <a:srgbClr val="1F2A3D"/>
-                </a:solidFill>
-                <a:latin typeface="Calibri"/>
-              </a:rPr>
-              <a:t>  MiniLM 384d, PubMedBERT 768d, Azure 3072d</a:t>
-            </a:r>
-          </a:p>
-          <a:p>
-            <a:pPr>
-              <a:spcAft>
-                <a:spcPts val="600"/>
-              </a:spcAft>
-            </a:pPr>
-            <a:r>
-              <a:rPr sz="1100">
-                <a:solidFill>
-                  <a:srgbClr val="1F2A3D"/>
-                </a:solidFill>
-                <a:latin typeface="Calibri"/>
-              </a:rPr>
-              <a:t>  FAISS local, Pinecone serverless</a:t>
-            </a:r>
-          </a:p>
-          <a:p>
-            <a:pPr>
-              <a:spcAft>
-                <a:spcPts val="600"/>
-              </a:spcAft>
-            </a:pPr>
-            <a:r>
-              <a:rPr sz="1100">
-                <a:solidFill>
-                  <a:srgbClr val="1F2A3D"/>
-                </a:solidFill>
-                <a:latin typeface="Calibri"/>
-              </a:rPr>
-              <a:t>  Vineet (owner)</a:t>
-            </a:r>
-          </a:p>
-        </p:txBody>
-      </p:sp>
-      <p:sp>
-        <p:nvSpPr>
-          <p:cNvPr id="14" name="Rounded Rectangle 13"/>
+              <a:t>FASTAPI MICROSERVICE  (Python 3.11, MPS-aware)</a:t>
+            </a:r>
+          </a:p>
+        </p:txBody>
+      </p:sp>
+      <p:sp>
+        <p:nvSpPr>
+          <p:cNvPr id="13" name="Rounded Rectangle 12"/>
           <p:cNvSpPr/>
           <p:nvPr/>
         </p:nvSpPr>
         <p:spPr>
           <a:xfrm>
-            <a:off x="274320" y="3931920"/>
-            <a:ext cx="3749039" cy="2103120"/>
+            <a:off x="640080" y="3337560"/>
+            <a:ext cx="1828800" cy="731520"/>
           </a:xfrm>
           <a:prstGeom prst="roundRect">
-            <a:avLst/>
+            <a:avLst>
+              <a:gd name="adj" fmla="val 8000"/>
+            </a:avLst>
           </a:prstGeom>
           <a:solidFill>
-            <a:srgbClr val="F6F8FC"/>
+            <a:srgbClr val="FFFFFF"/>
           </a:solidFill>
-          <a:ln w="25400">
+          <a:ln w="15240">
             <a:solidFill>
-              <a:srgbClr val="EF476F"/>
+              <a:srgbClr val="6B7280"/>
             </a:solidFill>
           </a:ln>
         </p:spPr>
@@ -4458,147 +4947,23 @@
       </p:sp>
       <p:sp>
         <p:nvSpPr>
-          <p:cNvPr id="15" name="TextBox 14"/>
-          <p:cNvSpPr txBox="1"/>
-          <p:nvPr/>
-        </p:nvSpPr>
-        <p:spPr>
-          <a:xfrm>
-            <a:off x="274320" y="4023360"/>
-            <a:ext cx="3749039" cy="411480"/>
-          </a:xfrm>
-          <a:prstGeom prst="rect">
-            <a:avLst/>
-          </a:prstGeom>
-          <a:noFill/>
-        </p:spPr>
-        <p:txBody>
-          <a:bodyPr wrap="square">
-            <a:spAutoFit/>
-          </a:bodyPr>
-          <a:lstStyle/>
-          <a:p>
-            <a:pPr algn="l"/>
-            <a:r>
-              <a:rPr sz="1400" b="1">
-                <a:solidFill>
-                  <a:srgbClr val="EF476F"/>
-                </a:solidFill>
-                <a:latin typeface="Calibri"/>
-              </a:rPr>
-              <a:t>Step 4. RAG Pipeline</a:t>
-            </a:r>
-          </a:p>
-        </p:txBody>
-      </p:sp>
-      <p:sp>
-        <p:nvSpPr>
-          <p:cNvPr id="16" name="TextBox 15"/>
-          <p:cNvSpPr txBox="1"/>
-          <p:nvPr/>
-        </p:nvSpPr>
-        <p:spPr>
-          <a:xfrm>
-            <a:off x="457200" y="4480560"/>
-            <a:ext cx="3383279" cy="1463039"/>
-          </a:xfrm>
-          <a:prstGeom prst="rect">
-            <a:avLst/>
-          </a:prstGeom>
-          <a:noFill/>
-        </p:spPr>
-        <p:txBody>
-          <a:bodyPr wrap="square">
-            <a:spAutoFit/>
-          </a:bodyPr>
-          <a:lstStyle/>
-          <a:p>
-            <a:pPr>
-              <a:spcAft>
-                <a:spcPts val="600"/>
-              </a:spcAft>
-            </a:pPr>
-            <a:r>
-              <a:rPr sz="1100">
-                <a:solidFill>
-                  <a:srgbClr val="1F2A3D"/>
-                </a:solidFill>
-                <a:latin typeface="Calibri"/>
-              </a:rPr>
-              <a:t>  Dense retrieval + synonym expansion</a:t>
-            </a:r>
-          </a:p>
-          <a:p>
-            <a:pPr>
-              <a:spcAft>
-                <a:spcPts val="600"/>
-              </a:spcAft>
-            </a:pPr>
-            <a:r>
-              <a:rPr sz="1100">
-                <a:solidFill>
-                  <a:srgbClr val="1F2A3D"/>
-                </a:solidFill>
-                <a:latin typeface="Calibri"/>
-              </a:rPr>
-              <a:t>  Pinecone reranker: Cohere 3.5 or BGE-v2-m3</a:t>
-            </a:r>
-          </a:p>
-          <a:p>
-            <a:pPr>
-              <a:spcAft>
-                <a:spcPts val="600"/>
-              </a:spcAft>
-            </a:pPr>
-            <a:r>
-              <a:rPr sz="1100">
-                <a:solidFill>
-                  <a:srgbClr val="1F2A3D"/>
-                </a:solidFill>
-                <a:latin typeface="Calibri"/>
-              </a:rPr>
-              <a:t>  Template + OpenAI structured explainers</a:t>
-            </a:r>
-          </a:p>
-          <a:p>
-            <a:pPr>
-              <a:spcAft>
-                <a:spcPts val="600"/>
-              </a:spcAft>
-            </a:pPr>
-            <a:r>
-              <a:rPr sz="1100">
-                <a:solidFill>
-                  <a:srgbClr val="1F2A3D"/>
-                </a:solidFill>
-                <a:latin typeface="Calibri"/>
-              </a:rPr>
-              <a:t>  Vineet + Aishwarya</a:t>
-            </a:r>
-          </a:p>
-        </p:txBody>
-      </p:sp>
-      <p:sp>
-        <p:nvSpPr>
-          <p:cNvPr id="17" name="Rounded Rectangle 16"/>
+          <p:cNvPr id="14" name="Rectangle 13"/>
           <p:cNvSpPr/>
           <p:nvPr/>
         </p:nvSpPr>
         <p:spPr>
           <a:xfrm>
-            <a:off x="4206240" y="3931920"/>
-            <a:ext cx="3749039" cy="2103120"/>
-          </a:xfrm>
-          <a:prstGeom prst="roundRect">
+            <a:off x="640080" y="3337560"/>
+            <a:ext cx="54864" cy="731520"/>
+          </a:xfrm>
+          <a:prstGeom prst="rect">
             <a:avLst/>
           </a:prstGeom>
           <a:solidFill>
-            <a:srgbClr val="F6F8FC"/>
+            <a:srgbClr val="6B7280"/>
           </a:solidFill>
-          <a:ln w="25400">
-            <a:solidFill>
-              <a:srgbClr val="F69B2C"/>
-            </a:solidFill>
+          <a:ln>
+            <a:noFill/>
           </a:ln>
         </p:spPr>
         <p:style>
@@ -4625,14 +4990,14 @@
       </p:sp>
       <p:sp>
         <p:nvSpPr>
-          <p:cNvPr id="18" name="TextBox 17"/>
+          <p:cNvPr id="15" name="TextBox 14"/>
           <p:cNvSpPr txBox="1"/>
           <p:nvPr/>
         </p:nvSpPr>
         <p:spPr>
           <a:xfrm>
-            <a:off x="4206240" y="4023360"/>
-            <a:ext cx="3749039" cy="411480"/>
+            <a:off x="777240" y="3401568"/>
+            <a:ext cx="1691640" cy="228600"/>
           </a:xfrm>
           <a:prstGeom prst="rect">
             <a:avLst/>
@@ -4645,29 +5010,33 @@
           </a:bodyPr>
           <a:lstStyle/>
           <a:p>
-            <a:pPr algn="l"/>
-            <a:r>
-              <a:rPr sz="1400" b="1">
-                <a:solidFill>
-                  <a:srgbClr val="F69B2C"/>
+            <a:pPr>
+              <a:spcAft>
+                <a:spcPts val="400"/>
+              </a:spcAft>
+            </a:pPr>
+            <a:r>
+              <a:rPr sz="800" b="1">
+                <a:solidFill>
+                  <a:srgbClr val="6B7280"/>
                 </a:solidFill>
                 <a:latin typeface="Calibri"/>
               </a:rPr>
-              <a:t>Step 5. Hybrid Fusion</a:t>
-            </a:r>
-          </a:p>
-        </p:txBody>
-      </p:sp>
-      <p:sp>
-        <p:nvSpPr>
-          <p:cNvPr id="19" name="TextBox 18"/>
+              <a:t>STEP 1</a:t>
+            </a:r>
+          </a:p>
+        </p:txBody>
+      </p:sp>
+      <p:sp>
+        <p:nvSpPr>
+          <p:cNvPr id="16" name="TextBox 15"/>
           <p:cNvSpPr txBox="1"/>
           <p:nvPr/>
         </p:nvSpPr>
         <p:spPr>
           <a:xfrm>
-            <a:off x="4389120" y="4480560"/>
-            <a:ext cx="3383279" cy="1463039"/>
+            <a:off x="777240" y="3611880"/>
+            <a:ext cx="1691640" cy="274320"/>
           </a:xfrm>
           <a:prstGeom prst="rect">
             <a:avLst/>
@@ -4682,89 +5051,82 @@
           <a:p>
             <a:pPr>
               <a:spcAft>
-                <a:spcPts val="600"/>
-              </a:spcAft>
-            </a:pPr>
-            <a:r>
-              <a:rPr sz="1100">
-                <a:solidFill>
-                  <a:srgbClr val="1F2A3D"/>
+                <a:spcPts val="400"/>
+              </a:spcAft>
+            </a:pPr>
+            <a:r>
+              <a:rPr sz="1100" b="1">
+                <a:solidFill>
+                  <a:srgbClr val="1A2333"/>
                 </a:solidFill>
                 <a:latin typeface="Calibri"/>
               </a:rPr>
-              <a:t>  a*RetrievalSim + (1-a)*MiningConf</a:t>
-            </a:r>
-          </a:p>
+              <a:t>Data ETL</a:t>
+            </a:r>
+          </a:p>
+        </p:txBody>
+      </p:sp>
+      <p:sp>
+        <p:nvSpPr>
+          <p:cNvPr id="17" name="TextBox 16"/>
+          <p:cNvSpPr txBox="1"/>
+          <p:nvPr/>
+        </p:nvSpPr>
+        <p:spPr>
+          <a:xfrm>
+            <a:off x="777240" y="3840480"/>
+            <a:ext cx="1691640" cy="201168"/>
+          </a:xfrm>
+          <a:prstGeom prst="rect">
+            <a:avLst/>
+          </a:prstGeom>
+          <a:noFill/>
+        </p:spPr>
+        <p:txBody>
+          <a:bodyPr wrap="square">
+            <a:spAutoFit/>
+          </a:bodyPr>
+          <a:lstStyle/>
           <a:p>
             <a:pPr>
               <a:spcAft>
-                <a:spcPts val="600"/>
-              </a:spcAft>
-            </a:pPr>
-            <a:r>
-              <a:rPr sz="1100">
-                <a:solidFill>
-                  <a:srgbClr val="1F2A3D"/>
+                <a:spcPts val="400"/>
+              </a:spcAft>
+            </a:pPr>
+            <a:r>
+              <a:rPr sz="900" b="0">
+                <a:solidFill>
+                  <a:srgbClr val="6B7280"/>
                 </a:solidFill>
                 <a:latin typeface="Calibri"/>
               </a:rPr>
-              <a:t>  a = 0.3 (sweep-validated)</a:t>
-            </a:r>
-          </a:p>
-          <a:p>
-            <a:pPr>
-              <a:spcAft>
-                <a:spcPts val="600"/>
-              </a:spcAft>
-            </a:pPr>
-            <a:r>
-              <a:rPr sz="1100">
-                <a:solidFill>
-                  <a:srgbClr val="1F2A3D"/>
-                </a:solidFill>
-                <a:latin typeface="Calibri"/>
-              </a:rPr>
-              <a:t>  Pooled candidate set</a:t>
-            </a:r>
-          </a:p>
-          <a:p>
-            <a:pPr>
-              <a:spcAft>
-                <a:spcPts val="600"/>
-              </a:spcAft>
-            </a:pPr>
-            <a:r>
-              <a:rPr sz="1100">
-                <a:solidFill>
-                  <a:srgbClr val="1F2A3D"/>
-                </a:solidFill>
-                <a:latin typeface="Calibri"/>
-              </a:rPr>
-              <a:t>  Aishwarya (owner)</a:t>
-            </a:r>
-          </a:p>
-        </p:txBody>
-      </p:sp>
-      <p:sp>
-        <p:nvSpPr>
-          <p:cNvPr id="20" name="Rounded Rectangle 19"/>
+              <a:t>Sakshat</a:t>
+            </a:r>
+          </a:p>
+        </p:txBody>
+      </p:sp>
+      <p:sp>
+        <p:nvSpPr>
+          <p:cNvPr id="18" name="Rounded Rectangle 17"/>
           <p:cNvSpPr/>
           <p:nvPr/>
         </p:nvSpPr>
         <p:spPr>
           <a:xfrm>
-            <a:off x="8138160" y="3931920"/>
-            <a:ext cx="3749039" cy="2103120"/>
+            <a:off x="2569463" y="3337560"/>
+            <a:ext cx="1828800" cy="731520"/>
           </a:xfrm>
           <a:prstGeom prst="roundRect">
-            <a:avLst/>
+            <a:avLst>
+              <a:gd name="adj" fmla="val 8000"/>
+            </a:avLst>
           </a:prstGeom>
           <a:solidFill>
-            <a:srgbClr val="F6F8FC"/>
+            <a:srgbClr val="FFFFFF"/>
           </a:solidFill>
-          <a:ln w="25400">
+          <a:ln w="15240">
             <a:solidFill>
-              <a:srgbClr val="7C3AED"/>
+              <a:srgbClr val="3A86FF"/>
             </a:solidFill>
           </a:ln>
         </p:spPr>
@@ -4792,14 +5154,57 @@
       </p:sp>
       <p:sp>
         <p:nvSpPr>
-          <p:cNvPr id="21" name="TextBox 20"/>
+          <p:cNvPr id="19" name="Rectangle 18"/>
+          <p:cNvSpPr/>
+          <p:nvPr/>
+        </p:nvSpPr>
+        <p:spPr>
+          <a:xfrm>
+            <a:off x="2569463" y="3337560"/>
+            <a:ext cx="54864" cy="731520"/>
+          </a:xfrm>
+          <a:prstGeom prst="rect">
+            <a:avLst/>
+          </a:prstGeom>
+          <a:solidFill>
+            <a:srgbClr val="3A86FF"/>
+          </a:solidFill>
+          <a:ln>
+            <a:noFill/>
+          </a:ln>
+        </p:spPr>
+        <p:style>
+          <a:lnRef idx="1">
+            <a:schemeClr val="accent1"/>
+          </a:lnRef>
+          <a:fillRef idx="3">
+            <a:schemeClr val="accent1"/>
+          </a:fillRef>
+          <a:effectRef idx="2">
+            <a:schemeClr val="accent1"/>
+          </a:effectRef>
+          <a:fontRef idx="minor">
+            <a:schemeClr val="lt1"/>
+          </a:fontRef>
+        </p:style>
+        <p:txBody>
+          <a:bodyPr rtlCol="0" anchor="ctr"/>
+          <a:lstStyle/>
+          <a:p>
+            <a:pPr algn="ctr"/>
+          </a:p>
+        </p:txBody>
+      </p:sp>
+      <p:sp>
+        <p:nvSpPr>
+          <p:cNvPr id="20" name="TextBox 19"/>
           <p:cNvSpPr txBox="1"/>
           <p:nvPr/>
         </p:nvSpPr>
         <p:spPr>
           <a:xfrm>
-            <a:off x="8138160" y="4023360"/>
-            <a:ext cx="3749039" cy="411480"/>
+            <a:off x="2706623" y="3401568"/>
+            <a:ext cx="1691640" cy="228600"/>
           </a:xfrm>
           <a:prstGeom prst="rect">
             <a:avLst/>
@@ -4812,29 +5217,33 @@
           </a:bodyPr>
           <a:lstStyle/>
           <a:p>
-            <a:pPr algn="l"/>
-            <a:r>
-              <a:rPr sz="1400" b="1">
-                <a:solidFill>
-                  <a:srgbClr val="7C3AED"/>
+            <a:pPr>
+              <a:spcAft>
+                <a:spcPts val="400"/>
+              </a:spcAft>
+            </a:pPr>
+            <a:r>
+              <a:rPr sz="800" b="1">
+                <a:solidFill>
+                  <a:srgbClr val="3A86FF"/>
                 </a:solidFill>
                 <a:latin typeface="Calibri"/>
               </a:rPr>
-              <a:t>Step 6. Evaluation</a:t>
-            </a:r>
-          </a:p>
-        </p:txBody>
-      </p:sp>
-      <p:sp>
-        <p:nvSpPr>
-          <p:cNvPr id="22" name="TextBox 21"/>
+              <a:t>STEP 2</a:t>
+            </a:r>
+          </a:p>
+        </p:txBody>
+      </p:sp>
+      <p:sp>
+        <p:nvSpPr>
+          <p:cNvPr id="21" name="TextBox 20"/>
           <p:cNvSpPr txBox="1"/>
           <p:nvPr/>
         </p:nvSpPr>
         <p:spPr>
           <a:xfrm>
-            <a:off x="8321040" y="4480560"/>
-            <a:ext cx="3383279" cy="1463039"/>
+            <a:off x="2706623" y="3611880"/>
+            <a:ext cx="1691640" cy="274320"/>
           </a:xfrm>
           <a:prstGeom prst="rect">
             <a:avLst/>
@@ -4849,79 +5258,31 @@
           <a:p>
             <a:pPr>
               <a:spcAft>
-                <a:spcPts val="600"/>
-              </a:spcAft>
-            </a:pPr>
-            <a:r>
-              <a:rPr sz="1100">
-                <a:solidFill>
-                  <a:srgbClr val="1F2A3D"/>
+                <a:spcPts val="400"/>
+              </a:spcAft>
+            </a:pPr>
+            <a:r>
+              <a:rPr sz="1100" b="1">
+                <a:solidFill>
+                  <a:srgbClr val="1A2333"/>
                 </a:solidFill>
                 <a:latin typeface="Calibri"/>
               </a:rPr>
-              <a:t>  Recall@K, MRR (200 cases)</a:t>
-            </a:r>
-          </a:p>
-          <a:p>
-            <a:pPr>
-              <a:spcAft>
-                <a:spcPts val="600"/>
-              </a:spcAft>
-            </a:pPr>
-            <a:r>
-              <a:rPr sz="1100">
-                <a:solidFill>
-                  <a:srgbClr val="1F2A3D"/>
-                </a:solidFill>
-                <a:latin typeface="Calibri"/>
-              </a:rPr>
-              <a:t>  alpha sweep + per-stage latency</a:t>
-            </a:r>
-          </a:p>
-          <a:p>
-            <a:pPr>
-              <a:spcAft>
-                <a:spcPts val="600"/>
-              </a:spcAft>
-            </a:pPr>
-            <a:r>
-              <a:rPr sz="1100">
-                <a:solidFill>
-                  <a:srgbClr val="1F2A3D"/>
-                </a:solidFill>
-                <a:latin typeface="Calibri"/>
-              </a:rPr>
-              <a:t>  155 pytest tests (147 unit, 8 live)</a:t>
-            </a:r>
-          </a:p>
-          <a:p>
-            <a:pPr>
-              <a:spcAft>
-                <a:spcPts val="600"/>
-              </a:spcAft>
-            </a:pPr>
-            <a:r>
-              <a:rPr sz="1100">
-                <a:solidFill>
-                  <a:srgbClr val="1F2A3D"/>
-                </a:solidFill>
-                <a:latin typeface="Calibri"/>
-              </a:rPr>
-              <a:t>  Aishwarya (owner)</a:t>
-            </a:r>
-          </a:p>
-        </p:txBody>
-      </p:sp>
-      <p:sp>
-        <p:nvSpPr>
-          <p:cNvPr id="23" name="TextBox 22"/>
+              <a:t>FP-Growth Mining</a:t>
+            </a:r>
+          </a:p>
+        </p:txBody>
+      </p:sp>
+      <p:sp>
+        <p:nvSpPr>
+          <p:cNvPr id="22" name="TextBox 21"/>
           <p:cNvSpPr txBox="1"/>
           <p:nvPr/>
         </p:nvSpPr>
         <p:spPr>
           <a:xfrm>
-            <a:off x="548640" y="6172200"/>
-            <a:ext cx="10972800" cy="365760"/>
+            <a:off x="2706623" y="3840480"/>
+            <a:ext cx="1691640" cy="201168"/>
           </a:xfrm>
           <a:prstGeom prst="rect">
             <a:avLst/>
@@ -4934,29 +5295,123 @@
           </a:bodyPr>
           <a:lstStyle/>
           <a:p>
-            <a:pPr algn="l"/>
-            <a:r>
-              <a:rPr sz="1200" b="1">
-                <a:solidFill>
-                  <a:srgbClr val="0D3B66"/>
+            <a:pPr>
+              <a:spcAft>
+                <a:spcPts val="400"/>
+              </a:spcAft>
+            </a:pPr>
+            <a:r>
+              <a:rPr sz="900" b="0">
+                <a:solidFill>
+                  <a:srgbClr val="6B7280"/>
                 </a:solidFill>
                 <a:latin typeface="Calibri"/>
               </a:rPr>
-              <a:t>Three-tier deployment: Next.js 14 web, FastAPI AI service (MPS), data tier (FAISS local or Pinecone managed)</a:t>
-            </a:r>
-          </a:p>
-        </p:txBody>
-      </p:sp>
-      <p:sp>
-        <p:nvSpPr>
-          <p:cNvPr id="24" name="TextBox 23"/>
+              <a:t>Sakshat</a:t>
+            </a:r>
+          </a:p>
+        </p:txBody>
+      </p:sp>
+      <p:sp>
+        <p:nvSpPr>
+          <p:cNvPr id="23" name="Rounded Rectangle 22"/>
+          <p:cNvSpPr/>
+          <p:nvPr/>
+        </p:nvSpPr>
+        <p:spPr>
+          <a:xfrm>
+            <a:off x="4498848" y="3337560"/>
+            <a:ext cx="1828800" cy="731520"/>
+          </a:xfrm>
+          <a:prstGeom prst="roundRect">
+            <a:avLst>
+              <a:gd name="adj" fmla="val 8000"/>
+            </a:avLst>
+          </a:prstGeom>
+          <a:solidFill>
+            <a:srgbClr val="FFFFFF"/>
+          </a:solidFill>
+          <a:ln w="15240">
+            <a:solidFill>
+              <a:srgbClr val="10B981"/>
+            </a:solidFill>
+          </a:ln>
+        </p:spPr>
+        <p:style>
+          <a:lnRef idx="1">
+            <a:schemeClr val="accent1"/>
+          </a:lnRef>
+          <a:fillRef idx="3">
+            <a:schemeClr val="accent1"/>
+          </a:fillRef>
+          <a:effectRef idx="2">
+            <a:schemeClr val="accent1"/>
+          </a:effectRef>
+          <a:fontRef idx="minor">
+            <a:schemeClr val="lt1"/>
+          </a:fontRef>
+        </p:style>
+        <p:txBody>
+          <a:bodyPr rtlCol="0" anchor="ctr"/>
+          <a:lstStyle/>
+          <a:p>
+            <a:pPr algn="ctr"/>
+          </a:p>
+        </p:txBody>
+      </p:sp>
+      <p:sp>
+        <p:nvSpPr>
+          <p:cNvPr id="24" name="Rectangle 23"/>
+          <p:cNvSpPr/>
+          <p:nvPr/>
+        </p:nvSpPr>
+        <p:spPr>
+          <a:xfrm>
+            <a:off x="4498848" y="3337560"/>
+            <a:ext cx="54864" cy="731520"/>
+          </a:xfrm>
+          <a:prstGeom prst="rect">
+            <a:avLst/>
+          </a:prstGeom>
+          <a:solidFill>
+            <a:srgbClr val="10B981"/>
+          </a:solidFill>
+          <a:ln>
+            <a:noFill/>
+          </a:ln>
+        </p:spPr>
+        <p:style>
+          <a:lnRef idx="1">
+            <a:schemeClr val="accent1"/>
+          </a:lnRef>
+          <a:fillRef idx="3">
+            <a:schemeClr val="accent1"/>
+          </a:fillRef>
+          <a:effectRef idx="2">
+            <a:schemeClr val="accent1"/>
+          </a:effectRef>
+          <a:fontRef idx="minor">
+            <a:schemeClr val="lt1"/>
+          </a:fontRef>
+        </p:style>
+        <p:txBody>
+          <a:bodyPr rtlCol="0" anchor="ctr"/>
+          <a:lstStyle/>
+          <a:p>
+            <a:pPr algn="ctr"/>
+          </a:p>
+        </p:txBody>
+      </p:sp>
+      <p:sp>
+        <p:nvSpPr>
+          <p:cNvPr id="25" name="TextBox 24"/>
           <p:cNvSpPr txBox="1"/>
           <p:nvPr/>
         </p:nvSpPr>
         <p:spPr>
           <a:xfrm>
-            <a:off x="548640" y="6492240"/>
-            <a:ext cx="10972800" cy="365760"/>
+            <a:off x="4636008" y="3401568"/>
+            <a:ext cx="1691640" cy="228600"/>
           </a:xfrm>
           <a:prstGeom prst="rect">
             <a:avLst/>
@@ -4969,29 +5424,33 @@
           </a:bodyPr>
           <a:lstStyle/>
           <a:p>
-            <a:pPr algn="l"/>
-            <a:r>
-              <a:rPr sz="1100" b="0">
-                <a:solidFill>
-                  <a:srgbClr val="6B7280"/>
+            <a:pPr>
+              <a:spcAft>
+                <a:spcPts val="400"/>
+              </a:spcAft>
+            </a:pPr>
+            <a:r>
+              <a:rPr sz="800" b="1">
+                <a:solidFill>
+                  <a:srgbClr val="10B981"/>
                 </a:solidFill>
                 <a:latin typeface="Calibri"/>
               </a:rPr>
-              <a:t>Production demo: Azure OpenAI 3072d to Pinecone (255-data-mining, 24,063 vectors), fused mining + retrieval</a:t>
-            </a:r>
-          </a:p>
-        </p:txBody>
-      </p:sp>
-      <p:sp>
-        <p:nvSpPr>
-          <p:cNvPr id="25" name="TextBox 24"/>
+              <a:t>STEP 3</a:t>
+            </a:r>
+          </a:p>
+        </p:txBody>
+      </p:sp>
+      <p:sp>
+        <p:nvSpPr>
+          <p:cNvPr id="26" name="TextBox 25"/>
           <p:cNvSpPr txBox="1"/>
           <p:nvPr/>
         </p:nvSpPr>
         <p:spPr>
           <a:xfrm>
-            <a:off x="365760" y="6492240"/>
-            <a:ext cx="10058400" cy="274320"/>
+            <a:off x="4636008" y="3611880"/>
+            <a:ext cx="1691640" cy="274320"/>
           </a:xfrm>
           <a:prstGeom prst="rect">
             <a:avLst/>
@@ -5004,14 +5463,1048 @@
           </a:bodyPr>
           <a:lstStyle/>
           <a:p>
-            <a:r>
-              <a:rPr sz="1000" b="0">
+            <a:pPr>
+              <a:spcAft>
+                <a:spcPts val="400"/>
+              </a:spcAft>
+            </a:pPr>
+            <a:r>
+              <a:rPr sz="1100" b="1">
+                <a:solidFill>
+                  <a:srgbClr val="1A2333"/>
+                </a:solidFill>
+                <a:latin typeface="Calibri"/>
+              </a:rPr>
+              <a:t>Knowledge Base</a:t>
+            </a:r>
+          </a:p>
+        </p:txBody>
+      </p:sp>
+      <p:sp>
+        <p:nvSpPr>
+          <p:cNvPr id="27" name="TextBox 26"/>
+          <p:cNvSpPr txBox="1"/>
+          <p:nvPr/>
+        </p:nvSpPr>
+        <p:spPr>
+          <a:xfrm>
+            <a:off x="4636008" y="3840480"/>
+            <a:ext cx="1691640" cy="201168"/>
+          </a:xfrm>
+          <a:prstGeom prst="rect">
+            <a:avLst/>
+          </a:prstGeom>
+          <a:noFill/>
+        </p:spPr>
+        <p:txBody>
+          <a:bodyPr wrap="square">
+            <a:spAutoFit/>
+          </a:bodyPr>
+          <a:lstStyle/>
+          <a:p>
+            <a:pPr>
+              <a:spcAft>
+                <a:spcPts val="400"/>
+              </a:spcAft>
+            </a:pPr>
+            <a:r>
+              <a:rPr sz="900" b="0">
                 <a:solidFill>
                   <a:srgbClr val="6B7280"/>
                 </a:solidFill>
                 <a:latin typeface="Calibri"/>
               </a:rPr>
-              <a:t>CMPE 255 Spring 2026, Sakshat Patil, Vineet Kumar, Aishwarya Madhave, Slide 2 of 7</a:t>
+              <a:t>Vineet</a:t>
+            </a:r>
+          </a:p>
+        </p:txBody>
+      </p:sp>
+      <p:sp>
+        <p:nvSpPr>
+          <p:cNvPr id="28" name="Rounded Rectangle 27"/>
+          <p:cNvSpPr/>
+          <p:nvPr/>
+        </p:nvSpPr>
+        <p:spPr>
+          <a:xfrm>
+            <a:off x="6428232" y="3337560"/>
+            <a:ext cx="1828800" cy="731520"/>
+          </a:xfrm>
+          <a:prstGeom prst="roundRect">
+            <a:avLst>
+              <a:gd name="adj" fmla="val 8000"/>
+            </a:avLst>
+          </a:prstGeom>
+          <a:solidFill>
+            <a:srgbClr val="FFFFFF"/>
+          </a:solidFill>
+          <a:ln w="15240">
+            <a:solidFill>
+              <a:srgbClr val="EF476F"/>
+            </a:solidFill>
+          </a:ln>
+        </p:spPr>
+        <p:style>
+          <a:lnRef idx="1">
+            <a:schemeClr val="accent1"/>
+          </a:lnRef>
+          <a:fillRef idx="3">
+            <a:schemeClr val="accent1"/>
+          </a:fillRef>
+          <a:effectRef idx="2">
+            <a:schemeClr val="accent1"/>
+          </a:effectRef>
+          <a:fontRef idx="minor">
+            <a:schemeClr val="lt1"/>
+          </a:fontRef>
+        </p:style>
+        <p:txBody>
+          <a:bodyPr rtlCol="0" anchor="ctr"/>
+          <a:lstStyle/>
+          <a:p>
+            <a:pPr algn="ctr"/>
+          </a:p>
+        </p:txBody>
+      </p:sp>
+      <p:sp>
+        <p:nvSpPr>
+          <p:cNvPr id="29" name="Rectangle 28"/>
+          <p:cNvSpPr/>
+          <p:nvPr/>
+        </p:nvSpPr>
+        <p:spPr>
+          <a:xfrm>
+            <a:off x="6428232" y="3337560"/>
+            <a:ext cx="54864" cy="731520"/>
+          </a:xfrm>
+          <a:prstGeom prst="rect">
+            <a:avLst/>
+          </a:prstGeom>
+          <a:solidFill>
+            <a:srgbClr val="EF476F"/>
+          </a:solidFill>
+          <a:ln>
+            <a:noFill/>
+          </a:ln>
+        </p:spPr>
+        <p:style>
+          <a:lnRef idx="1">
+            <a:schemeClr val="accent1"/>
+          </a:lnRef>
+          <a:fillRef idx="3">
+            <a:schemeClr val="accent1"/>
+          </a:fillRef>
+          <a:effectRef idx="2">
+            <a:schemeClr val="accent1"/>
+          </a:effectRef>
+          <a:fontRef idx="minor">
+            <a:schemeClr val="lt1"/>
+          </a:fontRef>
+        </p:style>
+        <p:txBody>
+          <a:bodyPr rtlCol="0" anchor="ctr"/>
+          <a:lstStyle/>
+          <a:p>
+            <a:pPr algn="ctr"/>
+          </a:p>
+        </p:txBody>
+      </p:sp>
+      <p:sp>
+        <p:nvSpPr>
+          <p:cNvPr id="30" name="TextBox 29"/>
+          <p:cNvSpPr txBox="1"/>
+          <p:nvPr/>
+        </p:nvSpPr>
+        <p:spPr>
+          <a:xfrm>
+            <a:off x="6565392" y="3401568"/>
+            <a:ext cx="1691640" cy="228600"/>
+          </a:xfrm>
+          <a:prstGeom prst="rect">
+            <a:avLst/>
+          </a:prstGeom>
+          <a:noFill/>
+        </p:spPr>
+        <p:txBody>
+          <a:bodyPr wrap="square">
+            <a:spAutoFit/>
+          </a:bodyPr>
+          <a:lstStyle/>
+          <a:p>
+            <a:pPr>
+              <a:spcAft>
+                <a:spcPts val="400"/>
+              </a:spcAft>
+            </a:pPr>
+            <a:r>
+              <a:rPr sz="800" b="1">
+                <a:solidFill>
+                  <a:srgbClr val="EF476F"/>
+                </a:solidFill>
+                <a:latin typeface="Calibri"/>
+              </a:rPr>
+              <a:t>STEP 4</a:t>
+            </a:r>
+          </a:p>
+        </p:txBody>
+      </p:sp>
+      <p:sp>
+        <p:nvSpPr>
+          <p:cNvPr id="31" name="TextBox 30"/>
+          <p:cNvSpPr txBox="1"/>
+          <p:nvPr/>
+        </p:nvSpPr>
+        <p:spPr>
+          <a:xfrm>
+            <a:off x="6565392" y="3611880"/>
+            <a:ext cx="1691640" cy="274320"/>
+          </a:xfrm>
+          <a:prstGeom prst="rect">
+            <a:avLst/>
+          </a:prstGeom>
+          <a:noFill/>
+        </p:spPr>
+        <p:txBody>
+          <a:bodyPr wrap="square">
+            <a:spAutoFit/>
+          </a:bodyPr>
+          <a:lstStyle/>
+          <a:p>
+            <a:pPr>
+              <a:spcAft>
+                <a:spcPts val="400"/>
+              </a:spcAft>
+            </a:pPr>
+            <a:r>
+              <a:rPr sz="1100" b="1">
+                <a:solidFill>
+                  <a:srgbClr val="1A2333"/>
+                </a:solidFill>
+                <a:latin typeface="Calibri"/>
+              </a:rPr>
+              <a:t>RAG Pipeline</a:t>
+            </a:r>
+          </a:p>
+        </p:txBody>
+      </p:sp>
+      <p:sp>
+        <p:nvSpPr>
+          <p:cNvPr id="32" name="TextBox 31"/>
+          <p:cNvSpPr txBox="1"/>
+          <p:nvPr/>
+        </p:nvSpPr>
+        <p:spPr>
+          <a:xfrm>
+            <a:off x="6565392" y="3840480"/>
+            <a:ext cx="1691640" cy="201168"/>
+          </a:xfrm>
+          <a:prstGeom prst="rect">
+            <a:avLst/>
+          </a:prstGeom>
+          <a:noFill/>
+        </p:spPr>
+        <p:txBody>
+          <a:bodyPr wrap="square">
+            <a:spAutoFit/>
+          </a:bodyPr>
+          <a:lstStyle/>
+          <a:p>
+            <a:pPr>
+              <a:spcAft>
+                <a:spcPts val="400"/>
+              </a:spcAft>
+            </a:pPr>
+            <a:r>
+              <a:rPr sz="900" b="0">
+                <a:solidFill>
+                  <a:srgbClr val="6B7280"/>
+                </a:solidFill>
+                <a:latin typeface="Calibri"/>
+              </a:rPr>
+              <a:t>Vineet, Aishwarya</a:t>
+            </a:r>
+          </a:p>
+        </p:txBody>
+      </p:sp>
+      <p:sp>
+        <p:nvSpPr>
+          <p:cNvPr id="33" name="Rounded Rectangle 32"/>
+          <p:cNvSpPr/>
+          <p:nvPr/>
+        </p:nvSpPr>
+        <p:spPr>
+          <a:xfrm>
+            <a:off x="8357615" y="3337560"/>
+            <a:ext cx="1828800" cy="731520"/>
+          </a:xfrm>
+          <a:prstGeom prst="roundRect">
+            <a:avLst>
+              <a:gd name="adj" fmla="val 8000"/>
+            </a:avLst>
+          </a:prstGeom>
+          <a:solidFill>
+            <a:srgbClr val="FFFFFF"/>
+          </a:solidFill>
+          <a:ln w="15240">
+            <a:solidFill>
+              <a:srgbClr val="F59E0B"/>
+            </a:solidFill>
+          </a:ln>
+        </p:spPr>
+        <p:style>
+          <a:lnRef idx="1">
+            <a:schemeClr val="accent1"/>
+          </a:lnRef>
+          <a:fillRef idx="3">
+            <a:schemeClr val="accent1"/>
+          </a:fillRef>
+          <a:effectRef idx="2">
+            <a:schemeClr val="accent1"/>
+          </a:effectRef>
+          <a:fontRef idx="minor">
+            <a:schemeClr val="lt1"/>
+          </a:fontRef>
+        </p:style>
+        <p:txBody>
+          <a:bodyPr rtlCol="0" anchor="ctr"/>
+          <a:lstStyle/>
+          <a:p>
+            <a:pPr algn="ctr"/>
+          </a:p>
+        </p:txBody>
+      </p:sp>
+      <p:sp>
+        <p:nvSpPr>
+          <p:cNvPr id="34" name="Rectangle 33"/>
+          <p:cNvSpPr/>
+          <p:nvPr/>
+        </p:nvSpPr>
+        <p:spPr>
+          <a:xfrm>
+            <a:off x="8357615" y="3337560"/>
+            <a:ext cx="54864" cy="731520"/>
+          </a:xfrm>
+          <a:prstGeom prst="rect">
+            <a:avLst/>
+          </a:prstGeom>
+          <a:solidFill>
+            <a:srgbClr val="F59E0B"/>
+          </a:solidFill>
+          <a:ln>
+            <a:noFill/>
+          </a:ln>
+        </p:spPr>
+        <p:style>
+          <a:lnRef idx="1">
+            <a:schemeClr val="accent1"/>
+          </a:lnRef>
+          <a:fillRef idx="3">
+            <a:schemeClr val="accent1"/>
+          </a:fillRef>
+          <a:effectRef idx="2">
+            <a:schemeClr val="accent1"/>
+          </a:effectRef>
+          <a:fontRef idx="minor">
+            <a:schemeClr val="lt1"/>
+          </a:fontRef>
+        </p:style>
+        <p:txBody>
+          <a:bodyPr rtlCol="0" anchor="ctr"/>
+          <a:lstStyle/>
+          <a:p>
+            <a:pPr algn="ctr"/>
+          </a:p>
+        </p:txBody>
+      </p:sp>
+      <p:sp>
+        <p:nvSpPr>
+          <p:cNvPr id="35" name="TextBox 34"/>
+          <p:cNvSpPr txBox="1"/>
+          <p:nvPr/>
+        </p:nvSpPr>
+        <p:spPr>
+          <a:xfrm>
+            <a:off x="8494775" y="3401568"/>
+            <a:ext cx="1691640" cy="228600"/>
+          </a:xfrm>
+          <a:prstGeom prst="rect">
+            <a:avLst/>
+          </a:prstGeom>
+          <a:noFill/>
+        </p:spPr>
+        <p:txBody>
+          <a:bodyPr wrap="square">
+            <a:spAutoFit/>
+          </a:bodyPr>
+          <a:lstStyle/>
+          <a:p>
+            <a:pPr>
+              <a:spcAft>
+                <a:spcPts val="400"/>
+              </a:spcAft>
+            </a:pPr>
+            <a:r>
+              <a:rPr sz="800" b="1">
+                <a:solidFill>
+                  <a:srgbClr val="F59E0B"/>
+                </a:solidFill>
+                <a:latin typeface="Calibri"/>
+              </a:rPr>
+              <a:t>STEP 5</a:t>
+            </a:r>
+          </a:p>
+        </p:txBody>
+      </p:sp>
+      <p:sp>
+        <p:nvSpPr>
+          <p:cNvPr id="36" name="TextBox 35"/>
+          <p:cNvSpPr txBox="1"/>
+          <p:nvPr/>
+        </p:nvSpPr>
+        <p:spPr>
+          <a:xfrm>
+            <a:off x="8494775" y="3611880"/>
+            <a:ext cx="1691640" cy="274320"/>
+          </a:xfrm>
+          <a:prstGeom prst="rect">
+            <a:avLst/>
+          </a:prstGeom>
+          <a:noFill/>
+        </p:spPr>
+        <p:txBody>
+          <a:bodyPr wrap="square">
+            <a:spAutoFit/>
+          </a:bodyPr>
+          <a:lstStyle/>
+          <a:p>
+            <a:pPr>
+              <a:spcAft>
+                <a:spcPts val="400"/>
+              </a:spcAft>
+            </a:pPr>
+            <a:r>
+              <a:rPr sz="1100" b="1">
+                <a:solidFill>
+                  <a:srgbClr val="1A2333"/>
+                </a:solidFill>
+                <a:latin typeface="Calibri"/>
+              </a:rPr>
+              <a:t>Hybrid Fusion</a:t>
+            </a:r>
+          </a:p>
+        </p:txBody>
+      </p:sp>
+      <p:sp>
+        <p:nvSpPr>
+          <p:cNvPr id="37" name="TextBox 36"/>
+          <p:cNvSpPr txBox="1"/>
+          <p:nvPr/>
+        </p:nvSpPr>
+        <p:spPr>
+          <a:xfrm>
+            <a:off x="8494775" y="3840480"/>
+            <a:ext cx="1691640" cy="201168"/>
+          </a:xfrm>
+          <a:prstGeom prst="rect">
+            <a:avLst/>
+          </a:prstGeom>
+          <a:noFill/>
+        </p:spPr>
+        <p:txBody>
+          <a:bodyPr wrap="square">
+            <a:spAutoFit/>
+          </a:bodyPr>
+          <a:lstStyle/>
+          <a:p>
+            <a:pPr>
+              <a:spcAft>
+                <a:spcPts val="400"/>
+              </a:spcAft>
+            </a:pPr>
+            <a:r>
+              <a:rPr sz="900" b="0">
+                <a:solidFill>
+                  <a:srgbClr val="6B7280"/>
+                </a:solidFill>
+                <a:latin typeface="Calibri"/>
+              </a:rPr>
+              <a:t>Aishwarya</a:t>
+            </a:r>
+          </a:p>
+        </p:txBody>
+      </p:sp>
+      <p:sp>
+        <p:nvSpPr>
+          <p:cNvPr id="38" name="Rounded Rectangle 37"/>
+          <p:cNvSpPr/>
+          <p:nvPr/>
+        </p:nvSpPr>
+        <p:spPr>
+          <a:xfrm>
+            <a:off x="10286999" y="3337560"/>
+            <a:ext cx="1828800" cy="731520"/>
+          </a:xfrm>
+          <a:prstGeom prst="roundRect">
+            <a:avLst>
+              <a:gd name="adj" fmla="val 8000"/>
+            </a:avLst>
+          </a:prstGeom>
+          <a:solidFill>
+            <a:srgbClr val="FFFFFF"/>
+          </a:solidFill>
+          <a:ln w="15240">
+            <a:solidFill>
+              <a:srgbClr val="7C3AED"/>
+            </a:solidFill>
+          </a:ln>
+        </p:spPr>
+        <p:style>
+          <a:lnRef idx="1">
+            <a:schemeClr val="accent1"/>
+          </a:lnRef>
+          <a:fillRef idx="3">
+            <a:schemeClr val="accent1"/>
+          </a:fillRef>
+          <a:effectRef idx="2">
+            <a:schemeClr val="accent1"/>
+          </a:effectRef>
+          <a:fontRef idx="minor">
+            <a:schemeClr val="lt1"/>
+          </a:fontRef>
+        </p:style>
+        <p:txBody>
+          <a:bodyPr rtlCol="0" anchor="ctr"/>
+          <a:lstStyle/>
+          <a:p>
+            <a:pPr algn="ctr"/>
+          </a:p>
+        </p:txBody>
+      </p:sp>
+      <p:sp>
+        <p:nvSpPr>
+          <p:cNvPr id="39" name="Rectangle 38"/>
+          <p:cNvSpPr/>
+          <p:nvPr/>
+        </p:nvSpPr>
+        <p:spPr>
+          <a:xfrm>
+            <a:off x="10286999" y="3337560"/>
+            <a:ext cx="54864" cy="731520"/>
+          </a:xfrm>
+          <a:prstGeom prst="rect">
+            <a:avLst/>
+          </a:prstGeom>
+          <a:solidFill>
+            <a:srgbClr val="7C3AED"/>
+          </a:solidFill>
+          <a:ln>
+            <a:noFill/>
+          </a:ln>
+        </p:spPr>
+        <p:style>
+          <a:lnRef idx="1">
+            <a:schemeClr val="accent1"/>
+          </a:lnRef>
+          <a:fillRef idx="3">
+            <a:schemeClr val="accent1"/>
+          </a:fillRef>
+          <a:effectRef idx="2">
+            <a:schemeClr val="accent1"/>
+          </a:effectRef>
+          <a:fontRef idx="minor">
+            <a:schemeClr val="lt1"/>
+          </a:fontRef>
+        </p:style>
+        <p:txBody>
+          <a:bodyPr rtlCol="0" anchor="ctr"/>
+          <a:lstStyle/>
+          <a:p>
+            <a:pPr algn="ctr"/>
+          </a:p>
+        </p:txBody>
+      </p:sp>
+      <p:sp>
+        <p:nvSpPr>
+          <p:cNvPr id="40" name="TextBox 39"/>
+          <p:cNvSpPr txBox="1"/>
+          <p:nvPr/>
+        </p:nvSpPr>
+        <p:spPr>
+          <a:xfrm>
+            <a:off x="10424159" y="3401568"/>
+            <a:ext cx="1691640" cy="228600"/>
+          </a:xfrm>
+          <a:prstGeom prst="rect">
+            <a:avLst/>
+          </a:prstGeom>
+          <a:noFill/>
+        </p:spPr>
+        <p:txBody>
+          <a:bodyPr wrap="square">
+            <a:spAutoFit/>
+          </a:bodyPr>
+          <a:lstStyle/>
+          <a:p>
+            <a:pPr>
+              <a:spcAft>
+                <a:spcPts val="400"/>
+              </a:spcAft>
+            </a:pPr>
+            <a:r>
+              <a:rPr sz="800" b="1">
+                <a:solidFill>
+                  <a:srgbClr val="7C3AED"/>
+                </a:solidFill>
+                <a:latin typeface="Calibri"/>
+              </a:rPr>
+              <a:t>STEP 6</a:t>
+            </a:r>
+          </a:p>
+        </p:txBody>
+      </p:sp>
+      <p:sp>
+        <p:nvSpPr>
+          <p:cNvPr id="41" name="TextBox 40"/>
+          <p:cNvSpPr txBox="1"/>
+          <p:nvPr/>
+        </p:nvSpPr>
+        <p:spPr>
+          <a:xfrm>
+            <a:off x="10424159" y="3611880"/>
+            <a:ext cx="1691640" cy="274320"/>
+          </a:xfrm>
+          <a:prstGeom prst="rect">
+            <a:avLst/>
+          </a:prstGeom>
+          <a:noFill/>
+        </p:spPr>
+        <p:txBody>
+          <a:bodyPr wrap="square">
+            <a:spAutoFit/>
+          </a:bodyPr>
+          <a:lstStyle/>
+          <a:p>
+            <a:pPr>
+              <a:spcAft>
+                <a:spcPts val="400"/>
+              </a:spcAft>
+            </a:pPr>
+            <a:r>
+              <a:rPr sz="1100" b="1">
+                <a:solidFill>
+                  <a:srgbClr val="1A2333"/>
+                </a:solidFill>
+                <a:latin typeface="Calibri"/>
+              </a:rPr>
+              <a:t>Evaluation</a:t>
+            </a:r>
+          </a:p>
+        </p:txBody>
+      </p:sp>
+      <p:sp>
+        <p:nvSpPr>
+          <p:cNvPr id="42" name="TextBox 41"/>
+          <p:cNvSpPr txBox="1"/>
+          <p:nvPr/>
+        </p:nvSpPr>
+        <p:spPr>
+          <a:xfrm>
+            <a:off x="10424159" y="3840480"/>
+            <a:ext cx="1691640" cy="201168"/>
+          </a:xfrm>
+          <a:prstGeom prst="rect">
+            <a:avLst/>
+          </a:prstGeom>
+          <a:noFill/>
+        </p:spPr>
+        <p:txBody>
+          <a:bodyPr wrap="square">
+            <a:spAutoFit/>
+          </a:bodyPr>
+          <a:lstStyle/>
+          <a:p>
+            <a:pPr>
+              <a:spcAft>
+                <a:spcPts val="400"/>
+              </a:spcAft>
+            </a:pPr>
+            <a:r>
+              <a:rPr sz="900" b="0">
+                <a:solidFill>
+                  <a:srgbClr val="6B7280"/>
+                </a:solidFill>
+                <a:latin typeface="Calibri"/>
+              </a:rPr>
+              <a:t>Aishwarya</a:t>
+            </a:r>
+          </a:p>
+        </p:txBody>
+      </p:sp>
+      <p:sp>
+        <p:nvSpPr>
+          <p:cNvPr id="43" name="Rounded Rectangle 42"/>
+          <p:cNvSpPr/>
+          <p:nvPr/>
+        </p:nvSpPr>
+        <p:spPr>
+          <a:xfrm>
+            <a:off x="640080" y="4114800"/>
+            <a:ext cx="10972800" cy="594360"/>
+          </a:xfrm>
+          <a:prstGeom prst="roundRect">
+            <a:avLst>
+              <a:gd name="adj" fmla="val 8000"/>
+            </a:avLst>
+          </a:prstGeom>
+          <a:solidFill>
+            <a:srgbClr val="0A2A4F"/>
+          </a:solidFill>
+          <a:ln>
+            <a:noFill/>
+          </a:ln>
+        </p:spPr>
+        <p:style>
+          <a:lnRef idx="1">
+            <a:schemeClr val="accent1"/>
+          </a:lnRef>
+          <a:fillRef idx="3">
+            <a:schemeClr val="accent1"/>
+          </a:fillRef>
+          <a:effectRef idx="2">
+            <a:schemeClr val="accent1"/>
+          </a:effectRef>
+          <a:fontRef idx="minor">
+            <a:schemeClr val="lt1"/>
+          </a:fontRef>
+        </p:style>
+        <p:txBody>
+          <a:bodyPr rtlCol="0" anchor="ctr"/>
+          <a:lstStyle/>
+          <a:p>
+            <a:pPr algn="ctr"/>
+          </a:p>
+        </p:txBody>
+      </p:sp>
+      <p:sp>
+        <p:nvSpPr>
+          <p:cNvPr id="44" name="TextBox 43"/>
+          <p:cNvSpPr txBox="1"/>
+          <p:nvPr/>
+        </p:nvSpPr>
+        <p:spPr>
+          <a:xfrm>
+            <a:off x="822960" y="4206240"/>
+            <a:ext cx="10607040" cy="457200"/>
+          </a:xfrm>
+          <a:prstGeom prst="rect">
+            <a:avLst/>
+          </a:prstGeom>
+          <a:noFill/>
+        </p:spPr>
+        <p:txBody>
+          <a:bodyPr wrap="square">
+            <a:spAutoFit/>
+          </a:bodyPr>
+          <a:lstStyle/>
+          <a:p>
+            <a:pPr algn="ctr">
+              <a:spcAft>
+                <a:spcPts val="400"/>
+              </a:spcAft>
+            </a:pPr>
+            <a:r>
+              <a:rPr sz="1500" b="1">
+                <a:solidFill>
+                  <a:srgbClr val="FFFFFF"/>
+                </a:solidFill>
+                <a:latin typeface="Cambria Math"/>
+              </a:rPr>
+              <a:t>FusedScore(d) = a · RetrievalSim(d) + (1 - a) · MiningConf(d)        Default a = 0.3</a:t>
+            </a:r>
+          </a:p>
+        </p:txBody>
+      </p:sp>
+      <p:sp>
+        <p:nvSpPr>
+          <p:cNvPr id="45" name="TextBox 44"/>
+          <p:cNvSpPr txBox="1"/>
+          <p:nvPr/>
+        </p:nvSpPr>
+        <p:spPr>
+          <a:xfrm>
+            <a:off x="5852160" y="4901184"/>
+            <a:ext cx="457200" cy="228600"/>
+          </a:xfrm>
+          <a:prstGeom prst="rect">
+            <a:avLst/>
+          </a:prstGeom>
+          <a:noFill/>
+        </p:spPr>
+        <p:txBody>
+          <a:bodyPr wrap="square">
+            <a:spAutoFit/>
+          </a:bodyPr>
+          <a:lstStyle/>
+          <a:p>
+            <a:pPr algn="ctr">
+              <a:spcAft>
+                <a:spcPts val="400"/>
+              </a:spcAft>
+            </a:pPr>
+            <a:r>
+              <a:rPr sz="1400" b="0">
+                <a:solidFill>
+                  <a:srgbClr val="6B7280"/>
+                </a:solidFill>
+                <a:latin typeface="Calibri"/>
+              </a:rPr>
+              <a:t>▼</a:t>
+            </a:r>
+          </a:p>
+        </p:txBody>
+      </p:sp>
+      <p:sp>
+        <p:nvSpPr>
+          <p:cNvPr id="46" name="Rounded Rectangle 45"/>
+          <p:cNvSpPr/>
+          <p:nvPr/>
+        </p:nvSpPr>
+        <p:spPr>
+          <a:xfrm>
+            <a:off x="457200" y="5138928"/>
+            <a:ext cx="11338560" cy="777240"/>
+          </a:xfrm>
+          <a:prstGeom prst="roundRect">
+            <a:avLst>
+              <a:gd name="adj" fmla="val 8000"/>
+            </a:avLst>
+          </a:prstGeom>
+          <a:solidFill>
+            <a:srgbClr val="E5ECF5"/>
+          </a:solidFill>
+          <a:ln w="19050">
+            <a:solidFill>
+              <a:srgbClr val="10B981"/>
+            </a:solidFill>
+          </a:ln>
+        </p:spPr>
+        <p:style>
+          <a:lnRef idx="1">
+            <a:schemeClr val="accent1"/>
+          </a:lnRef>
+          <a:fillRef idx="3">
+            <a:schemeClr val="accent1"/>
+          </a:fillRef>
+          <a:effectRef idx="2">
+            <a:schemeClr val="accent1"/>
+          </a:effectRef>
+          <a:fontRef idx="minor">
+            <a:schemeClr val="lt1"/>
+          </a:fontRef>
+        </p:style>
+        <p:txBody>
+          <a:bodyPr rtlCol="0" anchor="ctr"/>
+          <a:lstStyle/>
+          <a:p>
+            <a:pPr algn="ctr"/>
+          </a:p>
+        </p:txBody>
+      </p:sp>
+      <p:sp>
+        <p:nvSpPr>
+          <p:cNvPr id="47" name="TextBox 46"/>
+          <p:cNvSpPr txBox="1"/>
+          <p:nvPr/>
+        </p:nvSpPr>
+        <p:spPr>
+          <a:xfrm>
+            <a:off x="640080" y="5257800"/>
+            <a:ext cx="2286000" cy="274320"/>
+          </a:xfrm>
+          <a:prstGeom prst="rect">
+            <a:avLst/>
+          </a:prstGeom>
+          <a:noFill/>
+        </p:spPr>
+        <p:txBody>
+          <a:bodyPr wrap="square">
+            <a:spAutoFit/>
+          </a:bodyPr>
+          <a:lstStyle/>
+          <a:p>
+            <a:pPr>
+              <a:spcAft>
+                <a:spcPts val="400"/>
+              </a:spcAft>
+            </a:pPr>
+            <a:r>
+              <a:rPr sz="1000" b="1">
+                <a:solidFill>
+                  <a:srgbClr val="10B981"/>
+                </a:solidFill>
+                <a:latin typeface="Calibri"/>
+              </a:rPr>
+              <a:t>DATA TIER</a:t>
+            </a:r>
+          </a:p>
+        </p:txBody>
+      </p:sp>
+      <p:sp>
+        <p:nvSpPr>
+          <p:cNvPr id="48" name="TextBox 47"/>
+          <p:cNvSpPr txBox="1"/>
+          <p:nvPr/>
+        </p:nvSpPr>
+        <p:spPr>
+          <a:xfrm>
+            <a:off x="640080" y="5504688"/>
+            <a:ext cx="10972800" cy="365760"/>
+          </a:xfrm>
+          <a:prstGeom prst="rect">
+            <a:avLst/>
+          </a:prstGeom>
+          <a:noFill/>
+        </p:spPr>
+        <p:txBody>
+          <a:bodyPr wrap="square">
+            <a:spAutoFit/>
+          </a:bodyPr>
+          <a:lstStyle/>
+          <a:p>
+            <a:pPr>
+              <a:spcAft>
+                <a:spcPts val="400"/>
+              </a:spcAft>
+            </a:pPr>
+            <a:r>
+              <a:rPr sz="1200" b="0">
+                <a:solidFill>
+                  <a:srgbClr val="1A2333"/>
+                </a:solidFill>
+                <a:latin typeface="Calibri"/>
+              </a:rPr>
+              <a:t>23,839 rules  ·  24,063 passages  ·  FAISS (offline) or Pinecone Serverless 3072d (production)  ·  Azure OpenAI embeddings + GPT-5.3 explainer</a:t>
+            </a:r>
+          </a:p>
+        </p:txBody>
+      </p:sp>
+      <p:sp>
+        <p:nvSpPr>
+          <p:cNvPr id="49" name="Rectangle 48"/>
+          <p:cNvSpPr/>
+          <p:nvPr/>
+        </p:nvSpPr>
+        <p:spPr>
+          <a:xfrm>
+            <a:off x="457200" y="6473952"/>
+            <a:ext cx="11338560" cy="13716"/>
+          </a:xfrm>
+          <a:prstGeom prst="rect">
+            <a:avLst/>
+          </a:prstGeom>
+          <a:solidFill>
+            <a:srgbClr val="E5ECF5"/>
+          </a:solidFill>
+          <a:ln>
+            <a:noFill/>
+          </a:ln>
+        </p:spPr>
+        <p:style>
+          <a:lnRef idx="1">
+            <a:schemeClr val="accent1"/>
+          </a:lnRef>
+          <a:fillRef idx="3">
+            <a:schemeClr val="accent1"/>
+          </a:fillRef>
+          <a:effectRef idx="2">
+            <a:schemeClr val="accent1"/>
+          </a:effectRef>
+          <a:fontRef idx="minor">
+            <a:schemeClr val="lt1"/>
+          </a:fontRef>
+        </p:style>
+        <p:txBody>
+          <a:bodyPr rtlCol="0" anchor="ctr"/>
+          <a:lstStyle/>
+          <a:p>
+            <a:pPr algn="ctr"/>
+          </a:p>
+        </p:txBody>
+      </p:sp>
+      <p:sp>
+        <p:nvSpPr>
+          <p:cNvPr id="50" name="TextBox 49"/>
+          <p:cNvSpPr txBox="1"/>
+          <p:nvPr/>
+        </p:nvSpPr>
+        <p:spPr>
+          <a:xfrm>
+            <a:off x="457200" y="6528816"/>
+            <a:ext cx="6400800" cy="274320"/>
+          </a:xfrm>
+          <a:prstGeom prst="rect">
+            <a:avLst/>
+          </a:prstGeom>
+          <a:noFill/>
+        </p:spPr>
+        <p:txBody>
+          <a:bodyPr wrap="square">
+            <a:spAutoFit/>
+          </a:bodyPr>
+          <a:lstStyle/>
+          <a:p>
+            <a:pPr>
+              <a:spcAft>
+                <a:spcPts val="400"/>
+              </a:spcAft>
+            </a:pPr>
+            <a:r>
+              <a:rPr sz="900" b="0">
+                <a:solidFill>
+                  <a:srgbClr val="6B7280"/>
+                </a:solidFill>
+                <a:latin typeface="Calibri"/>
+              </a:rPr>
+              <a:t>CMPE 255 Spring 2026  |  Patil, Kumar, Madhave</a:t>
+            </a:r>
+          </a:p>
+        </p:txBody>
+      </p:sp>
+      <p:sp>
+        <p:nvSpPr>
+          <p:cNvPr id="51" name="TextBox 50"/>
+          <p:cNvSpPr txBox="1"/>
+          <p:nvPr/>
+        </p:nvSpPr>
+        <p:spPr>
+          <a:xfrm>
+            <a:off x="7772400" y="6528816"/>
+            <a:ext cx="4023360" cy="274320"/>
+          </a:xfrm>
+          <a:prstGeom prst="rect">
+            <a:avLst/>
+          </a:prstGeom>
+          <a:noFill/>
+        </p:spPr>
+        <p:txBody>
+          <a:bodyPr wrap="square">
+            <a:spAutoFit/>
+          </a:bodyPr>
+          <a:lstStyle/>
+          <a:p>
+            <a:pPr algn="r">
+              <a:spcAft>
+                <a:spcPts val="400"/>
+              </a:spcAft>
+            </a:pPr>
+            <a:r>
+              <a:rPr sz="900" b="0">
+                <a:solidFill>
+                  <a:srgbClr val="6B7280"/>
+                </a:solidFill>
+                <a:latin typeface="Calibri"/>
+              </a:rPr>
+              <a:t>2 / 7</a:t>
             </a:r>
           </a:p>
         </p:txBody>
@@ -5042,14 +6535,14 @@
         </p:nvSpPr>
         <p:spPr>
           <a:xfrm>
-            <a:off x="0" y="0"/>
-            <a:ext cx="12191695" cy="411480"/>
+            <a:off x="457200" y="457200"/>
+            <a:ext cx="73152" cy="502920"/>
           </a:xfrm>
           <a:prstGeom prst="rect">
             <a:avLst/>
           </a:prstGeom>
           <a:solidFill>
-            <a:srgbClr val="0D3B66"/>
+            <a:srgbClr val="3A86FF"/>
           </a:solidFill>
           <a:ln>
             <a:noFill/>
@@ -5085,8 +6578,8 @@
         </p:nvSpPr>
         <p:spPr>
           <a:xfrm>
-            <a:off x="457200" y="502920"/>
-            <a:ext cx="10972800" cy="640080"/>
+            <a:off x="640080" y="457200"/>
+            <a:ext cx="7315200" cy="274320"/>
           </a:xfrm>
           <a:prstGeom prst="rect">
             <a:avLst/>
@@ -5099,14 +6592,19 @@
           </a:bodyPr>
           <a:lstStyle/>
           <a:p>
-            <a:r>
-              <a:rPr sz="2600" b="1">
-                <a:solidFill>
-                  <a:srgbClr val="0D3B66"/>
+            <a:pPr>
+              <a:spcAft>
+                <a:spcPts val="400"/>
+              </a:spcAft>
+            </a:pPr>
+            <a:r>
+              <a:rPr sz="1000" b="1">
+                <a:solidFill>
+                  <a:srgbClr val="3A86FF"/>
                 </a:solidFill>
                 <a:latin typeface="Calibri"/>
               </a:rPr>
-              <a:t>3. Data and Methodology</a:t>
+              <a:t>SLIDE 03  /  RESULTS</a:t>
             </a:r>
           </a:p>
         </p:txBody>
@@ -5119,8 +6617,8 @@
         </p:nvSpPr>
         <p:spPr>
           <a:xfrm>
-            <a:off x="457200" y="1051560"/>
-            <a:ext cx="10972800" cy="365760"/>
+            <a:off x="640080" y="713232"/>
+            <a:ext cx="10972800" cy="502920"/>
           </a:xfrm>
           <a:prstGeom prst="rect">
             <a:avLst/>
@@ -5133,14 +6631,19 @@
           </a:bodyPr>
           <a:lstStyle/>
           <a:p>
-            <a:r>
-              <a:rPr sz="1400" b="0">
-                <a:solidFill>
-                  <a:srgbClr val="6B7280"/>
+            <a:pPr>
+              <a:spcAft>
+                <a:spcPts val="400"/>
+              </a:spcAft>
+            </a:pPr>
+            <a:r>
+              <a:rPr sz="2800" b="1">
+                <a:solidFill>
+                  <a:srgbClr val="0A2A4F"/>
                 </a:solidFill>
                 <a:latin typeface="Calibri"/>
               </a:rPr>
-              <a:t>Two complementary data sources, one fusion rule</a:t>
+              <a:t>Headline metrics, 200 synthetic test cases</a:t>
             </a:r>
           </a:p>
         </p:txBody>
@@ -5153,8 +6656,8 @@
         </p:nvSpPr>
         <p:spPr>
           <a:xfrm>
-            <a:off x="457200" y="1554480"/>
-            <a:ext cx="5486400" cy="365760"/>
+            <a:off x="640080" y="1207008"/>
+            <a:ext cx="10972800" cy="365760"/>
           </a:xfrm>
           <a:prstGeom prst="rect">
             <a:avLst/>
@@ -5167,28 +6670,166 @@
           </a:bodyPr>
           <a:lstStyle/>
           <a:p>
-            <a:r>
-              <a:rPr sz="1800" b="1">
-                <a:solidFill>
-                  <a:srgbClr val="0D3B66"/>
+            <a:pPr>
+              <a:spcAft>
+                <a:spcPts val="400"/>
+              </a:spcAft>
+            </a:pPr>
+            <a:r>
+              <a:rPr sz="1400" b="0">
+                <a:solidFill>
+                  <a:srgbClr val="6B7280"/>
                 </a:solidFill>
                 <a:latin typeface="Calibri"/>
               </a:rPr>
-              <a:t>Disease-Symptom transactions</a:t>
-            </a:r>
-          </a:p>
-        </p:txBody>
-      </p:sp>
-      <p:sp>
-        <p:nvSpPr>
-          <p:cNvPr id="6" name="TextBox 5"/>
+              <a:t>Fusion beats mining alone. Retrieval alone is unusable.</a:t>
+            </a:r>
+          </a:p>
+        </p:txBody>
+      </p:sp>
+      <p:sp>
+        <p:nvSpPr>
+          <p:cNvPr id="6" name="Rectangle 5"/>
+          <p:cNvSpPr/>
+          <p:nvPr/>
+        </p:nvSpPr>
+        <p:spPr>
+          <a:xfrm>
+            <a:off x="457200" y="1627632"/>
+            <a:ext cx="11338560" cy="13716"/>
+          </a:xfrm>
+          <a:prstGeom prst="rect">
+            <a:avLst/>
+          </a:prstGeom>
+          <a:solidFill>
+            <a:srgbClr val="E5ECF5"/>
+          </a:solidFill>
+          <a:ln>
+            <a:noFill/>
+          </a:ln>
+        </p:spPr>
+        <p:style>
+          <a:lnRef idx="1">
+            <a:schemeClr val="accent1"/>
+          </a:lnRef>
+          <a:fillRef idx="3">
+            <a:schemeClr val="accent1"/>
+          </a:fillRef>
+          <a:effectRef idx="2">
+            <a:schemeClr val="accent1"/>
+          </a:effectRef>
+          <a:fontRef idx="minor">
+            <a:schemeClr val="lt1"/>
+          </a:fontRef>
+        </p:style>
+        <p:txBody>
+          <a:bodyPr rtlCol="0" anchor="ctr"/>
+          <a:lstStyle/>
+          <a:p>
+            <a:pPr algn="ctr"/>
+          </a:p>
+        </p:txBody>
+      </p:sp>
+      <p:sp>
+        <p:nvSpPr>
+          <p:cNvPr id="7" name="Rounded Rectangle 6"/>
+          <p:cNvSpPr/>
+          <p:nvPr/>
+        </p:nvSpPr>
+        <p:spPr>
+          <a:xfrm>
+            <a:off x="457200" y="1874519"/>
+            <a:ext cx="2697480" cy="1417320"/>
+          </a:xfrm>
+          <a:prstGeom prst="roundRect">
+            <a:avLst>
+              <a:gd name="adj" fmla="val 8000"/>
+            </a:avLst>
+          </a:prstGeom>
+          <a:solidFill>
+            <a:srgbClr val="FFFFFF"/>
+          </a:solidFill>
+          <a:ln w="19050">
+            <a:solidFill>
+              <a:srgbClr val="3A86FF"/>
+            </a:solidFill>
+          </a:ln>
+        </p:spPr>
+        <p:style>
+          <a:lnRef idx="1">
+            <a:schemeClr val="accent1"/>
+          </a:lnRef>
+          <a:fillRef idx="3">
+            <a:schemeClr val="accent1"/>
+          </a:fillRef>
+          <a:effectRef idx="2">
+            <a:schemeClr val="accent1"/>
+          </a:effectRef>
+          <a:fontRef idx="minor">
+            <a:schemeClr val="lt1"/>
+          </a:fontRef>
+        </p:style>
+        <p:txBody>
+          <a:bodyPr rtlCol="0" anchor="ctr"/>
+          <a:lstStyle/>
+          <a:p>
+            <a:pPr algn="ctr"/>
+          </a:p>
+        </p:txBody>
+      </p:sp>
+      <p:sp>
+        <p:nvSpPr>
+          <p:cNvPr id="8" name="Rectangle 7"/>
+          <p:cNvSpPr/>
+          <p:nvPr/>
+        </p:nvSpPr>
+        <p:spPr>
+          <a:xfrm>
+            <a:off x="457200" y="1874519"/>
+            <a:ext cx="2697480" cy="91440"/>
+          </a:xfrm>
+          <a:prstGeom prst="rect">
+            <a:avLst/>
+          </a:prstGeom>
+          <a:solidFill>
+            <a:srgbClr val="3A86FF"/>
+          </a:solidFill>
+          <a:ln>
+            <a:noFill/>
+          </a:ln>
+        </p:spPr>
+        <p:style>
+          <a:lnRef idx="1">
+            <a:schemeClr val="accent1"/>
+          </a:lnRef>
+          <a:fillRef idx="3">
+            <a:schemeClr val="accent1"/>
+          </a:fillRef>
+          <a:effectRef idx="2">
+            <a:schemeClr val="accent1"/>
+          </a:effectRef>
+          <a:fontRef idx="minor">
+            <a:schemeClr val="lt1"/>
+          </a:fontRef>
+        </p:style>
+        <p:txBody>
+          <a:bodyPr rtlCol="0" anchor="ctr"/>
+          <a:lstStyle/>
+          <a:p>
+            <a:pPr algn="ctr"/>
+          </a:p>
+        </p:txBody>
+      </p:sp>
+      <p:sp>
+        <p:nvSpPr>
+          <p:cNvPr id="9" name="TextBox 8"/>
           <p:cNvSpPr txBox="1"/>
           <p:nvPr/>
         </p:nvSpPr>
         <p:spPr>
           <a:xfrm>
-            <a:off x="457200" y="1920240"/>
-            <a:ext cx="5486400" cy="2286000"/>
+            <a:off x="640080" y="2057399"/>
+            <a:ext cx="2331720" cy="274320"/>
           </a:xfrm>
           <a:prstGeom prst="rect">
             <a:avLst/>
@@ -5203,79 +6844,31 @@
           <a:p>
             <a:pPr>
               <a:spcAft>
-                <a:spcPts val="600"/>
-              </a:spcAft>
-            </a:pPr>
-            <a:r>
-              <a:rPr sz="1400">
-                <a:solidFill>
-                  <a:srgbClr val="1F2A3D"/>
+                <a:spcPts val="400"/>
+              </a:spcAft>
+            </a:pPr>
+            <a:r>
+              <a:rPr sz="1000" b="1">
+                <a:solidFill>
+                  <a:srgbClr val="3A86FF"/>
                 </a:solidFill>
                 <a:latin typeface="Calibri"/>
               </a:rPr>
-              <a:t>  4,920 rows, 41 diseases (Kaggle-style schema)</a:t>
-            </a:r>
-          </a:p>
-          <a:p>
-            <a:pPr>
-              <a:spcAft>
-                <a:spcPts val="600"/>
-              </a:spcAft>
-            </a:pPr>
-            <a:r>
-              <a:rPr sz="1400">
-                <a:solidFill>
-                  <a:srgbClr val="1F2A3D"/>
-                </a:solidFill>
-                <a:latin typeface="Calibri"/>
-              </a:rPr>
-              <a:t>  Up to 17 symptoms per row, 131 unique tokens</a:t>
-            </a:r>
-          </a:p>
-          <a:p>
-            <a:pPr>
-              <a:spcAft>
-                <a:spcPts val="600"/>
-              </a:spcAft>
-            </a:pPr>
-            <a:r>
-              <a:rPr sz="1400">
-                <a:solidFill>
-                  <a:srgbClr val="1F2A3D"/>
-                </a:solidFill>
-                <a:latin typeface="Calibri"/>
-              </a:rPr>
-              <a:t>  ETL: lowercase + snake_case normalisation</a:t>
-            </a:r>
-          </a:p>
-          <a:p>
-            <a:pPr>
-              <a:spcAft>
-                <a:spcPts val="600"/>
-              </a:spcAft>
-            </a:pPr>
-            <a:r>
-              <a:rPr sz="1400">
-                <a:solidFill>
-                  <a:srgbClr val="1F2A3D"/>
-                </a:solidFill>
-                <a:latin typeface="Calibri"/>
-              </a:rPr>
-              <a:t>  FP-Growth basket = symptoms + DX:disease item</a:t>
-            </a:r>
-          </a:p>
-        </p:txBody>
-      </p:sp>
-      <p:sp>
-        <p:nvSpPr>
-          <p:cNvPr id="7" name="TextBox 6"/>
+              <a:t>RECALL @ 1</a:t>
+            </a:r>
+          </a:p>
+        </p:txBody>
+      </p:sp>
+      <p:sp>
+        <p:nvSpPr>
+          <p:cNvPr id="10" name="TextBox 9"/>
           <p:cNvSpPr txBox="1"/>
           <p:nvPr/>
         </p:nvSpPr>
         <p:spPr>
           <a:xfrm>
-            <a:off x="457200" y="4114800"/>
-            <a:ext cx="5486400" cy="365760"/>
+            <a:off x="640080" y="2331719"/>
+            <a:ext cx="2331720" cy="594360"/>
           </a:xfrm>
           <a:prstGeom prst="rect">
             <a:avLst/>
@@ -5288,28 +6881,33 @@
           </a:bodyPr>
           <a:lstStyle/>
           <a:p>
-            <a:r>
-              <a:rPr sz="1800" b="1">
-                <a:solidFill>
-                  <a:srgbClr val="0D3B66"/>
+            <a:pPr>
+              <a:spcAft>
+                <a:spcPts val="400"/>
+              </a:spcAft>
+            </a:pPr>
+            <a:r>
+              <a:rPr sz="3000" b="1">
+                <a:solidFill>
+                  <a:srgbClr val="0A2A4F"/>
                 </a:solidFill>
                 <a:latin typeface="Calibri"/>
               </a:rPr>
-              <a:t>MedQuAD biomedical Q&amp;A</a:t>
-            </a:r>
-          </a:p>
-        </p:txBody>
-      </p:sp>
-      <p:sp>
-        <p:nvSpPr>
-          <p:cNvPr id="8" name="TextBox 7"/>
+              <a:t>0.825</a:t>
+            </a:r>
+          </a:p>
+        </p:txBody>
+      </p:sp>
+      <p:sp>
+        <p:nvSpPr>
+          <p:cNvPr id="11" name="TextBox 10"/>
           <p:cNvSpPr txBox="1"/>
           <p:nvPr/>
         </p:nvSpPr>
         <p:spPr>
           <a:xfrm>
-            <a:off x="457200" y="4480560"/>
-            <a:ext cx="5486400" cy="1828800"/>
+            <a:off x="640080" y="2880359"/>
+            <a:ext cx="2331720" cy="365760"/>
           </a:xfrm>
           <a:prstGeom prst="rect">
             <a:avLst/>
@@ -5324,79 +6922,121 @@
           <a:p>
             <a:pPr>
               <a:spcAft>
-                <a:spcPts val="600"/>
-              </a:spcAft>
-            </a:pPr>
-            <a:r>
-              <a:rPr sz="1400">
-                <a:solidFill>
-                  <a:srgbClr val="1F2A3D"/>
+                <a:spcPts val="400"/>
+              </a:spcAft>
+            </a:pPr>
+            <a:r>
+              <a:rPr sz="1000" b="0">
+                <a:solidFill>
+                  <a:srgbClr val="6B7280"/>
                 </a:solidFill>
                 <a:latin typeface="Calibri"/>
               </a:rPr>
-              <a:t>  24,063 passages from 11k NIH XML files</a:t>
-            </a:r>
-          </a:p>
-          <a:p>
-            <a:pPr>
-              <a:spcAft>
-                <a:spcPts val="600"/>
-              </a:spcAft>
-            </a:pPr>
-            <a:r>
-              <a:rPr sz="1400">
-                <a:solidFill>
-                  <a:srgbClr val="1F2A3D"/>
-                </a:solidFill>
-                <a:latin typeface="Calibri"/>
-              </a:rPr>
-              <a:t>  1000-char chunks with 200-char overlap</a:t>
-            </a:r>
-          </a:p>
-          <a:p>
-            <a:pPr>
-              <a:spcAft>
-                <a:spcPts val="600"/>
-              </a:spcAft>
-            </a:pPr>
-            <a:r>
-              <a:rPr sz="1400">
-                <a:solidFill>
-                  <a:srgbClr val="1F2A3D"/>
-                </a:solidFill>
-                <a:latin typeface="Calibri"/>
-              </a:rPr>
-              <a:t>  Embedded with MiniLM and PubMedBERT (MPS)</a:t>
-            </a:r>
-          </a:p>
-          <a:p>
-            <a:pPr>
-              <a:spcAft>
-                <a:spcPts val="600"/>
-              </a:spcAft>
-            </a:pPr>
-            <a:r>
-              <a:rPr sz="1400">
-                <a:solidFill>
-                  <a:srgbClr val="1F2A3D"/>
-                </a:solidFill>
-                <a:latin typeface="Calibri"/>
-              </a:rPr>
-              <a:t>  Indexed with FAISS IndexFlatIP</a:t>
-            </a:r>
-          </a:p>
-        </p:txBody>
-      </p:sp>
-      <p:sp>
-        <p:nvSpPr>
-          <p:cNvPr id="9" name="TextBox 8"/>
+              <a:t>fused, MiniLM, a = 0.3</a:t>
+            </a:r>
+          </a:p>
+        </p:txBody>
+      </p:sp>
+      <p:sp>
+        <p:nvSpPr>
+          <p:cNvPr id="12" name="Rounded Rectangle 11"/>
+          <p:cNvSpPr/>
+          <p:nvPr/>
+        </p:nvSpPr>
+        <p:spPr>
+          <a:xfrm>
+            <a:off x="3337560" y="1874519"/>
+            <a:ext cx="2697480" cy="1417320"/>
+          </a:xfrm>
+          <a:prstGeom prst="roundRect">
+            <a:avLst>
+              <a:gd name="adj" fmla="val 8000"/>
+            </a:avLst>
+          </a:prstGeom>
+          <a:solidFill>
+            <a:srgbClr val="FFFFFF"/>
+          </a:solidFill>
+          <a:ln w="19050">
+            <a:solidFill>
+              <a:srgbClr val="10B981"/>
+            </a:solidFill>
+          </a:ln>
+        </p:spPr>
+        <p:style>
+          <a:lnRef idx="1">
+            <a:schemeClr val="accent1"/>
+          </a:lnRef>
+          <a:fillRef idx="3">
+            <a:schemeClr val="accent1"/>
+          </a:fillRef>
+          <a:effectRef idx="2">
+            <a:schemeClr val="accent1"/>
+          </a:effectRef>
+          <a:fontRef idx="minor">
+            <a:schemeClr val="lt1"/>
+          </a:fontRef>
+        </p:style>
+        <p:txBody>
+          <a:bodyPr rtlCol="0" anchor="ctr"/>
+          <a:lstStyle/>
+          <a:p>
+            <a:pPr algn="ctr"/>
+          </a:p>
+        </p:txBody>
+      </p:sp>
+      <p:sp>
+        <p:nvSpPr>
+          <p:cNvPr id="13" name="Rectangle 12"/>
+          <p:cNvSpPr/>
+          <p:nvPr/>
+        </p:nvSpPr>
+        <p:spPr>
+          <a:xfrm>
+            <a:off x="3337560" y="1874519"/>
+            <a:ext cx="2697480" cy="91440"/>
+          </a:xfrm>
+          <a:prstGeom prst="rect">
+            <a:avLst/>
+          </a:prstGeom>
+          <a:solidFill>
+            <a:srgbClr val="10B981"/>
+          </a:solidFill>
+          <a:ln>
+            <a:noFill/>
+          </a:ln>
+        </p:spPr>
+        <p:style>
+          <a:lnRef idx="1">
+            <a:schemeClr val="accent1"/>
+          </a:lnRef>
+          <a:fillRef idx="3">
+            <a:schemeClr val="accent1"/>
+          </a:fillRef>
+          <a:effectRef idx="2">
+            <a:schemeClr val="accent1"/>
+          </a:effectRef>
+          <a:fontRef idx="minor">
+            <a:schemeClr val="lt1"/>
+          </a:fontRef>
+        </p:style>
+        <p:txBody>
+          <a:bodyPr rtlCol="0" anchor="ctr"/>
+          <a:lstStyle/>
+          <a:p>
+            <a:pPr algn="ctr"/>
+          </a:p>
+        </p:txBody>
+      </p:sp>
+      <p:sp>
+        <p:nvSpPr>
+          <p:cNvPr id="14" name="TextBox 13"/>
           <p:cNvSpPr txBox="1"/>
           <p:nvPr/>
         </p:nvSpPr>
         <p:spPr>
           <a:xfrm>
-            <a:off x="6400800" y="1554480"/>
-            <a:ext cx="5486400" cy="365760"/>
+            <a:off x="3520440" y="2057399"/>
+            <a:ext cx="2331720" cy="274320"/>
           </a:xfrm>
           <a:prstGeom prst="rect">
             <a:avLst/>
@@ -5409,28 +7049,33 @@
           </a:bodyPr>
           <a:lstStyle/>
           <a:p>
-            <a:r>
-              <a:rPr sz="1800" b="1">
-                <a:solidFill>
-                  <a:srgbClr val="0D3B66"/>
+            <a:pPr>
+              <a:spcAft>
+                <a:spcPts val="400"/>
+              </a:spcAft>
+            </a:pPr>
+            <a:r>
+              <a:rPr sz="1000" b="1">
+                <a:solidFill>
+                  <a:srgbClr val="10B981"/>
                 </a:solidFill>
                 <a:latin typeface="Calibri"/>
               </a:rPr>
-              <a:t>Mining-time scoring</a:t>
-            </a:r>
-          </a:p>
-        </p:txBody>
-      </p:sp>
-      <p:sp>
-        <p:nvSpPr>
-          <p:cNvPr id="10" name="TextBox 9"/>
+              <a:t>RECALL @ 10</a:t>
+            </a:r>
+          </a:p>
+        </p:txBody>
+      </p:sp>
+      <p:sp>
+        <p:nvSpPr>
+          <p:cNvPr id="15" name="TextBox 14"/>
           <p:cNvSpPr txBox="1"/>
           <p:nvPr/>
         </p:nvSpPr>
         <p:spPr>
           <a:xfrm>
-            <a:off x="6400800" y="1920240"/>
-            <a:ext cx="5486400" cy="457200"/>
+            <a:off x="3520440" y="2331719"/>
+            <a:ext cx="2331720" cy="594360"/>
           </a:xfrm>
           <a:prstGeom prst="rect">
             <a:avLst/>
@@ -5443,28 +7088,33 @@
           </a:bodyPr>
           <a:lstStyle/>
           <a:p>
-            <a:r>
-              <a:rPr sz="1500" b="0">
-                <a:solidFill>
-                  <a:srgbClr val="1F2A3D"/>
-                </a:solidFill>
-                <a:latin typeface="Cambria Math"/>
-              </a:rPr>
-              <a:t>MiningConf(Q,d) = max  c(A to d) * |A intersect Q| / |A|</a:t>
-            </a:r>
-          </a:p>
-        </p:txBody>
-      </p:sp>
-      <p:sp>
-        <p:nvSpPr>
-          <p:cNvPr id="11" name="TextBox 10"/>
+            <a:pPr>
+              <a:spcAft>
+                <a:spcPts val="400"/>
+              </a:spcAft>
+            </a:pPr>
+            <a:r>
+              <a:rPr sz="3000" b="1">
+                <a:solidFill>
+                  <a:srgbClr val="0A2A4F"/>
+                </a:solidFill>
+                <a:latin typeface="Calibri"/>
+              </a:rPr>
+              <a:t>0.890</a:t>
+            </a:r>
+          </a:p>
+        </p:txBody>
+      </p:sp>
+      <p:sp>
+        <p:nvSpPr>
+          <p:cNvPr id="16" name="TextBox 15"/>
           <p:cNvSpPr txBox="1"/>
           <p:nvPr/>
         </p:nvSpPr>
         <p:spPr>
           <a:xfrm>
-            <a:off x="6400800" y="2331720"/>
-            <a:ext cx="5486400" cy="365760"/>
+            <a:off x="3520440" y="2880359"/>
+            <a:ext cx="2331720" cy="365760"/>
           </a:xfrm>
           <a:prstGeom prst="rect">
             <a:avLst/>
@@ -5477,28 +7127,123 @@
           </a:bodyPr>
           <a:lstStyle/>
           <a:p>
-            <a:r>
-              <a:rPr sz="1300" b="0">
+            <a:pPr>
+              <a:spcAft>
+                <a:spcPts val="400"/>
+              </a:spcAft>
+            </a:pPr>
+            <a:r>
+              <a:rPr sz="1000" b="0">
                 <a:solidFill>
                   <a:srgbClr val="6B7280"/>
                 </a:solidFill>
                 <a:latin typeface="Calibri"/>
               </a:rPr>
-              <a:t>        over rules A to d with A subset of Q</a:t>
-            </a:r>
-          </a:p>
-        </p:txBody>
-      </p:sp>
-      <p:sp>
-        <p:nvSpPr>
-          <p:cNvPr id="12" name="TextBox 11"/>
+              <a:t>+2.0 over mining-only</a:t>
+            </a:r>
+          </a:p>
+        </p:txBody>
+      </p:sp>
+      <p:sp>
+        <p:nvSpPr>
+          <p:cNvPr id="17" name="Rounded Rectangle 16"/>
+          <p:cNvSpPr/>
+          <p:nvPr/>
+        </p:nvSpPr>
+        <p:spPr>
+          <a:xfrm>
+            <a:off x="6217920" y="1874519"/>
+            <a:ext cx="2697480" cy="1417320"/>
+          </a:xfrm>
+          <a:prstGeom prst="roundRect">
+            <a:avLst>
+              <a:gd name="adj" fmla="val 8000"/>
+            </a:avLst>
+          </a:prstGeom>
+          <a:solidFill>
+            <a:srgbClr val="FFFFFF"/>
+          </a:solidFill>
+          <a:ln w="19050">
+            <a:solidFill>
+              <a:srgbClr val="F59E0B"/>
+            </a:solidFill>
+          </a:ln>
+        </p:spPr>
+        <p:style>
+          <a:lnRef idx="1">
+            <a:schemeClr val="accent1"/>
+          </a:lnRef>
+          <a:fillRef idx="3">
+            <a:schemeClr val="accent1"/>
+          </a:fillRef>
+          <a:effectRef idx="2">
+            <a:schemeClr val="accent1"/>
+          </a:effectRef>
+          <a:fontRef idx="minor">
+            <a:schemeClr val="lt1"/>
+          </a:fontRef>
+        </p:style>
+        <p:txBody>
+          <a:bodyPr rtlCol="0" anchor="ctr"/>
+          <a:lstStyle/>
+          <a:p>
+            <a:pPr algn="ctr"/>
+          </a:p>
+        </p:txBody>
+      </p:sp>
+      <p:sp>
+        <p:nvSpPr>
+          <p:cNvPr id="18" name="Rectangle 17"/>
+          <p:cNvSpPr/>
+          <p:nvPr/>
+        </p:nvSpPr>
+        <p:spPr>
+          <a:xfrm>
+            <a:off x="6217920" y="1874519"/>
+            <a:ext cx="2697480" cy="91440"/>
+          </a:xfrm>
+          <a:prstGeom prst="rect">
+            <a:avLst/>
+          </a:prstGeom>
+          <a:solidFill>
+            <a:srgbClr val="F59E0B"/>
+          </a:solidFill>
+          <a:ln>
+            <a:noFill/>
+          </a:ln>
+        </p:spPr>
+        <p:style>
+          <a:lnRef idx="1">
+            <a:schemeClr val="accent1"/>
+          </a:lnRef>
+          <a:fillRef idx="3">
+            <a:schemeClr val="accent1"/>
+          </a:fillRef>
+          <a:effectRef idx="2">
+            <a:schemeClr val="accent1"/>
+          </a:effectRef>
+          <a:fontRef idx="minor">
+            <a:schemeClr val="lt1"/>
+          </a:fontRef>
+        </p:style>
+        <p:txBody>
+          <a:bodyPr rtlCol="0" anchor="ctr"/>
+          <a:lstStyle/>
+          <a:p>
+            <a:pPr algn="ctr"/>
+          </a:p>
+        </p:txBody>
+      </p:sp>
+      <p:sp>
+        <p:nvSpPr>
+          <p:cNvPr id="19" name="TextBox 18"/>
           <p:cNvSpPr txBox="1"/>
           <p:nvPr/>
         </p:nvSpPr>
         <p:spPr>
           <a:xfrm>
-            <a:off x="6400800" y="3108960"/>
-            <a:ext cx="5486400" cy="365760"/>
+            <a:off x="6400800" y="2057399"/>
+            <a:ext cx="2331720" cy="274320"/>
           </a:xfrm>
           <a:prstGeom prst="rect">
             <a:avLst/>
@@ -5511,28 +7256,33 @@
           </a:bodyPr>
           <a:lstStyle/>
           <a:p>
-            <a:r>
-              <a:rPr sz="1800" b="1">
-                <a:solidFill>
-                  <a:srgbClr val="0D3B66"/>
+            <a:pPr>
+              <a:spcAft>
+                <a:spcPts val="400"/>
+              </a:spcAft>
+            </a:pPr>
+            <a:r>
+              <a:rPr sz="1000" b="1">
+                <a:solidFill>
+                  <a:srgbClr val="F59E0B"/>
                 </a:solidFill>
                 <a:latin typeface="Calibri"/>
               </a:rPr>
-              <a:t>Synonym bridge</a:t>
-            </a:r>
-          </a:p>
-        </p:txBody>
-      </p:sp>
-      <p:sp>
-        <p:nvSpPr>
-          <p:cNvPr id="13" name="TextBox 12"/>
+              <a:t>MRR</a:t>
+            </a:r>
+          </a:p>
+        </p:txBody>
+      </p:sp>
+      <p:sp>
+        <p:nvSpPr>
+          <p:cNvPr id="20" name="TextBox 19"/>
           <p:cNvSpPr txBox="1"/>
           <p:nvPr/>
         </p:nvSpPr>
         <p:spPr>
           <a:xfrm>
-            <a:off x="6400800" y="3474720"/>
-            <a:ext cx="5486400" cy="2286000"/>
+            <a:off x="6400800" y="2331719"/>
+            <a:ext cx="2331720" cy="594360"/>
           </a:xfrm>
           <a:prstGeom prst="rect">
             <a:avLst/>
@@ -5547,95 +7297,31 @@
           <a:p>
             <a:pPr>
               <a:spcAft>
-                <a:spcPts val="600"/>
-              </a:spcAft>
-            </a:pPr>
-            <a:r>
-              <a:rPr sz="1400">
-                <a:solidFill>
-                  <a:srgbClr val="1F2A3D"/>
+                <a:spcPts val="400"/>
+              </a:spcAft>
+            </a:pPr>
+            <a:r>
+              <a:rPr sz="3000" b="1">
+                <a:solidFill>
+                  <a:srgbClr val="0A2A4F"/>
                 </a:solidFill>
                 <a:latin typeface="Calibri"/>
               </a:rPr>
-              <a:t>  muscle_pain  to  myalgia</a:t>
-            </a:r>
-          </a:p>
-          <a:p>
-            <a:pPr>
-              <a:spcAft>
-                <a:spcPts val="600"/>
-              </a:spcAft>
-            </a:pPr>
-            <a:r>
-              <a:rPr sz="1400">
-                <a:solidFill>
-                  <a:srgbClr val="1F2A3D"/>
-                </a:solidFill>
-                <a:latin typeface="Calibri"/>
-              </a:rPr>
-              <a:t>  high_fever  to  pyrexia, hyperthermia</a:t>
-            </a:r>
-          </a:p>
-          <a:p>
-            <a:pPr>
-              <a:spcAft>
-                <a:spcPts val="600"/>
-              </a:spcAft>
-            </a:pPr>
-            <a:r>
-              <a:rPr sz="1400">
-                <a:solidFill>
-                  <a:srgbClr val="1F2A3D"/>
-                </a:solidFill>
-                <a:latin typeface="Calibri"/>
-              </a:rPr>
-              <a:t>  breathlessness  to  dyspnea</a:t>
-            </a:r>
-          </a:p>
-          <a:p>
-            <a:pPr>
-              <a:spcAft>
-                <a:spcPts val="600"/>
-              </a:spcAft>
-            </a:pPr>
-            <a:r>
-              <a:rPr sz="1400">
-                <a:solidFill>
-                  <a:srgbClr val="1F2A3D"/>
-                </a:solidFill>
-                <a:latin typeface="Calibri"/>
-              </a:rPr>
-              <a:t>  yellowish_skin  to  jaundice, icterus</a:t>
-            </a:r>
-          </a:p>
-          <a:p>
-            <a:pPr>
-              <a:spcAft>
-                <a:spcPts val="600"/>
-              </a:spcAft>
-            </a:pPr>
-            <a:r>
-              <a:rPr sz="1400">
-                <a:solidFill>
-                  <a:srgbClr val="1F2A3D"/>
-                </a:solidFill>
-                <a:latin typeface="Calibri"/>
-              </a:rPr>
-              <a:t>  fast_heart_rate  to  tachycardia</a:t>
-            </a:r>
-          </a:p>
-        </p:txBody>
-      </p:sp>
-      <p:sp>
-        <p:nvSpPr>
-          <p:cNvPr id="14" name="TextBox 13"/>
+              <a:t>0.857</a:t>
+            </a:r>
+          </a:p>
+        </p:txBody>
+      </p:sp>
+      <p:sp>
+        <p:nvSpPr>
+          <p:cNvPr id="21" name="TextBox 20"/>
           <p:cNvSpPr txBox="1"/>
           <p:nvPr/>
         </p:nvSpPr>
         <p:spPr>
           <a:xfrm>
-            <a:off x="6400800" y="5486400"/>
-            <a:ext cx="5486400" cy="365760"/>
+            <a:off x="6400800" y="2880359"/>
+            <a:ext cx="2331720" cy="365760"/>
           </a:xfrm>
           <a:prstGeom prst="rect">
             <a:avLst/>
@@ -5648,28 +7334,123 @@
           </a:bodyPr>
           <a:lstStyle/>
           <a:p>
-            <a:r>
-              <a:rPr sz="1200" b="0">
+            <a:pPr>
+              <a:spcAft>
+                <a:spcPts val="400"/>
+              </a:spcAft>
+            </a:pPr>
+            <a:r>
+              <a:rPr sz="1000" b="0">
                 <a:solidFill>
                   <a:srgbClr val="6B7280"/>
                 </a:solidFill>
                 <a:latin typeface="Calibri"/>
               </a:rPr>
-              <a:t>130 entries; covers all 41 disease classes</a:t>
-            </a:r>
-          </a:p>
-        </p:txBody>
-      </p:sp>
-      <p:sp>
-        <p:nvSpPr>
-          <p:cNvPr id="15" name="TextBox 14"/>
+              <a:t>+2.8 over mining-only</a:t>
+            </a:r>
+          </a:p>
+        </p:txBody>
+      </p:sp>
+      <p:sp>
+        <p:nvSpPr>
+          <p:cNvPr id="22" name="Rounded Rectangle 21"/>
+          <p:cNvSpPr/>
+          <p:nvPr/>
+        </p:nvSpPr>
+        <p:spPr>
+          <a:xfrm>
+            <a:off x="9098280" y="1874519"/>
+            <a:ext cx="2697480" cy="1417320"/>
+          </a:xfrm>
+          <a:prstGeom prst="roundRect">
+            <a:avLst>
+              <a:gd name="adj" fmla="val 8000"/>
+            </a:avLst>
+          </a:prstGeom>
+          <a:solidFill>
+            <a:srgbClr val="FFFFFF"/>
+          </a:solidFill>
+          <a:ln w="19050">
+            <a:solidFill>
+              <a:srgbClr val="7C3AED"/>
+            </a:solidFill>
+          </a:ln>
+        </p:spPr>
+        <p:style>
+          <a:lnRef idx="1">
+            <a:schemeClr val="accent1"/>
+          </a:lnRef>
+          <a:fillRef idx="3">
+            <a:schemeClr val="accent1"/>
+          </a:fillRef>
+          <a:effectRef idx="2">
+            <a:schemeClr val="accent1"/>
+          </a:effectRef>
+          <a:fontRef idx="minor">
+            <a:schemeClr val="lt1"/>
+          </a:fontRef>
+        </p:style>
+        <p:txBody>
+          <a:bodyPr rtlCol="0" anchor="ctr"/>
+          <a:lstStyle/>
+          <a:p>
+            <a:pPr algn="ctr"/>
+          </a:p>
+        </p:txBody>
+      </p:sp>
+      <p:sp>
+        <p:nvSpPr>
+          <p:cNvPr id="23" name="Rectangle 22"/>
+          <p:cNvSpPr/>
+          <p:nvPr/>
+        </p:nvSpPr>
+        <p:spPr>
+          <a:xfrm>
+            <a:off x="9098280" y="1874519"/>
+            <a:ext cx="2697480" cy="91440"/>
+          </a:xfrm>
+          <a:prstGeom prst="rect">
+            <a:avLst/>
+          </a:prstGeom>
+          <a:solidFill>
+            <a:srgbClr val="7C3AED"/>
+          </a:solidFill>
+          <a:ln>
+            <a:noFill/>
+          </a:ln>
+        </p:spPr>
+        <p:style>
+          <a:lnRef idx="1">
+            <a:schemeClr val="accent1"/>
+          </a:lnRef>
+          <a:fillRef idx="3">
+            <a:schemeClr val="accent1"/>
+          </a:fillRef>
+          <a:effectRef idx="2">
+            <a:schemeClr val="accent1"/>
+          </a:effectRef>
+          <a:fontRef idx="minor">
+            <a:schemeClr val="lt1"/>
+          </a:fontRef>
+        </p:style>
+        <p:txBody>
+          <a:bodyPr rtlCol="0" anchor="ctr"/>
+          <a:lstStyle/>
+          <a:p>
+            <a:pPr algn="ctr"/>
+          </a:p>
+        </p:txBody>
+      </p:sp>
+      <p:sp>
+        <p:nvSpPr>
+          <p:cNvPr id="24" name="TextBox 23"/>
           <p:cNvSpPr txBox="1"/>
           <p:nvPr/>
         </p:nvSpPr>
         <p:spPr>
           <a:xfrm>
-            <a:off x="365760" y="6492240"/>
-            <a:ext cx="10058400" cy="274320"/>
+            <a:off x="9281160" y="2057399"/>
+            <a:ext cx="2331720" cy="274320"/>
           </a:xfrm>
           <a:prstGeom prst="rect">
             <a:avLst/>
@@ -5682,6 +7463,89 @@
           </a:bodyPr>
           <a:lstStyle/>
           <a:p>
+            <a:pPr>
+              <a:spcAft>
+                <a:spcPts val="400"/>
+              </a:spcAft>
+            </a:pPr>
+            <a:r>
+              <a:rPr sz="1000" b="1">
+                <a:solidFill>
+                  <a:srgbClr val="7C3AED"/>
+                </a:solidFill>
+                <a:latin typeface="Calibri"/>
+              </a:rPr>
+              <a:t>LATENCY p95</a:t>
+            </a:r>
+          </a:p>
+        </p:txBody>
+      </p:sp>
+      <p:sp>
+        <p:nvSpPr>
+          <p:cNvPr id="25" name="TextBox 24"/>
+          <p:cNvSpPr txBox="1"/>
+          <p:nvPr/>
+        </p:nvSpPr>
+        <p:spPr>
+          <a:xfrm>
+            <a:off x="9281160" y="2331719"/>
+            <a:ext cx="2331720" cy="594360"/>
+          </a:xfrm>
+          <a:prstGeom prst="rect">
+            <a:avLst/>
+          </a:prstGeom>
+          <a:noFill/>
+        </p:spPr>
+        <p:txBody>
+          <a:bodyPr wrap="square">
+            <a:spAutoFit/>
+          </a:bodyPr>
+          <a:lstStyle/>
+          <a:p>
+            <a:pPr>
+              <a:spcAft>
+                <a:spcPts val="400"/>
+              </a:spcAft>
+            </a:pPr>
+            <a:r>
+              <a:rPr sz="3000" b="1">
+                <a:solidFill>
+                  <a:srgbClr val="0A2A4F"/>
+                </a:solidFill>
+                <a:latin typeface="Calibri"/>
+              </a:rPr>
+              <a:t>20 ms</a:t>
+            </a:r>
+          </a:p>
+        </p:txBody>
+      </p:sp>
+      <p:sp>
+        <p:nvSpPr>
+          <p:cNvPr id="26" name="TextBox 25"/>
+          <p:cNvSpPr txBox="1"/>
+          <p:nvPr/>
+        </p:nvSpPr>
+        <p:spPr>
+          <a:xfrm>
+            <a:off x="9281160" y="2880359"/>
+            <a:ext cx="2331720" cy="365760"/>
+          </a:xfrm>
+          <a:prstGeom prst="rect">
+            <a:avLst/>
+          </a:prstGeom>
+          <a:noFill/>
+        </p:spPr>
+        <p:txBody>
+          <a:bodyPr wrap="square">
+            <a:spAutoFit/>
+          </a:bodyPr>
+          <a:lstStyle/>
+          <a:p>
+            <a:pPr>
+              <a:spcAft>
+                <a:spcPts val="400"/>
+              </a:spcAft>
+            </a:pPr>
             <a:r>
               <a:rPr sz="1000" b="0">
                 <a:solidFill>
@@ -5689,7 +7553,926 @@
                 </a:solidFill>
                 <a:latin typeface="Calibri"/>
               </a:rPr>
-              <a:t>CMPE 255 Spring 2026, Sakshat Patil, Vineet Kumar, Aishwarya Madhave, Slide 3 of 7</a:t>
+              <a:t>M3 Pro, default config</a:t>
+            </a:r>
+          </a:p>
+        </p:txBody>
+      </p:sp>
+      <p:graphicFrame>
+        <p:nvGraphicFramePr>
+          <p:cNvPr id="27" name="Table 26"/>
+          <p:cNvGraphicFramePr>
+            <a:graphicFrameLocks noGrp="1"/>
+          </p:cNvGraphicFramePr>
+          <p:nvPr/>
+        </p:nvGraphicFramePr>
+        <p:xfrm>
+          <a:off x="457200" y="3520440"/>
+          <a:ext cx="6309360" cy="2331720"/>
+        </p:xfrm>
+        <a:graphic>
+          <a:graphicData uri="http://schemas.openxmlformats.org/drawingml/2006/table">
+            <a:tbl>
+              <a:tblPr firstRow="1" bandRow="1">
+                <a:tableStyleId>{5C22544A-7EE6-4342-B048-85BDC9FD1C3A}</a:tableStyleId>
+              </a:tblPr>
+              <a:tblGrid>
+                <a:gridCol w="2011680"/>
+                <a:gridCol w="1371600"/>
+                <a:gridCol w="914400"/>
+                <a:gridCol w="1005840"/>
+                <a:gridCol w="1005840"/>
+              </a:tblGrid>
+              <a:tr h="388620">
+                <a:tc>
+                  <a:txBody>
+                    <a:bodyPr/>
+                    <a:lstStyle/>
+                    <a:p>
+                      <a:pPr algn="l"/>
+                      <a:r>
+                        <a:rPr sz="1100" b="1">
+                          <a:solidFill>
+                            <a:srgbClr val="FFFFFF"/>
+                          </a:solidFill>
+                          <a:latin typeface="Calibri"/>
+                        </a:rPr>
+                        <a:t>Variant</a:t>
+                      </a:r>
+                    </a:p>
+                  </a:txBody>
+                  <a:tcPr>
+                    <a:solidFill>
+                      <a:srgbClr val="0A2A4F"/>
+                    </a:solidFill>
+                  </a:tcPr>
+                </a:tc>
+                <a:tc>
+                  <a:txBody>
+                    <a:bodyPr/>
+                    <a:lstStyle/>
+                    <a:p>
+                      <a:pPr algn="ctr"/>
+                      <a:r>
+                        <a:rPr sz="1100" b="1">
+                          <a:solidFill>
+                            <a:srgbClr val="FFFFFF"/>
+                          </a:solidFill>
+                          <a:latin typeface="Calibri"/>
+                        </a:rPr>
+                        <a:t>Mode</a:t>
+                      </a:r>
+                    </a:p>
+                  </a:txBody>
+                  <a:tcPr>
+                    <a:solidFill>
+                      <a:srgbClr val="0A2A4F"/>
+                    </a:solidFill>
+                  </a:tcPr>
+                </a:tc>
+                <a:tc>
+                  <a:txBody>
+                    <a:bodyPr/>
+                    <a:lstStyle/>
+                    <a:p>
+                      <a:pPr algn="ctr"/>
+                      <a:r>
+                        <a:rPr sz="1100" b="1">
+                          <a:solidFill>
+                            <a:srgbClr val="FFFFFF"/>
+                          </a:solidFill>
+                          <a:latin typeface="Calibri"/>
+                        </a:rPr>
+                        <a:t>R@1</a:t>
+                      </a:r>
+                    </a:p>
+                  </a:txBody>
+                  <a:tcPr>
+                    <a:solidFill>
+                      <a:srgbClr val="0A2A4F"/>
+                    </a:solidFill>
+                  </a:tcPr>
+                </a:tc>
+                <a:tc>
+                  <a:txBody>
+                    <a:bodyPr/>
+                    <a:lstStyle/>
+                    <a:p>
+                      <a:pPr algn="ctr"/>
+                      <a:r>
+                        <a:rPr sz="1100" b="1">
+                          <a:solidFill>
+                            <a:srgbClr val="FFFFFF"/>
+                          </a:solidFill>
+                          <a:latin typeface="Calibri"/>
+                        </a:rPr>
+                        <a:t>R@10</a:t>
+                      </a:r>
+                    </a:p>
+                  </a:txBody>
+                  <a:tcPr>
+                    <a:solidFill>
+                      <a:srgbClr val="0A2A4F"/>
+                    </a:solidFill>
+                  </a:tcPr>
+                </a:tc>
+                <a:tc>
+                  <a:txBody>
+                    <a:bodyPr/>
+                    <a:lstStyle/>
+                    <a:p>
+                      <a:pPr algn="ctr"/>
+                      <a:r>
+                        <a:rPr sz="1100" b="1">
+                          <a:solidFill>
+                            <a:srgbClr val="FFFFFF"/>
+                          </a:solidFill>
+                          <a:latin typeface="Calibri"/>
+                        </a:rPr>
+                        <a:t>MRR</a:t>
+                      </a:r>
+                    </a:p>
+                  </a:txBody>
+                  <a:tcPr>
+                    <a:solidFill>
+                      <a:srgbClr val="0A2A4F"/>
+                    </a:solidFill>
+                  </a:tcPr>
+                </a:tc>
+              </a:tr>
+              <a:tr h="388620">
+                <a:tc>
+                  <a:txBody>
+                    <a:bodyPr/>
+                    <a:lstStyle/>
+                    <a:p>
+                      <a:pPr algn="l"/>
+                      <a:r>
+                        <a:rPr sz="1100" b="0">
+                          <a:solidFill>
+                            <a:srgbClr val="1A2333"/>
+                          </a:solidFill>
+                          <a:latin typeface="Calibri"/>
+                        </a:rPr>
+                        <a:t>mining-only</a:t>
+                      </a:r>
+                    </a:p>
+                  </a:txBody>
+                  <a:tcPr/>
+                </a:tc>
+                <a:tc>
+                  <a:txBody>
+                    <a:bodyPr/>
+                    <a:lstStyle/>
+                    <a:p>
+                      <a:pPr algn="ctr"/>
+                      <a:r>
+                        <a:rPr sz="1100" b="0">
+                          <a:solidFill>
+                            <a:srgbClr val="1A2333"/>
+                          </a:solidFill>
+                          <a:latin typeface="Calibri"/>
+                        </a:rPr>
+                        <a:t>a = 0.0</a:t>
+                      </a:r>
+                    </a:p>
+                  </a:txBody>
+                  <a:tcPr/>
+                </a:tc>
+                <a:tc>
+                  <a:txBody>
+                    <a:bodyPr/>
+                    <a:lstStyle/>
+                    <a:p>
+                      <a:pPr algn="ctr"/>
+                      <a:r>
+                        <a:rPr sz="1100" b="0">
+                          <a:solidFill>
+                            <a:srgbClr val="1A2333"/>
+                          </a:solidFill>
+                          <a:latin typeface="Calibri"/>
+                        </a:rPr>
+                        <a:t>0.790</a:t>
+                      </a:r>
+                    </a:p>
+                  </a:txBody>
+                  <a:tcPr/>
+                </a:tc>
+                <a:tc>
+                  <a:txBody>
+                    <a:bodyPr/>
+                    <a:lstStyle/>
+                    <a:p>
+                      <a:pPr algn="ctr"/>
+                      <a:r>
+                        <a:rPr sz="1100" b="0">
+                          <a:solidFill>
+                            <a:srgbClr val="1A2333"/>
+                          </a:solidFill>
+                          <a:latin typeface="Calibri"/>
+                        </a:rPr>
+                        <a:t>0.870</a:t>
+                      </a:r>
+                    </a:p>
+                  </a:txBody>
+                  <a:tcPr/>
+                </a:tc>
+                <a:tc>
+                  <a:txBody>
+                    <a:bodyPr/>
+                    <a:lstStyle/>
+                    <a:p>
+                      <a:pPr algn="ctr"/>
+                      <a:r>
+                        <a:rPr sz="1100" b="0">
+                          <a:solidFill>
+                            <a:srgbClr val="1A2333"/>
+                          </a:solidFill>
+                          <a:latin typeface="Calibri"/>
+                        </a:rPr>
+                        <a:t>0.829</a:t>
+                      </a:r>
+                    </a:p>
+                  </a:txBody>
+                  <a:tcPr/>
+                </a:tc>
+              </a:tr>
+              <a:tr h="388620">
+                <a:tc>
+                  <a:txBody>
+                    <a:bodyPr/>
+                    <a:lstStyle/>
+                    <a:p>
+                      <a:pPr algn="l"/>
+                      <a:r>
+                        <a:rPr sz="1100" b="0">
+                          <a:solidFill>
+                            <a:srgbClr val="1A2333"/>
+                          </a:solidFill>
+                          <a:latin typeface="Calibri"/>
+                        </a:rPr>
+                        <a:t>MiniLM</a:t>
+                      </a:r>
+                    </a:p>
+                  </a:txBody>
+                  <a:tcPr/>
+                </a:tc>
+                <a:tc>
+                  <a:txBody>
+                    <a:bodyPr/>
+                    <a:lstStyle/>
+                    <a:p>
+                      <a:pPr algn="ctr"/>
+                      <a:r>
+                        <a:rPr sz="1100" b="0">
+                          <a:solidFill>
+                            <a:srgbClr val="1A2333"/>
+                          </a:solidFill>
+                          <a:latin typeface="Calibri"/>
+                        </a:rPr>
+                        <a:t>retrieval</a:t>
+                      </a:r>
+                    </a:p>
+                  </a:txBody>
+                  <a:tcPr/>
+                </a:tc>
+                <a:tc>
+                  <a:txBody>
+                    <a:bodyPr/>
+                    <a:lstStyle/>
+                    <a:p>
+                      <a:pPr algn="ctr"/>
+                      <a:r>
+                        <a:rPr sz="1100" b="0">
+                          <a:solidFill>
+                            <a:srgbClr val="1A2333"/>
+                          </a:solidFill>
+                          <a:latin typeface="Calibri"/>
+                        </a:rPr>
+                        <a:t>0.130</a:t>
+                      </a:r>
+                    </a:p>
+                  </a:txBody>
+                  <a:tcPr/>
+                </a:tc>
+                <a:tc>
+                  <a:txBody>
+                    <a:bodyPr/>
+                    <a:lstStyle/>
+                    <a:p>
+                      <a:pPr algn="ctr"/>
+                      <a:r>
+                        <a:rPr sz="1100" b="0">
+                          <a:solidFill>
+                            <a:srgbClr val="1A2333"/>
+                          </a:solidFill>
+                          <a:latin typeface="Calibri"/>
+                        </a:rPr>
+                        <a:t>0.180</a:t>
+                      </a:r>
+                    </a:p>
+                  </a:txBody>
+                  <a:tcPr/>
+                </a:tc>
+                <a:tc>
+                  <a:txBody>
+                    <a:bodyPr/>
+                    <a:lstStyle/>
+                    <a:p>
+                      <a:pPr algn="ctr"/>
+                      <a:r>
+                        <a:rPr sz="1100" b="0">
+                          <a:solidFill>
+                            <a:srgbClr val="1A2333"/>
+                          </a:solidFill>
+                          <a:latin typeface="Calibri"/>
+                        </a:rPr>
+                        <a:t>0.151</a:t>
+                      </a:r>
+                    </a:p>
+                  </a:txBody>
+                  <a:tcPr/>
+                </a:tc>
+              </a:tr>
+              <a:tr h="388620">
+                <a:tc>
+                  <a:txBody>
+                    <a:bodyPr/>
+                    <a:lstStyle/>
+                    <a:p>
+                      <a:pPr algn="l"/>
+                      <a:r>
+                        <a:rPr sz="1100" b="1">
+                          <a:solidFill>
+                            <a:srgbClr val="0A2A4F"/>
+                          </a:solidFill>
+                          <a:latin typeface="Calibri"/>
+                        </a:rPr>
+                        <a:t>MiniLM</a:t>
+                      </a:r>
+                    </a:p>
+                  </a:txBody>
+                  <a:tcPr>
+                    <a:solidFill>
+                      <a:srgbClr val="E5ECF5"/>
+                    </a:solidFill>
+                  </a:tcPr>
+                </a:tc>
+                <a:tc>
+                  <a:txBody>
+                    <a:bodyPr/>
+                    <a:lstStyle/>
+                    <a:p>
+                      <a:pPr algn="ctr"/>
+                      <a:r>
+                        <a:rPr sz="1100" b="1">
+                          <a:solidFill>
+                            <a:srgbClr val="0A2A4F"/>
+                          </a:solidFill>
+                          <a:latin typeface="Calibri"/>
+                        </a:rPr>
+                        <a:t>fused 0.3</a:t>
+                      </a:r>
+                    </a:p>
+                  </a:txBody>
+                  <a:tcPr>
+                    <a:solidFill>
+                      <a:srgbClr val="E5ECF5"/>
+                    </a:solidFill>
+                  </a:tcPr>
+                </a:tc>
+                <a:tc>
+                  <a:txBody>
+                    <a:bodyPr/>
+                    <a:lstStyle/>
+                    <a:p>
+                      <a:pPr algn="ctr"/>
+                      <a:r>
+                        <a:rPr sz="1100" b="1">
+                          <a:solidFill>
+                            <a:srgbClr val="0A2A4F"/>
+                          </a:solidFill>
+                          <a:latin typeface="Calibri"/>
+                        </a:rPr>
+                        <a:t>0.825</a:t>
+                      </a:r>
+                    </a:p>
+                  </a:txBody>
+                  <a:tcPr>
+                    <a:solidFill>
+                      <a:srgbClr val="E5ECF5"/>
+                    </a:solidFill>
+                  </a:tcPr>
+                </a:tc>
+                <a:tc>
+                  <a:txBody>
+                    <a:bodyPr/>
+                    <a:lstStyle/>
+                    <a:p>
+                      <a:pPr algn="ctr"/>
+                      <a:r>
+                        <a:rPr sz="1100" b="1">
+                          <a:solidFill>
+                            <a:srgbClr val="0A2A4F"/>
+                          </a:solidFill>
+                          <a:latin typeface="Calibri"/>
+                        </a:rPr>
+                        <a:t>0.890</a:t>
+                      </a:r>
+                    </a:p>
+                  </a:txBody>
+                  <a:tcPr>
+                    <a:solidFill>
+                      <a:srgbClr val="E5ECF5"/>
+                    </a:solidFill>
+                  </a:tcPr>
+                </a:tc>
+                <a:tc>
+                  <a:txBody>
+                    <a:bodyPr/>
+                    <a:lstStyle/>
+                    <a:p>
+                      <a:pPr algn="ctr"/>
+                      <a:r>
+                        <a:rPr sz="1100" b="1">
+                          <a:solidFill>
+                            <a:srgbClr val="0A2A4F"/>
+                          </a:solidFill>
+                          <a:latin typeface="Calibri"/>
+                        </a:rPr>
+                        <a:t>0.857</a:t>
+                      </a:r>
+                    </a:p>
+                  </a:txBody>
+                  <a:tcPr>
+                    <a:solidFill>
+                      <a:srgbClr val="E5ECF5"/>
+                    </a:solidFill>
+                  </a:tcPr>
+                </a:tc>
+              </a:tr>
+              <a:tr h="388620">
+                <a:tc>
+                  <a:txBody>
+                    <a:bodyPr/>
+                    <a:lstStyle/>
+                    <a:p>
+                      <a:pPr algn="l"/>
+                      <a:r>
+                        <a:rPr sz="1100" b="0">
+                          <a:solidFill>
+                            <a:srgbClr val="1A2333"/>
+                          </a:solidFill>
+                          <a:latin typeface="Calibri"/>
+                        </a:rPr>
+                        <a:t>MiniLM + syn</a:t>
+                      </a:r>
+                    </a:p>
+                  </a:txBody>
+                  <a:tcPr/>
+                </a:tc>
+                <a:tc>
+                  <a:txBody>
+                    <a:bodyPr/>
+                    <a:lstStyle/>
+                    <a:p>
+                      <a:pPr algn="ctr"/>
+                      <a:r>
+                        <a:rPr sz="1100" b="0">
+                          <a:solidFill>
+                            <a:srgbClr val="1A2333"/>
+                          </a:solidFill>
+                          <a:latin typeface="Calibri"/>
+                        </a:rPr>
+                        <a:t>fused 0.3</a:t>
+                      </a:r>
+                    </a:p>
+                  </a:txBody>
+                  <a:tcPr/>
+                </a:tc>
+                <a:tc>
+                  <a:txBody>
+                    <a:bodyPr/>
+                    <a:lstStyle/>
+                    <a:p>
+                      <a:pPr algn="ctr"/>
+                      <a:r>
+                        <a:rPr sz="1100" b="0">
+                          <a:solidFill>
+                            <a:srgbClr val="1A2333"/>
+                          </a:solidFill>
+                          <a:latin typeface="Calibri"/>
+                        </a:rPr>
+                        <a:t>0.820</a:t>
+                      </a:r>
+                    </a:p>
+                  </a:txBody>
+                  <a:tcPr/>
+                </a:tc>
+                <a:tc>
+                  <a:txBody>
+                    <a:bodyPr/>
+                    <a:lstStyle/>
+                    <a:p>
+                      <a:pPr algn="ctr"/>
+                      <a:r>
+                        <a:rPr sz="1100" b="0">
+                          <a:solidFill>
+                            <a:srgbClr val="1A2333"/>
+                          </a:solidFill>
+                          <a:latin typeface="Calibri"/>
+                        </a:rPr>
+                        <a:t>0.895</a:t>
+                      </a:r>
+                    </a:p>
+                  </a:txBody>
+                  <a:tcPr/>
+                </a:tc>
+                <a:tc>
+                  <a:txBody>
+                    <a:bodyPr/>
+                    <a:lstStyle/>
+                    <a:p>
+                      <a:pPr algn="ctr"/>
+                      <a:r>
+                        <a:rPr sz="1100" b="0">
+                          <a:solidFill>
+                            <a:srgbClr val="1A2333"/>
+                          </a:solidFill>
+                          <a:latin typeface="Calibri"/>
+                        </a:rPr>
+                        <a:t>0.857</a:t>
+                      </a:r>
+                    </a:p>
+                  </a:txBody>
+                  <a:tcPr/>
+                </a:tc>
+              </a:tr>
+              <a:tr h="388620">
+                <a:tc>
+                  <a:txBody>
+                    <a:bodyPr/>
+                    <a:lstStyle/>
+                    <a:p>
+                      <a:pPr algn="l"/>
+                      <a:r>
+                        <a:rPr sz="1100" b="0">
+                          <a:solidFill>
+                            <a:srgbClr val="1A2333"/>
+                          </a:solidFill>
+                          <a:latin typeface="Calibri"/>
+                        </a:rPr>
+                        <a:t>PubMedBERT + syn</a:t>
+                      </a:r>
+                    </a:p>
+                  </a:txBody>
+                  <a:tcPr/>
+                </a:tc>
+                <a:tc>
+                  <a:txBody>
+                    <a:bodyPr/>
+                    <a:lstStyle/>
+                    <a:p>
+                      <a:pPr algn="ctr"/>
+                      <a:r>
+                        <a:rPr sz="1100" b="0">
+                          <a:solidFill>
+                            <a:srgbClr val="1A2333"/>
+                          </a:solidFill>
+                          <a:latin typeface="Calibri"/>
+                        </a:rPr>
+                        <a:t>fused 0.3</a:t>
+                      </a:r>
+                    </a:p>
+                  </a:txBody>
+                  <a:tcPr/>
+                </a:tc>
+                <a:tc>
+                  <a:txBody>
+                    <a:bodyPr/>
+                    <a:lstStyle/>
+                    <a:p>
+                      <a:pPr algn="ctr"/>
+                      <a:r>
+                        <a:rPr sz="1100" b="0">
+                          <a:solidFill>
+                            <a:srgbClr val="1A2333"/>
+                          </a:solidFill>
+                          <a:latin typeface="Calibri"/>
+                        </a:rPr>
+                        <a:t>0.815</a:t>
+                      </a:r>
+                    </a:p>
+                  </a:txBody>
+                  <a:tcPr/>
+                </a:tc>
+                <a:tc>
+                  <a:txBody>
+                    <a:bodyPr/>
+                    <a:lstStyle/>
+                    <a:p>
+                      <a:pPr algn="ctr"/>
+                      <a:r>
+                        <a:rPr sz="1100" b="0">
+                          <a:solidFill>
+                            <a:srgbClr val="1A2333"/>
+                          </a:solidFill>
+                          <a:latin typeface="Calibri"/>
+                        </a:rPr>
+                        <a:t>0.875</a:t>
+                      </a:r>
+                    </a:p>
+                  </a:txBody>
+                  <a:tcPr/>
+                </a:tc>
+                <a:tc>
+                  <a:txBody>
+                    <a:bodyPr/>
+                    <a:lstStyle/>
+                    <a:p>
+                      <a:pPr algn="ctr"/>
+                      <a:r>
+                        <a:rPr sz="1100" b="0">
+                          <a:solidFill>
+                            <a:srgbClr val="1A2333"/>
+                          </a:solidFill>
+                          <a:latin typeface="Calibri"/>
+                        </a:rPr>
+                        <a:t>0.843</a:t>
+                      </a:r>
+                    </a:p>
+                  </a:txBody>
+                  <a:tcPr/>
+                </a:tc>
+              </a:tr>
+            </a:tbl>
+          </a:graphicData>
+        </a:graphic>
+      </p:graphicFrame>
+      <p:pic>
+        <p:nvPicPr>
+          <p:cNvPr id="28" name="Picture 27" descr="alpha_sweep.png"/>
+          <p:cNvPicPr>
+            <a:picLocks noChangeAspect="1"/>
+          </p:cNvPicPr>
+          <p:nvPr/>
+        </p:nvPicPr>
+        <p:blipFill>
+          <a:blip r:embed="rId2"/>
+          <a:stretch>
+            <a:fillRect/>
+          </a:stretch>
+        </p:blipFill>
+        <p:spPr>
+          <a:xfrm>
+            <a:off x="7269480" y="3520440"/>
+            <a:ext cx="4526280" cy="2715768"/>
+          </a:xfrm>
+          <a:prstGeom prst="rect">
+            <a:avLst/>
+          </a:prstGeom>
+        </p:spPr>
+      </p:pic>
+      <p:sp>
+        <p:nvSpPr>
+          <p:cNvPr id="29" name="TextBox 28"/>
+          <p:cNvSpPr txBox="1"/>
+          <p:nvPr/>
+        </p:nvSpPr>
+        <p:spPr>
+          <a:xfrm>
+            <a:off x="7269480" y="5760720"/>
+            <a:ext cx="4526280" cy="274320"/>
+          </a:xfrm>
+          <a:prstGeom prst="rect">
+            <a:avLst/>
+          </a:prstGeom>
+          <a:noFill/>
+        </p:spPr>
+        <p:txBody>
+          <a:bodyPr wrap="square">
+            <a:spAutoFit/>
+          </a:bodyPr>
+          <a:lstStyle/>
+          <a:p>
+            <a:pPr algn="ctr">
+              <a:spcAft>
+                <a:spcPts val="400"/>
+              </a:spcAft>
+            </a:pPr>
+            <a:r>
+              <a:rPr sz="1000" b="0">
+                <a:solidFill>
+                  <a:srgbClr val="6B7280"/>
+                </a:solidFill>
+                <a:latin typeface="Calibri"/>
+              </a:rPr>
+              <a:t>Alpha sweep: plateau on [0.1, 0.4]; collapse for a &gt;= 0.7.</a:t>
+            </a:r>
+          </a:p>
+        </p:txBody>
+      </p:sp>
+      <p:sp>
+        <p:nvSpPr>
+          <p:cNvPr id="30" name="Rounded Rectangle 29"/>
+          <p:cNvSpPr/>
+          <p:nvPr/>
+        </p:nvSpPr>
+        <p:spPr>
+          <a:xfrm>
+            <a:off x="457200" y="6080760"/>
+            <a:ext cx="11338560" cy="457200"/>
+          </a:xfrm>
+          <a:prstGeom prst="roundRect">
+            <a:avLst>
+              <a:gd name="adj" fmla="val 8000"/>
+            </a:avLst>
+          </a:prstGeom>
+          <a:solidFill>
+            <a:srgbClr val="0A2A4F"/>
+          </a:solidFill>
+          <a:ln>
+            <a:noFill/>
+          </a:ln>
+        </p:spPr>
+        <p:style>
+          <a:lnRef idx="1">
+            <a:schemeClr val="accent1"/>
+          </a:lnRef>
+          <a:fillRef idx="3">
+            <a:schemeClr val="accent1"/>
+          </a:fillRef>
+          <a:effectRef idx="2">
+            <a:schemeClr val="accent1"/>
+          </a:effectRef>
+          <a:fontRef idx="minor">
+            <a:schemeClr val="lt1"/>
+          </a:fontRef>
+        </p:style>
+        <p:txBody>
+          <a:bodyPr rtlCol="0" anchor="ctr"/>
+          <a:lstStyle/>
+          <a:p>
+            <a:pPr algn="ctr"/>
+          </a:p>
+        </p:txBody>
+      </p:sp>
+      <p:sp>
+        <p:nvSpPr>
+          <p:cNvPr id="31" name="TextBox 30"/>
+          <p:cNvSpPr txBox="1"/>
+          <p:nvPr/>
+        </p:nvSpPr>
+        <p:spPr>
+          <a:xfrm>
+            <a:off x="640080" y="6135624"/>
+            <a:ext cx="10972800" cy="365760"/>
+          </a:xfrm>
+          <a:prstGeom prst="rect">
+            <a:avLst/>
+          </a:prstGeom>
+          <a:noFill/>
+        </p:spPr>
+        <p:txBody>
+          <a:bodyPr wrap="square">
+            <a:spAutoFit/>
+          </a:bodyPr>
+          <a:lstStyle/>
+          <a:p>
+            <a:pPr algn="ctr">
+              <a:spcAft>
+                <a:spcPts val="400"/>
+              </a:spcAft>
+            </a:pPr>
+            <a:r>
+              <a:rPr sz="1200" b="1">
+                <a:solidFill>
+                  <a:srgbClr val="FFFFFF"/>
+                </a:solidFill>
+                <a:latin typeface="Calibri"/>
+              </a:rPr>
+              <a:t>Takeaway: fusion lifts R@1 by +3.5 over the strong mining-only baseline. The signals are complementary.</a:t>
+            </a:r>
+          </a:p>
+        </p:txBody>
+      </p:sp>
+      <p:sp>
+        <p:nvSpPr>
+          <p:cNvPr id="32" name="Rectangle 31"/>
+          <p:cNvSpPr/>
+          <p:nvPr/>
+        </p:nvSpPr>
+        <p:spPr>
+          <a:xfrm>
+            <a:off x="457200" y="6473952"/>
+            <a:ext cx="11338560" cy="13716"/>
+          </a:xfrm>
+          <a:prstGeom prst="rect">
+            <a:avLst/>
+          </a:prstGeom>
+          <a:solidFill>
+            <a:srgbClr val="E5ECF5"/>
+          </a:solidFill>
+          <a:ln>
+            <a:noFill/>
+          </a:ln>
+        </p:spPr>
+        <p:style>
+          <a:lnRef idx="1">
+            <a:schemeClr val="accent1"/>
+          </a:lnRef>
+          <a:fillRef idx="3">
+            <a:schemeClr val="accent1"/>
+          </a:fillRef>
+          <a:effectRef idx="2">
+            <a:schemeClr val="accent1"/>
+          </a:effectRef>
+          <a:fontRef idx="minor">
+            <a:schemeClr val="lt1"/>
+          </a:fontRef>
+        </p:style>
+        <p:txBody>
+          <a:bodyPr rtlCol="0" anchor="ctr"/>
+          <a:lstStyle/>
+          <a:p>
+            <a:pPr algn="ctr"/>
+          </a:p>
+        </p:txBody>
+      </p:sp>
+      <p:sp>
+        <p:nvSpPr>
+          <p:cNvPr id="33" name="TextBox 32"/>
+          <p:cNvSpPr txBox="1"/>
+          <p:nvPr/>
+        </p:nvSpPr>
+        <p:spPr>
+          <a:xfrm>
+            <a:off x="457200" y="6528816"/>
+            <a:ext cx="6400800" cy="274320"/>
+          </a:xfrm>
+          <a:prstGeom prst="rect">
+            <a:avLst/>
+          </a:prstGeom>
+          <a:noFill/>
+        </p:spPr>
+        <p:txBody>
+          <a:bodyPr wrap="square">
+            <a:spAutoFit/>
+          </a:bodyPr>
+          <a:lstStyle/>
+          <a:p>
+            <a:pPr>
+              <a:spcAft>
+                <a:spcPts val="400"/>
+              </a:spcAft>
+            </a:pPr>
+            <a:r>
+              <a:rPr sz="900" b="0">
+                <a:solidFill>
+                  <a:srgbClr val="6B7280"/>
+                </a:solidFill>
+                <a:latin typeface="Calibri"/>
+              </a:rPr>
+              <a:t>CMPE 255 Spring 2026  |  Patil, Kumar, Madhave</a:t>
+            </a:r>
+          </a:p>
+        </p:txBody>
+      </p:sp>
+      <p:sp>
+        <p:nvSpPr>
+          <p:cNvPr id="34" name="TextBox 33"/>
+          <p:cNvSpPr txBox="1"/>
+          <p:nvPr/>
+        </p:nvSpPr>
+        <p:spPr>
+          <a:xfrm>
+            <a:off x="7772400" y="6528816"/>
+            <a:ext cx="4023360" cy="274320"/>
+          </a:xfrm>
+          <a:prstGeom prst="rect">
+            <a:avLst/>
+          </a:prstGeom>
+          <a:noFill/>
+        </p:spPr>
+        <p:txBody>
+          <a:bodyPr wrap="square">
+            <a:spAutoFit/>
+          </a:bodyPr>
+          <a:lstStyle/>
+          <a:p>
+            <a:pPr algn="r">
+              <a:spcAft>
+                <a:spcPts val="400"/>
+              </a:spcAft>
+            </a:pPr>
+            <a:r>
+              <a:rPr sz="900" b="0">
+                <a:solidFill>
+                  <a:srgbClr val="6B7280"/>
+                </a:solidFill>
+                <a:latin typeface="Calibri"/>
+              </a:rPr>
+              <a:t>3 / 7</a:t>
             </a:r>
           </a:p>
         </p:txBody>
@@ -5720,14 +8503,14 @@
         </p:nvSpPr>
         <p:spPr>
           <a:xfrm>
-            <a:off x="0" y="0"/>
-            <a:ext cx="12191695" cy="411480"/>
+            <a:off x="457200" y="457200"/>
+            <a:ext cx="73152" cy="502920"/>
           </a:xfrm>
           <a:prstGeom prst="rect">
             <a:avLst/>
           </a:prstGeom>
           <a:solidFill>
-            <a:srgbClr val="0D3B66"/>
+            <a:srgbClr val="3A86FF"/>
           </a:solidFill>
           <a:ln>
             <a:noFill/>
@@ -5763,8 +8546,8 @@
         </p:nvSpPr>
         <p:spPr>
           <a:xfrm>
-            <a:off x="457200" y="502920"/>
-            <a:ext cx="10972800" cy="640080"/>
+            <a:off x="640080" y="457200"/>
+            <a:ext cx="7315200" cy="274320"/>
           </a:xfrm>
           <a:prstGeom prst="rect">
             <a:avLst/>
@@ -5777,14 +8560,19 @@
           </a:bodyPr>
           <a:lstStyle/>
           <a:p>
-            <a:r>
-              <a:rPr sz="2600" b="1">
-                <a:solidFill>
-                  <a:srgbClr val="0D3B66"/>
+            <a:pPr>
+              <a:spcAft>
+                <a:spcPts val="400"/>
+              </a:spcAft>
+            </a:pPr>
+            <a:r>
+              <a:rPr sz="1000" b="1">
+                <a:solidFill>
+                  <a:srgbClr val="3A86FF"/>
                 </a:solidFill>
                 <a:latin typeface="Calibri"/>
               </a:rPr>
-              <a:t>4. Results: 200 synthetic test cases</a:t>
+              <a:t>SLIDE 04  /  LIVE DEMO</a:t>
             </a:r>
           </a:p>
         </p:txBody>
@@ -5797,8 +8585,8 @@
         </p:nvSpPr>
         <p:spPr>
           <a:xfrm>
-            <a:off x="457200" y="1051560"/>
-            <a:ext cx="10972800" cy="365760"/>
+            <a:off x="640080" y="713232"/>
+            <a:ext cx="10972800" cy="502920"/>
           </a:xfrm>
           <a:prstGeom prst="rect">
             <a:avLst/>
@@ -5811,629 +8599,33 @@
           </a:bodyPr>
           <a:lstStyle/>
           <a:p>
-            <a:r>
-              <a:rPr sz="1400" b="0">
-                <a:solidFill>
-                  <a:srgbClr val="6B7280"/>
+            <a:pPr>
+              <a:spcAft>
+                <a:spcPts val="400"/>
+              </a:spcAft>
+            </a:pPr>
+            <a:r>
+              <a:rPr sz="2800" b="1">
+                <a:solidFill>
+                  <a:srgbClr val="0A2A4F"/>
                 </a:solidFill>
                 <a:latin typeface="Calibri"/>
               </a:rPr>
-              <a:t>Fusion beats both signals; a=0.3 is the sweet spot</a:t>
-            </a:r>
-          </a:p>
-        </p:txBody>
-      </p:sp>
-      <p:graphicFrame>
-        <p:nvGraphicFramePr>
-          <p:cNvPr id="5" name="Table 4"/>
-          <p:cNvGraphicFramePr>
-            <a:graphicFrameLocks noGrp="1"/>
-          </p:cNvGraphicFramePr>
-          <p:nvPr/>
-        </p:nvGraphicFramePr>
-        <p:xfrm>
-          <a:off x="457200" y="1554480"/>
-          <a:ext cx="5760720" cy="2560320"/>
-        </p:xfrm>
-        <a:graphic>
-          <a:graphicData uri="http://schemas.openxmlformats.org/drawingml/2006/table">
-            <a:tbl>
-              <a:tblPr firstRow="1" bandRow="1">
-                <a:tableStyleId>{5C22544A-7EE6-4342-B048-85BDC9FD1C3A}</a:tableStyleId>
-              </a:tblPr>
-              <a:tblGrid>
-                <a:gridCol w="2011680"/>
-                <a:gridCol w="1280160"/>
-                <a:gridCol w="822960"/>
-                <a:gridCol w="822960"/>
-                <a:gridCol w="822960"/>
-              </a:tblGrid>
-              <a:tr h="426720">
-                <a:tc>
-                  <a:txBody>
-                    <a:bodyPr/>
-                    <a:lstStyle/>
-                    <a:p>
-                      <a:r>
-                        <a:rPr sz="1300" b="1">
-                          <a:solidFill>
-                            <a:srgbClr val="FFFFFF"/>
-                          </a:solidFill>
-                          <a:latin typeface="Calibri"/>
-                        </a:rPr>
-                        <a:t>Variant</a:t>
-                      </a:r>
-                    </a:p>
-                  </a:txBody>
-                  <a:tcPr>
-                    <a:solidFill>
-                      <a:srgbClr val="0D3B66"/>
-                    </a:solidFill>
-                  </a:tcPr>
-                </a:tc>
-                <a:tc>
-                  <a:txBody>
-                    <a:bodyPr/>
-                    <a:lstStyle/>
-                    <a:p>
-                      <a:r>
-                        <a:rPr sz="1300" b="1">
-                          <a:solidFill>
-                            <a:srgbClr val="FFFFFF"/>
-                          </a:solidFill>
-                          <a:latin typeface="Calibri"/>
-                        </a:rPr>
-                        <a:t>Mode</a:t>
-                      </a:r>
-                    </a:p>
-                  </a:txBody>
-                  <a:tcPr>
-                    <a:solidFill>
-                      <a:srgbClr val="0D3B66"/>
-                    </a:solidFill>
-                  </a:tcPr>
-                </a:tc>
-                <a:tc>
-                  <a:txBody>
-                    <a:bodyPr/>
-                    <a:lstStyle/>
-                    <a:p>
-                      <a:r>
-                        <a:rPr sz="1300" b="1">
-                          <a:solidFill>
-                            <a:srgbClr val="FFFFFF"/>
-                          </a:solidFill>
-                          <a:latin typeface="Calibri"/>
-                        </a:rPr>
-                        <a:t>R@1</a:t>
-                      </a:r>
-                    </a:p>
-                  </a:txBody>
-                  <a:tcPr>
-                    <a:solidFill>
-                      <a:srgbClr val="0D3B66"/>
-                    </a:solidFill>
-                  </a:tcPr>
-                </a:tc>
-                <a:tc>
-                  <a:txBody>
-                    <a:bodyPr/>
-                    <a:lstStyle/>
-                    <a:p>
-                      <a:r>
-                        <a:rPr sz="1300" b="1">
-                          <a:solidFill>
-                            <a:srgbClr val="FFFFFF"/>
-                          </a:solidFill>
-                          <a:latin typeface="Calibri"/>
-                        </a:rPr>
-                        <a:t>R@10</a:t>
-                      </a:r>
-                    </a:p>
-                  </a:txBody>
-                  <a:tcPr>
-                    <a:solidFill>
-                      <a:srgbClr val="0D3B66"/>
-                    </a:solidFill>
-                  </a:tcPr>
-                </a:tc>
-                <a:tc>
-                  <a:txBody>
-                    <a:bodyPr/>
-                    <a:lstStyle/>
-                    <a:p>
-                      <a:r>
-                        <a:rPr sz="1300" b="1">
-                          <a:solidFill>
-                            <a:srgbClr val="FFFFFF"/>
-                          </a:solidFill>
-                          <a:latin typeface="Calibri"/>
-                        </a:rPr>
-                        <a:t>MRR</a:t>
-                      </a:r>
-                    </a:p>
-                  </a:txBody>
-                  <a:tcPr>
-                    <a:solidFill>
-                      <a:srgbClr val="0D3B66"/>
-                    </a:solidFill>
-                  </a:tcPr>
-                </a:tc>
-              </a:tr>
-              <a:tr h="426720">
-                <a:tc>
-                  <a:txBody>
-                    <a:bodyPr/>
-                    <a:lstStyle/>
-                    <a:p>
-                      <a:r>
-                        <a:rPr sz="1300" b="0">
-                          <a:solidFill>
-                            <a:srgbClr val="1F2A3D"/>
-                          </a:solidFill>
-                          <a:latin typeface="Calibri"/>
-                        </a:rPr>
-                        <a:t>mining-only</a:t>
-                      </a:r>
-                    </a:p>
-                  </a:txBody>
-                  <a:tcPr/>
-                </a:tc>
-                <a:tc>
-                  <a:txBody>
-                    <a:bodyPr/>
-                    <a:lstStyle/>
-                    <a:p>
-                      <a:r>
-                        <a:rPr sz="1300" b="0">
-                          <a:solidFill>
-                            <a:srgbClr val="1F2A3D"/>
-                          </a:solidFill>
-                          <a:latin typeface="Calibri"/>
-                        </a:rPr>
-                        <a:t>a=0.0</a:t>
-                      </a:r>
-                    </a:p>
-                  </a:txBody>
-                  <a:tcPr/>
-                </a:tc>
-                <a:tc>
-                  <a:txBody>
-                    <a:bodyPr/>
-                    <a:lstStyle/>
-                    <a:p>
-                      <a:r>
-                        <a:rPr sz="1300" b="0">
-                          <a:solidFill>
-                            <a:srgbClr val="1F2A3D"/>
-                          </a:solidFill>
-                          <a:latin typeface="Calibri"/>
-                        </a:rPr>
-                        <a:t>0.790</a:t>
-                      </a:r>
-                    </a:p>
-                  </a:txBody>
-                  <a:tcPr/>
-                </a:tc>
-                <a:tc>
-                  <a:txBody>
-                    <a:bodyPr/>
-                    <a:lstStyle/>
-                    <a:p>
-                      <a:r>
-                        <a:rPr sz="1300" b="0">
-                          <a:solidFill>
-                            <a:srgbClr val="1F2A3D"/>
-                          </a:solidFill>
-                          <a:latin typeface="Calibri"/>
-                        </a:rPr>
-                        <a:t>0.870</a:t>
-                      </a:r>
-                    </a:p>
-                  </a:txBody>
-                  <a:tcPr/>
-                </a:tc>
-                <a:tc>
-                  <a:txBody>
-                    <a:bodyPr/>
-                    <a:lstStyle/>
-                    <a:p>
-                      <a:r>
-                        <a:rPr sz="1300" b="0">
-                          <a:solidFill>
-                            <a:srgbClr val="1F2A3D"/>
-                          </a:solidFill>
-                          <a:latin typeface="Calibri"/>
-                        </a:rPr>
-                        <a:t>0.829</a:t>
-                      </a:r>
-                    </a:p>
-                  </a:txBody>
-                  <a:tcPr/>
-                </a:tc>
-              </a:tr>
-              <a:tr h="426720">
-                <a:tc>
-                  <a:txBody>
-                    <a:bodyPr/>
-                    <a:lstStyle/>
-                    <a:p>
-                      <a:r>
-                        <a:rPr sz="1300" b="0">
-                          <a:solidFill>
-                            <a:srgbClr val="1F2A3D"/>
-                          </a:solidFill>
-                          <a:latin typeface="Calibri"/>
-                        </a:rPr>
-                        <a:t>MiniLM</a:t>
-                      </a:r>
-                    </a:p>
-                  </a:txBody>
-                  <a:tcPr/>
-                </a:tc>
-                <a:tc>
-                  <a:txBody>
-                    <a:bodyPr/>
-                    <a:lstStyle/>
-                    <a:p>
-                      <a:r>
-                        <a:rPr sz="1300" b="0">
-                          <a:solidFill>
-                            <a:srgbClr val="1F2A3D"/>
-                          </a:solidFill>
-                          <a:latin typeface="Calibri"/>
-                        </a:rPr>
-                        <a:t>retrieval</a:t>
-                      </a:r>
-                    </a:p>
-                  </a:txBody>
-                  <a:tcPr/>
-                </a:tc>
-                <a:tc>
-                  <a:txBody>
-                    <a:bodyPr/>
-                    <a:lstStyle/>
-                    <a:p>
-                      <a:r>
-                        <a:rPr sz="1300" b="0">
-                          <a:solidFill>
-                            <a:srgbClr val="1F2A3D"/>
-                          </a:solidFill>
-                          <a:latin typeface="Calibri"/>
-                        </a:rPr>
-                        <a:t>0.130</a:t>
-                      </a:r>
-                    </a:p>
-                  </a:txBody>
-                  <a:tcPr/>
-                </a:tc>
-                <a:tc>
-                  <a:txBody>
-                    <a:bodyPr/>
-                    <a:lstStyle/>
-                    <a:p>
-                      <a:r>
-                        <a:rPr sz="1300" b="0">
-                          <a:solidFill>
-                            <a:srgbClr val="1F2A3D"/>
-                          </a:solidFill>
-                          <a:latin typeface="Calibri"/>
-                        </a:rPr>
-                        <a:t>0.180</a:t>
-                      </a:r>
-                    </a:p>
-                  </a:txBody>
-                  <a:tcPr/>
-                </a:tc>
-                <a:tc>
-                  <a:txBody>
-                    <a:bodyPr/>
-                    <a:lstStyle/>
-                    <a:p>
-                      <a:r>
-                        <a:rPr sz="1300" b="0">
-                          <a:solidFill>
-                            <a:srgbClr val="1F2A3D"/>
-                          </a:solidFill>
-                          <a:latin typeface="Calibri"/>
-                        </a:rPr>
-                        <a:t>0.151</a:t>
-                      </a:r>
-                    </a:p>
-                  </a:txBody>
-                  <a:tcPr/>
-                </a:tc>
-              </a:tr>
-              <a:tr h="426720">
-                <a:tc>
-                  <a:txBody>
-                    <a:bodyPr/>
-                    <a:lstStyle/>
-                    <a:p>
-                      <a:r>
-                        <a:rPr sz="1300" b="0">
-                          <a:solidFill>
-                            <a:srgbClr val="1F2A3D"/>
-                          </a:solidFill>
-                          <a:latin typeface="Calibri"/>
-                        </a:rPr>
-                        <a:t>MiniLM+syn</a:t>
-                      </a:r>
-                    </a:p>
-                  </a:txBody>
-                  <a:tcPr/>
-                </a:tc>
-                <a:tc>
-                  <a:txBody>
-                    <a:bodyPr/>
-                    <a:lstStyle/>
-                    <a:p>
-                      <a:r>
-                        <a:rPr sz="1300" b="0">
-                          <a:solidFill>
-                            <a:srgbClr val="1F2A3D"/>
-                          </a:solidFill>
-                          <a:latin typeface="Calibri"/>
-                        </a:rPr>
-                        <a:t>fused 0.3</a:t>
-                      </a:r>
-                    </a:p>
-                  </a:txBody>
-                  <a:tcPr/>
-                </a:tc>
-                <a:tc>
-                  <a:txBody>
-                    <a:bodyPr/>
-                    <a:lstStyle/>
-                    <a:p>
-                      <a:r>
-                        <a:rPr sz="1300" b="0">
-                          <a:solidFill>
-                            <a:srgbClr val="1F2A3D"/>
-                          </a:solidFill>
-                          <a:latin typeface="Calibri"/>
-                        </a:rPr>
-                        <a:t>0.820</a:t>
-                      </a:r>
-                    </a:p>
-                  </a:txBody>
-                  <a:tcPr/>
-                </a:tc>
-                <a:tc>
-                  <a:txBody>
-                    <a:bodyPr/>
-                    <a:lstStyle/>
-                    <a:p>
-                      <a:r>
-                        <a:rPr sz="1300" b="0">
-                          <a:solidFill>
-                            <a:srgbClr val="1F2A3D"/>
-                          </a:solidFill>
-                          <a:latin typeface="Calibri"/>
-                        </a:rPr>
-                        <a:t>0.895</a:t>
-                      </a:r>
-                    </a:p>
-                  </a:txBody>
-                  <a:tcPr/>
-                </a:tc>
-                <a:tc>
-                  <a:txBody>
-                    <a:bodyPr/>
-                    <a:lstStyle/>
-                    <a:p>
-                      <a:r>
-                        <a:rPr sz="1300" b="0">
-                          <a:solidFill>
-                            <a:srgbClr val="1F2A3D"/>
-                          </a:solidFill>
-                          <a:latin typeface="Calibri"/>
-                        </a:rPr>
-                        <a:t>0.857</a:t>
-                      </a:r>
-                    </a:p>
-                  </a:txBody>
-                  <a:tcPr/>
-                </a:tc>
-              </a:tr>
-              <a:tr h="426720">
-                <a:tc>
-                  <a:txBody>
-                    <a:bodyPr/>
-                    <a:lstStyle/>
-                    <a:p>
-                      <a:r>
-                        <a:rPr sz="1300" b="0">
-                          <a:solidFill>
-                            <a:srgbClr val="1F2A3D"/>
-                          </a:solidFill>
-                          <a:latin typeface="Calibri"/>
-                        </a:rPr>
-                        <a:t>PubMedBERT+syn</a:t>
-                      </a:r>
-                    </a:p>
-                  </a:txBody>
-                  <a:tcPr/>
-                </a:tc>
-                <a:tc>
-                  <a:txBody>
-                    <a:bodyPr/>
-                    <a:lstStyle/>
-                    <a:p>
-                      <a:r>
-                        <a:rPr sz="1300" b="0">
-                          <a:solidFill>
-                            <a:srgbClr val="1F2A3D"/>
-                          </a:solidFill>
-                          <a:latin typeface="Calibri"/>
-                        </a:rPr>
-                        <a:t>retrieval</a:t>
-                      </a:r>
-                    </a:p>
-                  </a:txBody>
-                  <a:tcPr/>
-                </a:tc>
-                <a:tc>
-                  <a:txBody>
-                    <a:bodyPr/>
-                    <a:lstStyle/>
-                    <a:p>
-                      <a:r>
-                        <a:rPr sz="1300" b="0">
-                          <a:solidFill>
-                            <a:srgbClr val="1F2A3D"/>
-                          </a:solidFill>
-                          <a:latin typeface="Calibri"/>
-                        </a:rPr>
-                        <a:t>0.130</a:t>
-                      </a:r>
-                    </a:p>
-                  </a:txBody>
-                  <a:tcPr/>
-                </a:tc>
-                <a:tc>
-                  <a:txBody>
-                    <a:bodyPr/>
-                    <a:lstStyle/>
-                    <a:p>
-                      <a:r>
-                        <a:rPr sz="1300" b="0">
-                          <a:solidFill>
-                            <a:srgbClr val="1F2A3D"/>
-                          </a:solidFill>
-                          <a:latin typeface="Calibri"/>
-                        </a:rPr>
-                        <a:t>0.265</a:t>
-                      </a:r>
-                    </a:p>
-                  </a:txBody>
-                  <a:tcPr/>
-                </a:tc>
-                <a:tc>
-                  <a:txBody>
-                    <a:bodyPr/>
-                    <a:lstStyle/>
-                    <a:p>
-                      <a:r>
-                        <a:rPr sz="1300" b="0">
-                          <a:solidFill>
-                            <a:srgbClr val="1F2A3D"/>
-                          </a:solidFill>
-                          <a:latin typeface="Calibri"/>
-                        </a:rPr>
-                        <a:t>0.194</a:t>
-                      </a:r>
-                    </a:p>
-                  </a:txBody>
-                  <a:tcPr/>
-                </a:tc>
-              </a:tr>
-              <a:tr h="426720">
-                <a:tc>
-                  <a:txBody>
-                    <a:bodyPr/>
-                    <a:lstStyle/>
-                    <a:p>
-                      <a:r>
-                        <a:rPr sz="1300" b="0">
-                          <a:solidFill>
-                            <a:srgbClr val="1F2A3D"/>
-                          </a:solidFill>
-                          <a:latin typeface="Calibri"/>
-                        </a:rPr>
-                        <a:t>MiniLM (best)</a:t>
-                      </a:r>
-                    </a:p>
-                  </a:txBody>
-                  <a:tcPr/>
-                </a:tc>
-                <a:tc>
-                  <a:txBody>
-                    <a:bodyPr/>
-                    <a:lstStyle/>
-                    <a:p>
-                      <a:r>
-                        <a:rPr sz="1300" b="0">
-                          <a:solidFill>
-                            <a:srgbClr val="1F2A3D"/>
-                          </a:solidFill>
-                          <a:latin typeface="Calibri"/>
-                        </a:rPr>
-                        <a:t>fused 0.3</a:t>
-                      </a:r>
-                    </a:p>
-                  </a:txBody>
-                  <a:tcPr/>
-                </a:tc>
-                <a:tc>
-                  <a:txBody>
-                    <a:bodyPr/>
-                    <a:lstStyle/>
-                    <a:p>
-                      <a:r>
-                        <a:rPr sz="1300" b="0">
-                          <a:solidFill>
-                            <a:srgbClr val="1F2A3D"/>
-                          </a:solidFill>
-                          <a:latin typeface="Calibri"/>
-                        </a:rPr>
-                        <a:t>0.825</a:t>
-                      </a:r>
-                    </a:p>
-                  </a:txBody>
-                  <a:tcPr/>
-                </a:tc>
-                <a:tc>
-                  <a:txBody>
-                    <a:bodyPr/>
-                    <a:lstStyle/>
-                    <a:p>
-                      <a:r>
-                        <a:rPr sz="1300" b="0">
-                          <a:solidFill>
-                            <a:srgbClr val="1F2A3D"/>
-                          </a:solidFill>
-                          <a:latin typeface="Calibri"/>
-                        </a:rPr>
-                        <a:t>0.890</a:t>
-                      </a:r>
-                    </a:p>
-                  </a:txBody>
-                  <a:tcPr/>
-                </a:tc>
-                <a:tc>
-                  <a:txBody>
-                    <a:bodyPr/>
-                    <a:lstStyle/>
-                    <a:p>
-                      <a:r>
-                        <a:rPr sz="1300" b="0">
-                          <a:solidFill>
-                            <a:srgbClr val="1F2A3D"/>
-                          </a:solidFill>
-                          <a:latin typeface="Calibri"/>
-                        </a:rPr>
-                        <a:t>0.857</a:t>
-                      </a:r>
-                    </a:p>
-                  </a:txBody>
-                  <a:tcPr/>
-                </a:tc>
-              </a:tr>
-            </a:tbl>
-          </a:graphicData>
-        </a:graphic>
-      </p:graphicFrame>
-      <p:sp>
-        <p:nvSpPr>
-          <p:cNvPr id="6" name="TextBox 5"/>
+              <a:t>Cardiac-event preset, end-to-end</a:t>
+            </a:r>
+          </a:p>
+        </p:txBody>
+      </p:sp>
+      <p:sp>
+        <p:nvSpPr>
+          <p:cNvPr id="5" name="TextBox 4"/>
           <p:cNvSpPr txBox="1"/>
           <p:nvPr/>
         </p:nvSpPr>
         <p:spPr>
           <a:xfrm>
-            <a:off x="457200" y="4297680"/>
-            <a:ext cx="5943600" cy="365760"/>
+            <a:off x="640080" y="1207008"/>
+            <a:ext cx="10972800" cy="365760"/>
           </a:xfrm>
           <a:prstGeom prst="rect">
             <a:avLst/>
@@ -6446,110 +8638,42 @@
           </a:bodyPr>
           <a:lstStyle/>
           <a:p>
-            <a:r>
-              <a:rPr sz="1400" b="1">
-                <a:solidFill>
-                  <a:srgbClr val="0D3B66"/>
+            <a:pPr>
+              <a:spcAft>
+                <a:spcPts val="400"/>
+              </a:spcAft>
+            </a:pPr>
+            <a:r>
+              <a:rPr sz="1400" b="0">
+                <a:solidFill>
+                  <a:srgbClr val="6B7280"/>
                 </a:solidFill>
                 <a:latin typeface="Calibri"/>
               </a:rPr>
-              <a:t>Best fused: MiniLM with synonym expansion, a=0.3</a:t>
-            </a:r>
-          </a:p>
-        </p:txBody>
-      </p:sp>
-      <p:sp>
-        <p:nvSpPr>
-          <p:cNvPr id="7" name="TextBox 6"/>
-          <p:cNvSpPr txBox="1"/>
-          <p:nvPr/>
-        </p:nvSpPr>
-        <p:spPr>
-          <a:xfrm>
-            <a:off x="457200" y="4617720"/>
-            <a:ext cx="5943600" cy="1463040"/>
-          </a:xfrm>
-          <a:prstGeom prst="rect">
-            <a:avLst/>
-          </a:prstGeom>
-          <a:noFill/>
-        </p:spPr>
-        <p:txBody>
-          <a:bodyPr wrap="square">
-            <a:spAutoFit/>
-          </a:bodyPr>
-          <a:lstStyle/>
-          <a:p>
-            <a:pPr>
-              <a:spcAft>
-                <a:spcPts val="600"/>
-              </a:spcAft>
-            </a:pPr>
-            <a:r>
-              <a:rPr sz="1300">
-                <a:solidFill>
-                  <a:srgbClr val="1F2A3D"/>
-                </a:solidFill>
-                <a:latin typeface="Calibri"/>
-              </a:rPr>
-              <a:t>  +3.5 R@1 over mining alone</a:t>
-            </a:r>
-          </a:p>
-          <a:p>
-            <a:pPr>
-              <a:spcAft>
-                <a:spcPts val="600"/>
-              </a:spcAft>
-            </a:pPr>
-            <a:r>
-              <a:rPr sz="1300">
-                <a:solidFill>
-                  <a:srgbClr val="1F2A3D"/>
-                </a:solidFill>
-                <a:latin typeface="Calibri"/>
-              </a:rPr>
-              <a:t>  Retrieval-only collapses (vocab gap); +syn helps but ceiling stays low</a:t>
-            </a:r>
-          </a:p>
-          <a:p>
-            <a:pPr>
-              <a:spcAft>
-                <a:spcPts val="600"/>
-              </a:spcAft>
-            </a:pPr>
-            <a:r>
-              <a:rPr sz="1300">
-                <a:solidFill>
-                  <a:srgbClr val="1F2A3D"/>
-                </a:solidFill>
-                <a:latin typeface="Calibri"/>
-              </a:rPr>
-              <a:t>  Signals are complementary, not redundant</a:t>
-            </a:r>
-          </a:p>
-        </p:txBody>
-      </p:sp>
-      <p:sp>
-        <p:nvSpPr>
-          <p:cNvPr id="8" name="Rounded Rectangle 7"/>
+              <a:t>Switch to the browser; if it fails, the screenshot is the demo</a:t>
+            </a:r>
+          </a:p>
+        </p:txBody>
+      </p:sp>
+      <p:sp>
+        <p:nvSpPr>
+          <p:cNvPr id="6" name="Rectangle 5"/>
           <p:cNvSpPr/>
           <p:nvPr/>
         </p:nvSpPr>
         <p:spPr>
           <a:xfrm>
-            <a:off x="457200" y="5852160"/>
-            <a:ext cx="5943600" cy="640080"/>
-          </a:xfrm>
-          <a:prstGeom prst="roundRect">
+            <a:off x="457200" y="1627632"/>
+            <a:ext cx="11338560" cy="13716"/>
+          </a:xfrm>
+          <a:prstGeom prst="rect">
             <a:avLst/>
           </a:prstGeom>
           <a:solidFill>
-            <a:srgbClr val="ECFEFF"/>
+            <a:srgbClr val="E5ECF5"/>
           </a:solidFill>
-          <a:ln w="15240">
-            <a:solidFill>
-              <a:srgbClr val="0E7490"/>
-            </a:solidFill>
+          <a:ln>
+            <a:noFill/>
           </a:ln>
         </p:spPr>
         <p:style>
@@ -6574,43 +8698,9 @@
           </a:p>
         </p:txBody>
       </p:sp>
-      <p:sp>
-        <p:nvSpPr>
-          <p:cNvPr id="9" name="TextBox 8"/>
-          <p:cNvSpPr txBox="1"/>
-          <p:nvPr/>
-        </p:nvSpPr>
-        <p:spPr>
-          <a:xfrm>
-            <a:off x="640080" y="5943600"/>
-            <a:ext cx="5669280" cy="457200"/>
-          </a:xfrm>
-          <a:prstGeom prst="rect">
-            <a:avLst/>
-          </a:prstGeom>
-          <a:noFill/>
-        </p:spPr>
-        <p:txBody>
-          <a:bodyPr wrap="square">
-            <a:spAutoFit/>
-          </a:bodyPr>
-          <a:lstStyle/>
-          <a:p>
-            <a:r>
-              <a:rPr sz="1200" b="1">
-                <a:solidFill>
-                  <a:srgbClr val="0E7490"/>
-                </a:solidFill>
-                <a:latin typeface="Calibri"/>
-              </a:rPr>
-              <a:t>Latency: 12 ms mean, 20 ms p95 (default config, 100 queries on M3 Pro)</a:t>
-            </a:r>
-          </a:p>
-        </p:txBody>
-      </p:sp>
       <p:pic>
         <p:nvPicPr>
-          <p:cNvPr id="10" name="Picture 9" descr="alpha_sweep.png"/>
+          <p:cNvPr id="7" name="Picture 6" descr="02-results-cardiac.png"/>
           <p:cNvPicPr>
             <a:picLocks noChangeAspect="1"/>
           </p:cNvPicPr>
@@ -6624,8 +8714,8 @@
         </p:blipFill>
         <p:spPr>
           <a:xfrm>
-            <a:off x="6766560" y="1554480"/>
-            <a:ext cx="5120640" cy="3072384"/>
+            <a:off x="457200" y="1874519"/>
+            <a:ext cx="1433289" cy="4160520"/>
           </a:xfrm>
           <a:prstGeom prst="rect">
             <a:avLst/>
@@ -6634,14 +8724,14 @@
       </p:pic>
       <p:sp>
         <p:nvSpPr>
-          <p:cNvPr id="11" name="TextBox 10"/>
+          <p:cNvPr id="8" name="TextBox 7"/>
           <p:cNvSpPr txBox="1"/>
           <p:nvPr/>
         </p:nvSpPr>
         <p:spPr>
           <a:xfrm>
-            <a:off x="6766560" y="5852160"/>
-            <a:ext cx="5120640" cy="365760"/>
+            <a:off x="457200" y="6080760"/>
+            <a:ext cx="6858000" cy="274320"/>
           </a:xfrm>
           <a:prstGeom prst="rect">
             <a:avLst/>
@@ -6654,29 +8744,78 @@
           </a:bodyPr>
           <a:lstStyle/>
           <a:p>
-            <a:pPr algn="l"/>
-            <a:r>
-              <a:rPr sz="1100" b="0">
+            <a:pPr>
+              <a:spcAft>
+                <a:spcPts val="400"/>
+              </a:spcAft>
+            </a:pPr>
+            <a:r>
+              <a:rPr sz="1000" b="0">
                 <a:solidFill>
                   <a:srgbClr val="6B7280"/>
                 </a:solidFill>
                 <a:latin typeface="Calibri"/>
               </a:rPr>
-              <a:t>Alpha sweep peaks on [0.1, 0.4]. Recall@1 collapses for a &gt;= 0.7.</a:t>
-            </a:r>
-          </a:p>
-        </p:txBody>
-      </p:sp>
-      <p:sp>
-        <p:nvSpPr>
-          <p:cNvPr id="12" name="TextBox 11"/>
+              <a:t>Production demo: Azure OpenAI 3072d + Pinecone + GPT-5.3 explainer.</a:t>
+            </a:r>
+          </a:p>
+        </p:txBody>
+      </p:sp>
+      <p:sp>
+        <p:nvSpPr>
+          <p:cNvPr id="9" name="Rounded Rectangle 8"/>
+          <p:cNvSpPr/>
+          <p:nvPr/>
+        </p:nvSpPr>
+        <p:spPr>
+          <a:xfrm>
+            <a:off x="7498079" y="1874519"/>
+            <a:ext cx="4297680" cy="4526280"/>
+          </a:xfrm>
+          <a:prstGeom prst="roundRect">
+            <a:avLst>
+              <a:gd name="adj" fmla="val 8000"/>
+            </a:avLst>
+          </a:prstGeom>
+          <a:solidFill>
+            <a:srgbClr val="0A2A4F"/>
+          </a:solidFill>
+          <a:ln>
+            <a:noFill/>
+          </a:ln>
+        </p:spPr>
+        <p:style>
+          <a:lnRef idx="1">
+            <a:schemeClr val="accent1"/>
+          </a:lnRef>
+          <a:fillRef idx="3">
+            <a:schemeClr val="accent1"/>
+          </a:fillRef>
+          <a:effectRef idx="2">
+            <a:schemeClr val="accent1"/>
+          </a:effectRef>
+          <a:fontRef idx="minor">
+            <a:schemeClr val="lt1"/>
+          </a:fontRef>
+        </p:style>
+        <p:txBody>
+          <a:bodyPr rtlCol="0" anchor="ctr"/>
+          <a:lstStyle/>
+          <a:p>
+            <a:pPr algn="ctr"/>
+          </a:p>
+        </p:txBody>
+      </p:sp>
+      <p:sp>
+        <p:nvSpPr>
+          <p:cNvPr id="10" name="TextBox 9"/>
           <p:cNvSpPr txBox="1"/>
           <p:nvPr/>
         </p:nvSpPr>
         <p:spPr>
           <a:xfrm>
-            <a:off x="365760" y="6492240"/>
-            <a:ext cx="10058400" cy="274320"/>
+            <a:off x="7680960" y="1993392"/>
+            <a:ext cx="4023360" cy="274320"/>
           </a:xfrm>
           <a:prstGeom prst="rect">
             <a:avLst/>
@@ -6689,14 +8828,386 @@
           </a:bodyPr>
           <a:lstStyle/>
           <a:p>
-            <a:r>
-              <a:rPr sz="1000" b="0">
+            <a:pPr>
+              <a:spcAft>
+                <a:spcPts val="400"/>
+              </a:spcAft>
+            </a:pPr>
+            <a:r>
+              <a:rPr sz="1000" b="1">
+                <a:solidFill>
+                  <a:srgbClr val="3A86FF"/>
+                </a:solidFill>
+                <a:latin typeface="Calibri"/>
+              </a:rPr>
+              <a:t>DEMO SCRIPT  (~5 min)</a:t>
+            </a:r>
+          </a:p>
+        </p:txBody>
+      </p:sp>
+      <p:sp>
+        <p:nvSpPr>
+          <p:cNvPr id="11" name="TextBox 10"/>
+          <p:cNvSpPr txBox="1"/>
+          <p:nvPr/>
+        </p:nvSpPr>
+        <p:spPr>
+          <a:xfrm>
+            <a:off x="7680960" y="2286000"/>
+            <a:ext cx="4023360" cy="365760"/>
+          </a:xfrm>
+          <a:prstGeom prst="rect">
+            <a:avLst/>
+          </a:prstGeom>
+          <a:noFill/>
+        </p:spPr>
+        <p:txBody>
+          <a:bodyPr wrap="square">
+            <a:spAutoFit/>
+          </a:bodyPr>
+          <a:lstStyle/>
+          <a:p>
+            <a:pPr>
+              <a:spcAft>
+                <a:spcPts val="400"/>
+              </a:spcAft>
+            </a:pPr>
+            <a:r>
+              <a:rPr sz="1500" b="1">
+                <a:solidFill>
+                  <a:srgbClr val="FFFFFF"/>
+                </a:solidFill>
+                <a:latin typeface="Calibri"/>
+              </a:rPr>
+              <a:t>Cardiac event walkthrough</a:t>
+            </a:r>
+          </a:p>
+        </p:txBody>
+      </p:sp>
+      <p:sp>
+        <p:nvSpPr>
+          <p:cNvPr id="12" name="TextBox 11"/>
+          <p:cNvSpPr txBox="1"/>
+          <p:nvPr/>
+        </p:nvSpPr>
+        <p:spPr>
+          <a:xfrm>
+            <a:off x="7680960" y="2743200"/>
+            <a:ext cx="4023360" cy="3611880"/>
+          </a:xfrm>
+          <a:prstGeom prst="rect">
+            <a:avLst/>
+          </a:prstGeom>
+          <a:noFill/>
+        </p:spPr>
+        <p:txBody>
+          <a:bodyPr wrap="square">
+            <a:spAutoFit/>
+          </a:bodyPr>
+          <a:lstStyle/>
+          <a:p>
+            <a:pPr>
+              <a:spcAft>
+                <a:spcPts val="500"/>
+              </a:spcAft>
+            </a:pPr>
+            <a:r>
+              <a:rPr sz="1200" b="1">
+                <a:solidFill>
+                  <a:srgbClr val="3A86FF"/>
+                </a:solidFill>
+              </a:rPr>
+              <a:t>1.  </a:t>
+            </a:r>
+            <a:r>
+              <a:rPr sz="1200">
+                <a:solidFill>
+                  <a:srgbClr val="CBD5E1"/>
+                </a:solidFill>
+              </a:rPr>
+              <a:t>Click the Cardiac event preset.</a:t>
+            </a:r>
+          </a:p>
+          <a:p>
+            <a:pPr>
+              <a:spcAft>
+                <a:spcPts val="500"/>
+              </a:spcAft>
+            </a:pPr>
+            <a:r>
+              <a:rPr sz="1200" b="1">
+                <a:solidFill>
+                  <a:srgbClr val="3A86FF"/>
+                </a:solidFill>
+              </a:rPr>
+              <a:t>2.  </a:t>
+            </a:r>
+            <a:r>
+              <a:rPr sz="1200">
+                <a:solidFill>
+                  <a:srgbClr val="CBD5E1"/>
+                </a:solidFill>
+              </a:rPr>
+              <a:t>Heart Attack ranks #1 (fused 0.831).</a:t>
+            </a:r>
+          </a:p>
+          <a:p>
+            <a:pPr>
+              <a:spcAft>
+                <a:spcPts val="500"/>
+              </a:spcAft>
+            </a:pPr>
+            <a:r>
+              <a:rPr sz="1200" b="1">
+                <a:solidFill>
+                  <a:srgbClr val="3A86FF"/>
+                </a:solidFill>
+              </a:rPr>
+              <a:t>3.  </a:t>
+            </a:r>
+            <a:r>
+              <a:rPr sz="1200">
+                <a:solidFill>
+                  <a:srgbClr val="CBD5E1"/>
+                </a:solidFill>
+              </a:rPr>
+              <a:t>Read the 4-section clinical card.</a:t>
+            </a:r>
+          </a:p>
+          <a:p>
+            <a:pPr>
+              <a:spcAft>
+                <a:spcPts val="500"/>
+              </a:spcAft>
+            </a:pPr>
+            <a:r>
+              <a:rPr sz="1200" b="1">
+                <a:solidFill>
+                  <a:srgbClr val="3A86FF"/>
+                </a:solidFill>
+              </a:rPr>
+              <a:t>4.  </a:t>
+            </a:r>
+            <a:r>
+              <a:rPr sz="1200">
+                <a:solidFill>
+                  <a:srgbClr val="CBD5E1"/>
+                </a:solidFill>
+              </a:rPr>
+              <a:t>Click a chip for symptom gloss + synonyms.</a:t>
+            </a:r>
+          </a:p>
+          <a:p>
+            <a:pPr>
+              <a:spcAft>
+                <a:spcPts val="500"/>
+              </a:spcAft>
+            </a:pPr>
+            <a:r>
+              <a:rPr sz="1200" b="1">
+                <a:solidFill>
+                  <a:srgbClr val="3A86FF"/>
+                </a:solidFill>
+              </a:rPr>
+              <a:t>5.  </a:t>
+            </a:r>
+            <a:r>
+              <a:rPr sz="1200">
+                <a:solidFill>
+                  <a:srgbClr val="CBD5E1"/>
+                </a:solidFill>
+              </a:rPr>
+              <a:t>Drag the alpha slider, rankings re-fuse.</a:t>
+            </a:r>
+          </a:p>
+          <a:p>
+            <a:pPr>
+              <a:spcAft>
+                <a:spcPts val="500"/>
+              </a:spcAft>
+            </a:pPr>
+            <a:r>
+              <a:rPr sz="1200" b="1">
+                <a:solidFill>
+                  <a:srgbClr val="3A86FF"/>
+                </a:solidFill>
+              </a:rPr>
+              <a:t>6.  </a:t>
+            </a:r>
+            <a:r>
+              <a:rPr sz="1200">
+                <a:solidFill>
+                  <a:srgbClr val="CBD5E1"/>
+                </a:solidFill>
+              </a:rPr>
+              <a:t>Filter to MedlinePlus only.</a:t>
+            </a:r>
+          </a:p>
+          <a:p>
+            <a:pPr>
+              <a:spcAft>
+                <a:spcPts val="500"/>
+              </a:spcAft>
+            </a:pPr>
+            <a:r>
+              <a:rPr sz="1200" b="1">
+                <a:solidFill>
+                  <a:srgbClr val="3A86FF"/>
+                </a:solidFill>
+              </a:rPr>
+              <a:t>7.  </a:t>
+            </a:r>
+            <a:r>
+              <a:rPr sz="1200">
+                <a:solidFill>
+                  <a:srgbClr val="CBD5E1"/>
+                </a:solidFill>
+              </a:rPr>
+              <a:t>Toggle to OpenAI explainer.</a:t>
+            </a:r>
+          </a:p>
+          <a:p>
+            <a:pPr>
+              <a:spcAft>
+                <a:spcPts val="500"/>
+              </a:spcAft>
+            </a:pPr>
+            <a:r>
+              <a:rPr sz="1200" b="1">
+                <a:solidFill>
+                  <a:srgbClr val="3A86FF"/>
+                </a:solidFill>
+              </a:rPr>
+              <a:t>8.  </a:t>
+            </a:r>
+            <a:r>
+              <a:rPr sz="1200">
+                <a:solidFill>
+                  <a:srgbClr val="CBD5E1"/>
+                </a:solidFill>
+              </a:rPr>
+              <a:t>Open Insights tab for live latency.</a:t>
+            </a:r>
+          </a:p>
+        </p:txBody>
+      </p:sp>
+      <p:sp>
+        <p:nvSpPr>
+          <p:cNvPr id="13" name="Rectangle 12"/>
+          <p:cNvSpPr/>
+          <p:nvPr/>
+        </p:nvSpPr>
+        <p:spPr>
+          <a:xfrm>
+            <a:off x="457200" y="6473952"/>
+            <a:ext cx="11338560" cy="13716"/>
+          </a:xfrm>
+          <a:prstGeom prst="rect">
+            <a:avLst/>
+          </a:prstGeom>
+          <a:solidFill>
+            <a:srgbClr val="E5ECF5"/>
+          </a:solidFill>
+          <a:ln>
+            <a:noFill/>
+          </a:ln>
+        </p:spPr>
+        <p:style>
+          <a:lnRef idx="1">
+            <a:schemeClr val="accent1"/>
+          </a:lnRef>
+          <a:fillRef idx="3">
+            <a:schemeClr val="accent1"/>
+          </a:fillRef>
+          <a:effectRef idx="2">
+            <a:schemeClr val="accent1"/>
+          </a:effectRef>
+          <a:fontRef idx="minor">
+            <a:schemeClr val="lt1"/>
+          </a:fontRef>
+        </p:style>
+        <p:txBody>
+          <a:bodyPr rtlCol="0" anchor="ctr"/>
+          <a:lstStyle/>
+          <a:p>
+            <a:pPr algn="ctr"/>
+          </a:p>
+        </p:txBody>
+      </p:sp>
+      <p:sp>
+        <p:nvSpPr>
+          <p:cNvPr id="14" name="TextBox 13"/>
+          <p:cNvSpPr txBox="1"/>
+          <p:nvPr/>
+        </p:nvSpPr>
+        <p:spPr>
+          <a:xfrm>
+            <a:off x="457200" y="6528816"/>
+            <a:ext cx="6400800" cy="274320"/>
+          </a:xfrm>
+          <a:prstGeom prst="rect">
+            <a:avLst/>
+          </a:prstGeom>
+          <a:noFill/>
+        </p:spPr>
+        <p:txBody>
+          <a:bodyPr wrap="square">
+            <a:spAutoFit/>
+          </a:bodyPr>
+          <a:lstStyle/>
+          <a:p>
+            <a:pPr>
+              <a:spcAft>
+                <a:spcPts val="400"/>
+              </a:spcAft>
+            </a:pPr>
+            <a:r>
+              <a:rPr sz="900" b="0">
                 <a:solidFill>
                   <a:srgbClr val="6B7280"/>
                 </a:solidFill>
                 <a:latin typeface="Calibri"/>
               </a:rPr>
-              <a:t>CMPE 255 Spring 2026, Sakshat Patil, Vineet Kumar, Aishwarya Madhave, Slide 4 of 7</a:t>
+              <a:t>CMPE 255 Spring 2026  |  Patil, Kumar, Madhave</a:t>
+            </a:r>
+          </a:p>
+        </p:txBody>
+      </p:sp>
+      <p:sp>
+        <p:nvSpPr>
+          <p:cNvPr id="15" name="TextBox 14"/>
+          <p:cNvSpPr txBox="1"/>
+          <p:nvPr/>
+        </p:nvSpPr>
+        <p:spPr>
+          <a:xfrm>
+            <a:off x="7772400" y="6528816"/>
+            <a:ext cx="4023360" cy="274320"/>
+          </a:xfrm>
+          <a:prstGeom prst="rect">
+            <a:avLst/>
+          </a:prstGeom>
+          <a:noFill/>
+        </p:spPr>
+        <p:txBody>
+          <a:bodyPr wrap="square">
+            <a:spAutoFit/>
+          </a:bodyPr>
+          <a:lstStyle/>
+          <a:p>
+            <a:pPr algn="r">
+              <a:spcAft>
+                <a:spcPts val="400"/>
+              </a:spcAft>
+            </a:pPr>
+            <a:r>
+              <a:rPr sz="900" b="0">
+                <a:solidFill>
+                  <a:srgbClr val="6B7280"/>
+                </a:solidFill>
+                <a:latin typeface="Calibri"/>
+              </a:rPr>
+              <a:t>4 / 7</a:t>
             </a:r>
           </a:p>
         </p:txBody>
@@ -6727,14 +9238,14 @@
         </p:nvSpPr>
         <p:spPr>
           <a:xfrm>
-            <a:off x="0" y="0"/>
-            <a:ext cx="12191695" cy="411480"/>
+            <a:off x="457200" y="457200"/>
+            <a:ext cx="73152" cy="502920"/>
           </a:xfrm>
           <a:prstGeom prst="rect">
             <a:avLst/>
           </a:prstGeom>
           <a:solidFill>
-            <a:srgbClr val="0D3B66"/>
+            <a:srgbClr val="3A86FF"/>
           </a:solidFill>
           <a:ln>
             <a:noFill/>
@@ -6770,8 +9281,8 @@
         </p:nvSpPr>
         <p:spPr>
           <a:xfrm>
-            <a:off x="457200" y="502920"/>
-            <a:ext cx="10972800" cy="640080"/>
+            <a:off x="640080" y="457200"/>
+            <a:ext cx="7315200" cy="274320"/>
           </a:xfrm>
           <a:prstGeom prst="rect">
             <a:avLst/>
@@ -6784,14 +9295,19 @@
           </a:bodyPr>
           <a:lstStyle/>
           <a:p>
-            <a:r>
-              <a:rPr sz="2600" b="1">
-                <a:solidFill>
-                  <a:srgbClr val="0D3B66"/>
+            <a:pPr>
+              <a:spcAft>
+                <a:spcPts val="400"/>
+              </a:spcAft>
+            </a:pPr>
+            <a:r>
+              <a:rPr sz="1000" b="1">
+                <a:solidFill>
+                  <a:srgbClr val="3A86FF"/>
                 </a:solidFill>
                 <a:latin typeface="Calibri"/>
               </a:rPr>
-              <a:t>5. Live Demo: Next.js Clinical UI</a:t>
+              <a:t>SLIDE 05  /  LESSONS</a:t>
             </a:r>
           </a:p>
         </p:txBody>
@@ -6804,8 +9320,8 @@
         </p:nvSpPr>
         <p:spPr>
           <a:xfrm>
-            <a:off x="457200" y="1051560"/>
-            <a:ext cx="10972800" cy="365760"/>
+            <a:off x="640080" y="713232"/>
+            <a:ext cx="10972800" cy="502920"/>
           </a:xfrm>
           <a:prstGeom prst="rect">
             <a:avLst/>
@@ -6818,14 +9334,19 @@
           </a:bodyPr>
           <a:lstStyle/>
           <a:p>
-            <a:r>
-              <a:rPr sz="1400" b="0">
-                <a:solidFill>
-                  <a:srgbClr val="6B7280"/>
+            <a:pPr>
+              <a:spcAft>
+                <a:spcPts val="400"/>
+              </a:spcAft>
+            </a:pPr>
+            <a:r>
+              <a:rPr sz="2800" b="1">
+                <a:solidFill>
+                  <a:srgbClr val="0A2A4F"/>
                 </a:solidFill>
                 <a:latin typeface="Calibri"/>
               </a:rPr>
-              <a:t>Grounded evidence the proposal asked for</a:t>
+              <a:t>What didn't work, and what we changed</a:t>
             </a:r>
           </a:p>
         </p:txBody>
@@ -6838,8 +9359,8 @@
         </p:nvSpPr>
         <p:spPr>
           <a:xfrm>
-            <a:off x="457200" y="1554480"/>
-            <a:ext cx="5943600" cy="4754880"/>
+            <a:off x="640080" y="1207008"/>
+            <a:ext cx="10972800" cy="365760"/>
           </a:xfrm>
           <a:prstGeom prst="rect">
             <a:avLst/>
@@ -6854,149 +9375,37 @@
           <a:p>
             <a:pPr>
               <a:spcAft>
-                <a:spcPts val="600"/>
-              </a:spcAft>
-            </a:pPr>
-            <a:r>
-              <a:rPr sz="1300">
-                <a:solidFill>
-                  <a:srgbClr val="1F2A3D"/>
+                <a:spcPts val="400"/>
+              </a:spcAft>
+            </a:pPr>
+            <a:r>
+              <a:rPr sz="1400" b="0">
+                <a:solidFill>
+                  <a:srgbClr val="6B7280"/>
                 </a:solidFill>
                 <a:latin typeface="Calibri"/>
               </a:rPr>
-              <a:t>  Next.js 14 web app talks to FastAPI inference service over REST.</a:t>
-            </a:r>
-          </a:p>
-          <a:p>
-            <a:pPr>
-              <a:spcAft>
-                <a:spcPts val="600"/>
-              </a:spcAft>
-            </a:pPr>
-            <a:r>
-              <a:rPr sz="1300">
-                <a:solidFill>
-                  <a:srgbClr val="1F2A3D"/>
-                </a:solidFill>
-                <a:latin typeface="Calibri"/>
-              </a:rPr>
-              <a:t>  Symptom picker with autocomplete and 6 clinical presets.</a:t>
-            </a:r>
-          </a:p>
-          <a:p>
-            <a:pPr>
-              <a:spcAft>
-                <a:spcPts val="600"/>
-              </a:spcAft>
-            </a:pPr>
-            <a:r>
-              <a:rPr sz="1300">
-                <a:solidFill>
-                  <a:srgbClr val="1F2A3D"/>
-                </a:solidFill>
-                <a:latin typeface="Calibri"/>
-              </a:rPr>
-              <a:t>  Per-diagnosis card has 4 sections: symptom-disease link, statistical prior, evidence quality, what is missing.</a:t>
-            </a:r>
-          </a:p>
-          <a:p>
-            <a:pPr>
-              <a:spcAft>
-                <a:spcPts val="600"/>
-              </a:spcAft>
-            </a:pPr>
-            <a:r>
-              <a:rPr sz="1300">
-                <a:solidFill>
-                  <a:srgbClr val="1F2A3D"/>
-                </a:solidFill>
-                <a:latin typeface="Calibri"/>
-              </a:rPr>
-              <a:t>  Evidence cards show the highlighted sentence (yellow) that actually mentions the symptom or disease.</a:t>
-            </a:r>
-          </a:p>
-          <a:p>
-            <a:pPr>
-              <a:spcAft>
-                <a:spcPts val="600"/>
-              </a:spcAft>
-            </a:pPr>
-            <a:r>
-              <a:rPr sz="1300">
-                <a:solidFill>
-                  <a:srgbClr val="1F2A3D"/>
-                </a:solidFill>
-                <a:latin typeface="Calibri"/>
-              </a:rPr>
-              <a:t>  Source authority badges (NIH NHLBI = tier 1, etc.) and passage-type chips (symptoms, diagnosis, treatment).</a:t>
-            </a:r>
-          </a:p>
-          <a:p>
-            <a:pPr>
-              <a:spcAft>
-                <a:spcPts val="600"/>
-              </a:spcAft>
-            </a:pPr>
-            <a:r>
-              <a:rPr sz="1300">
-                <a:solidFill>
-                  <a:srgbClr val="1F2A3D"/>
-                </a:solidFill>
-                <a:latin typeface="Calibri"/>
-              </a:rPr>
-              <a:t>  Live alpha slider, mode and backend toggles, source and passage-type filters.</a:t>
-            </a:r>
-          </a:p>
-          <a:p>
-            <a:pPr>
-              <a:spcAft>
-                <a:spcPts val="600"/>
-              </a:spcAft>
-            </a:pPr>
-            <a:r>
-              <a:rPr sz="1300">
-                <a:solidFill>
-                  <a:srgbClr val="1F2A3D"/>
-                </a:solidFill>
-                <a:latin typeface="Calibri"/>
-              </a:rPr>
-              <a:t>  OpenAI explainer toggle (optional, with template fallback).</a:t>
-            </a:r>
-          </a:p>
-          <a:p>
-            <a:pPr>
-              <a:spcAft>
-                <a:spcPts val="600"/>
-              </a:spcAft>
-            </a:pPr>
-            <a:r>
-              <a:rPr sz="1300">
-                <a:solidFill>
-                  <a:srgbClr val="1F2A3D"/>
-                </a:solidFill>
-                <a:latin typeface="Calibri"/>
-              </a:rPr>
-              <a:t>  Latency strip after every query: total + per-stage breakdown.</a:t>
-            </a:r>
-          </a:p>
-        </p:txBody>
-      </p:sp>
-      <p:sp>
-        <p:nvSpPr>
-          <p:cNvPr id="6" name="Rounded Rectangle 5"/>
+              <a:t>Three real bugs caught during development, all regression-tested</a:t>
+            </a:r>
+          </a:p>
+        </p:txBody>
+      </p:sp>
+      <p:sp>
+        <p:nvSpPr>
+          <p:cNvPr id="6" name="Rectangle 5"/>
           <p:cNvSpPr/>
           <p:nvPr/>
         </p:nvSpPr>
         <p:spPr>
           <a:xfrm>
-            <a:off x="6858000" y="1554480"/>
-            <a:ext cx="4937760" cy="4572000"/>
-          </a:xfrm>
-          <a:prstGeom prst="roundRect">
+            <a:off x="457200" y="1627632"/>
+            <a:ext cx="11338560" cy="13716"/>
+          </a:xfrm>
+          <a:prstGeom prst="rect">
             <a:avLst/>
           </a:prstGeom>
           <a:solidFill>
-            <a:srgbClr val="0D3B66"/>
+            <a:srgbClr val="E5ECF5"/>
           </a:solidFill>
           <a:ln>
             <a:noFill/>
@@ -7026,14 +9435,104 @@
       </p:sp>
       <p:sp>
         <p:nvSpPr>
-          <p:cNvPr id="7" name="TextBox 6"/>
+          <p:cNvPr id="7" name="Rounded Rectangle 6"/>
+          <p:cNvSpPr/>
+          <p:nvPr/>
+        </p:nvSpPr>
+        <p:spPr>
+          <a:xfrm>
+            <a:off x="457200" y="1874519"/>
+            <a:ext cx="3657600" cy="4160520"/>
+          </a:xfrm>
+          <a:prstGeom prst="roundRect">
+            <a:avLst>
+              <a:gd name="adj" fmla="val 8000"/>
+            </a:avLst>
+          </a:prstGeom>
+          <a:solidFill>
+            <a:srgbClr val="FFFFFF"/>
+          </a:solidFill>
+          <a:ln w="19050">
+            <a:solidFill>
+              <a:srgbClr val="EF476F"/>
+            </a:solidFill>
+          </a:ln>
+        </p:spPr>
+        <p:style>
+          <a:lnRef idx="1">
+            <a:schemeClr val="accent1"/>
+          </a:lnRef>
+          <a:fillRef idx="3">
+            <a:schemeClr val="accent1"/>
+          </a:fillRef>
+          <a:effectRef idx="2">
+            <a:schemeClr val="accent1"/>
+          </a:effectRef>
+          <a:fontRef idx="minor">
+            <a:schemeClr val="lt1"/>
+          </a:fontRef>
+        </p:style>
+        <p:txBody>
+          <a:bodyPr rtlCol="0" anchor="ctr"/>
+          <a:lstStyle/>
+          <a:p>
+            <a:pPr algn="ctr"/>
+          </a:p>
+        </p:txBody>
+      </p:sp>
+      <p:sp>
+        <p:nvSpPr>
+          <p:cNvPr id="8" name="Rectangle 7"/>
+          <p:cNvSpPr/>
+          <p:nvPr/>
+        </p:nvSpPr>
+        <p:spPr>
+          <a:xfrm>
+            <a:off x="457200" y="1874519"/>
+            <a:ext cx="3657600" cy="594360"/>
+          </a:xfrm>
+          <a:prstGeom prst="rect">
+            <a:avLst/>
+          </a:prstGeom>
+          <a:solidFill>
+            <a:srgbClr val="EF476F"/>
+          </a:solidFill>
+          <a:ln>
+            <a:noFill/>
+          </a:ln>
+        </p:spPr>
+        <p:style>
+          <a:lnRef idx="1">
+            <a:schemeClr val="accent1"/>
+          </a:lnRef>
+          <a:fillRef idx="3">
+            <a:schemeClr val="accent1"/>
+          </a:fillRef>
+          <a:effectRef idx="2">
+            <a:schemeClr val="accent1"/>
+          </a:effectRef>
+          <a:fontRef idx="minor">
+            <a:schemeClr val="lt1"/>
+          </a:fontRef>
+        </p:style>
+        <p:txBody>
+          <a:bodyPr rtlCol="0" anchor="ctr"/>
+          <a:lstStyle/>
+          <a:p>
+            <a:pPr algn="ctr"/>
+          </a:p>
+        </p:txBody>
+      </p:sp>
+      <p:sp>
+        <p:nvSpPr>
+          <p:cNvPr id="9" name="TextBox 8"/>
           <p:cNvSpPr txBox="1"/>
           <p:nvPr/>
         </p:nvSpPr>
         <p:spPr>
           <a:xfrm>
-            <a:off x="7040880" y="1691640"/>
-            <a:ext cx="4572000" cy="365760"/>
+            <a:off x="685800" y="1993391"/>
+            <a:ext cx="3200400" cy="365760"/>
           </a:xfrm>
           <a:prstGeom prst="rect">
             <a:avLst/>
@@ -7046,28 +9545,33 @@
           </a:bodyPr>
           <a:lstStyle/>
           <a:p>
-            <a:r>
-              <a:rPr sz="1600" b="1">
+            <a:pPr>
+              <a:spcAft>
+                <a:spcPts val="400"/>
+              </a:spcAft>
+            </a:pPr>
+            <a:r>
+              <a:rPr sz="1400" b="1">
                 <a:solidFill>
                   <a:srgbClr val="FFFFFF"/>
                 </a:solidFill>
                 <a:latin typeface="Calibri"/>
               </a:rPr>
-              <a:t>Demo flow</a:t>
-            </a:r>
-          </a:p>
-        </p:txBody>
-      </p:sp>
-      <p:sp>
-        <p:nvSpPr>
-          <p:cNvPr id="8" name="TextBox 7"/>
+              <a:t>#1  min_support = 0.01</a:t>
+            </a:r>
+          </a:p>
+        </p:txBody>
+      </p:sp>
+      <p:sp>
+        <p:nvSpPr>
+          <p:cNvPr id="10" name="TextBox 9"/>
           <p:cNvSpPr txBox="1"/>
           <p:nvPr/>
         </p:nvSpPr>
         <p:spPr>
           <a:xfrm>
-            <a:off x="7040880" y="2103120"/>
-            <a:ext cx="4572000" cy="3840480"/>
+            <a:off x="685800" y="2651759"/>
+            <a:ext cx="3200400" cy="3246120"/>
           </a:xfrm>
           <a:prstGeom prst="rect">
             <a:avLst/>
@@ -7082,127 +9586,122 @@
           <a:p>
             <a:pPr>
               <a:spcAft>
-                <a:spcPts val="600"/>
-              </a:spcAft>
-            </a:pPr>
-            <a:r>
-              <a:rPr sz="1300">
-                <a:solidFill>
-                  <a:srgbClr val="E2E8F0"/>
+                <a:spcPts val="400"/>
+              </a:spcAft>
+            </a:pPr>
+            <a:r>
+              <a:rPr sz="1200" b="0">
+                <a:solidFill>
+                  <a:srgbClr val="1A2333"/>
                 </a:solidFill>
                 <a:latin typeface="Calibri"/>
               </a:rPr>
-              <a:t>  1. Pick the Cardiac event preset.</a:t>
-            </a:r>
-          </a:p>
-          <a:p>
-            <a:pPr>
-              <a:spcAft>
-                <a:spcPts val="600"/>
-              </a:spcAft>
-            </a:pPr>
-            <a:r>
-              <a:rPr sz="1300">
-                <a:solidFill>
-                  <a:srgbClr val="E2E8F0"/>
-                </a:solidFill>
-                <a:latin typeface="Calibri"/>
-              </a:rPr>
-              <a:t>  2. heart_attack ranks first (mining 1.00, fused 0.83).</a:t>
-            </a:r>
-          </a:p>
-          <a:p>
-            <a:pPr>
-              <a:spcAft>
-                <a:spcPts val="600"/>
-              </a:spcAft>
-            </a:pPr>
-            <a:r>
-              <a:rPr sz="1300">
-                <a:solidFill>
-                  <a:srgbClr val="E2E8F0"/>
-                </a:solidFill>
-                <a:latin typeface="Calibri"/>
-              </a:rPr>
-              <a:t>  3. Read the clinical card: link, prior, evidence, what is missing.</a:t>
-            </a:r>
-          </a:p>
-          <a:p>
-            <a:pPr>
-              <a:spcAft>
-                <a:spcPts val="600"/>
-              </a:spcAft>
-            </a:pPr>
-            <a:r>
-              <a:rPr sz="1300">
-                <a:solidFill>
-                  <a:srgbClr val="E2E8F0"/>
-                </a:solidFill>
-                <a:latin typeface="Calibri"/>
-              </a:rPr>
-              <a:t>  4. Inspect highlighted MedQuAD sentence with NIH NHLBI badge.</a:t>
-            </a:r>
-          </a:p>
-          <a:p>
-            <a:pPr>
-              <a:spcAft>
-                <a:spcPts val="600"/>
-              </a:spcAft>
-            </a:pPr>
-            <a:r>
-              <a:rPr sz="1300">
-                <a:solidFill>
-                  <a:srgbClr val="E2E8F0"/>
-                </a:solidFill>
-                <a:latin typeface="Calibri"/>
-              </a:rPr>
-              <a:t>  5. Filter to source = MedlinePlus to see only those passages.</a:t>
-            </a:r>
-          </a:p>
-          <a:p>
-            <a:pPr>
-              <a:spcAft>
-                <a:spcPts val="600"/>
-              </a:spcAft>
-            </a:pPr>
-            <a:r>
-              <a:rPr sz="1300">
-                <a:solidFill>
-                  <a:srgbClr val="E2E8F0"/>
-                </a:solidFill>
-                <a:latin typeface="Calibri"/>
-              </a:rPr>
-              <a:t>  6. Toggle to OpenAI explainer for richer prose, same citations.</a:t>
-            </a:r>
-          </a:p>
-          <a:p>
-            <a:pPr>
-              <a:spcAft>
-                <a:spcPts val="600"/>
-              </a:spcAft>
-            </a:pPr>
-            <a:r>
-              <a:rPr sz="1300">
-                <a:solidFill>
-                  <a:srgbClr val="E2E8F0"/>
-                </a:solidFill>
-                <a:latin typeface="Calibri"/>
-              </a:rPr>
-              <a:t>  7. Drag the alpha slider; rankings re-fuse live.</a:t>
-            </a:r>
-          </a:p>
-        </p:txBody>
-      </p:sp>
-      <p:sp>
-        <p:nvSpPr>
-          <p:cNvPr id="9" name="TextBox 8"/>
+              <a:t>Check-in 3 used 0.01. 21 of 41 diseases had no rules, so fusion was useless for those classes.
+Fix: dropped to 0.005. 100% disease coverage. The overlap weighting in MiningScorer.score neutralises the noisier rule list.</a:t>
+            </a:r>
+          </a:p>
+        </p:txBody>
+      </p:sp>
+      <p:sp>
+        <p:nvSpPr>
+          <p:cNvPr id="11" name="Rounded Rectangle 10"/>
+          <p:cNvSpPr/>
+          <p:nvPr/>
+        </p:nvSpPr>
+        <p:spPr>
+          <a:xfrm>
+            <a:off x="4251960" y="1874519"/>
+            <a:ext cx="3657600" cy="4160520"/>
+          </a:xfrm>
+          <a:prstGeom prst="roundRect">
+            <a:avLst>
+              <a:gd name="adj" fmla="val 8000"/>
+            </a:avLst>
+          </a:prstGeom>
+          <a:solidFill>
+            <a:srgbClr val="FFFFFF"/>
+          </a:solidFill>
+          <a:ln w="19050">
+            <a:solidFill>
+              <a:srgbClr val="F59E0B"/>
+            </a:solidFill>
+          </a:ln>
+        </p:spPr>
+        <p:style>
+          <a:lnRef idx="1">
+            <a:schemeClr val="accent1"/>
+          </a:lnRef>
+          <a:fillRef idx="3">
+            <a:schemeClr val="accent1"/>
+          </a:fillRef>
+          <a:effectRef idx="2">
+            <a:schemeClr val="accent1"/>
+          </a:effectRef>
+          <a:fontRef idx="minor">
+            <a:schemeClr val="lt1"/>
+          </a:fontRef>
+        </p:style>
+        <p:txBody>
+          <a:bodyPr rtlCol="0" anchor="ctr"/>
+          <a:lstStyle/>
+          <a:p>
+            <a:pPr algn="ctr"/>
+          </a:p>
+        </p:txBody>
+      </p:sp>
+      <p:sp>
+        <p:nvSpPr>
+          <p:cNvPr id="12" name="Rectangle 11"/>
+          <p:cNvSpPr/>
+          <p:nvPr/>
+        </p:nvSpPr>
+        <p:spPr>
+          <a:xfrm>
+            <a:off x="4251960" y="1874519"/>
+            <a:ext cx="3657600" cy="594360"/>
+          </a:xfrm>
+          <a:prstGeom prst="rect">
+            <a:avLst/>
+          </a:prstGeom>
+          <a:solidFill>
+            <a:srgbClr val="F59E0B"/>
+          </a:solidFill>
+          <a:ln>
+            <a:noFill/>
+          </a:ln>
+        </p:spPr>
+        <p:style>
+          <a:lnRef idx="1">
+            <a:schemeClr val="accent1"/>
+          </a:lnRef>
+          <a:fillRef idx="3">
+            <a:schemeClr val="accent1"/>
+          </a:fillRef>
+          <a:effectRef idx="2">
+            <a:schemeClr val="accent1"/>
+          </a:effectRef>
+          <a:fontRef idx="minor">
+            <a:schemeClr val="lt1"/>
+          </a:fontRef>
+        </p:style>
+        <p:txBody>
+          <a:bodyPr rtlCol="0" anchor="ctr"/>
+          <a:lstStyle/>
+          <a:p>
+            <a:pPr algn="ctr"/>
+          </a:p>
+        </p:txBody>
+      </p:sp>
+      <p:sp>
+        <p:nvSpPr>
+          <p:cNvPr id="13" name="TextBox 12"/>
           <p:cNvSpPr txBox="1"/>
           <p:nvPr/>
         </p:nvSpPr>
         <p:spPr>
           <a:xfrm>
-            <a:off x="365760" y="6492240"/>
-            <a:ext cx="10058400" cy="274320"/>
+            <a:off x="4480560" y="1993391"/>
+            <a:ext cx="3200400" cy="365760"/>
           </a:xfrm>
           <a:prstGeom prst="rect">
             <a:avLst/>
@@ -7215,6 +9714,304 @@
           </a:bodyPr>
           <a:lstStyle/>
           <a:p>
+            <a:pPr>
+              <a:spcAft>
+                <a:spcPts val="400"/>
+              </a:spcAft>
+            </a:pPr>
+            <a:r>
+              <a:rPr sz="1400" b="1">
+                <a:solidFill>
+                  <a:srgbClr val="FFFFFF"/>
+                </a:solidFill>
+                <a:latin typeface="Calibri"/>
+              </a:rPr>
+              <a:t>#2  Passage-text attribution</a:t>
+            </a:r>
+          </a:p>
+        </p:txBody>
+      </p:sp>
+      <p:sp>
+        <p:nvSpPr>
+          <p:cNvPr id="14" name="TextBox 13"/>
+          <p:cNvSpPr txBox="1"/>
+          <p:nvPr/>
+        </p:nvSpPr>
+        <p:spPr>
+          <a:xfrm>
+            <a:off x="4480560" y="2651759"/>
+            <a:ext cx="3200400" cy="3246120"/>
+          </a:xfrm>
+          <a:prstGeom prst="rect">
+            <a:avLst/>
+          </a:prstGeom>
+          <a:noFill/>
+        </p:spPr>
+        <p:txBody>
+          <a:bodyPr wrap="square">
+            <a:spAutoFit/>
+          </a:bodyPr>
+          <a:lstStyle/>
+          <a:p>
+            <a:pPr>
+              <a:spcAft>
+                <a:spcPts val="400"/>
+              </a:spcAft>
+            </a:pPr>
+            <a:r>
+              <a:rPr sz="1200" b="0">
+                <a:solidFill>
+                  <a:srgbClr val="1A2333"/>
+                </a:solidFill>
+                <a:latin typeface="Calibri"/>
+              </a:rPr>
+              <a:t>We matched a passage to a disease using its question AND answer body. Every "What is Chest Pain?" article got attributed to every cardiopulmonary disease.
+Fix: focus first, question second, never the answer body.</a:t>
+            </a:r>
+          </a:p>
+        </p:txBody>
+      </p:sp>
+      <p:sp>
+        <p:nvSpPr>
+          <p:cNvPr id="15" name="Rounded Rectangle 14"/>
+          <p:cNvSpPr/>
+          <p:nvPr/>
+        </p:nvSpPr>
+        <p:spPr>
+          <a:xfrm>
+            <a:off x="8046720" y="1874519"/>
+            <a:ext cx="3657600" cy="4160520"/>
+          </a:xfrm>
+          <a:prstGeom prst="roundRect">
+            <a:avLst>
+              <a:gd name="adj" fmla="val 8000"/>
+            </a:avLst>
+          </a:prstGeom>
+          <a:solidFill>
+            <a:srgbClr val="FFFFFF"/>
+          </a:solidFill>
+          <a:ln w="19050">
+            <a:solidFill>
+              <a:srgbClr val="7C3AED"/>
+            </a:solidFill>
+          </a:ln>
+        </p:spPr>
+        <p:style>
+          <a:lnRef idx="1">
+            <a:schemeClr val="accent1"/>
+          </a:lnRef>
+          <a:fillRef idx="3">
+            <a:schemeClr val="accent1"/>
+          </a:fillRef>
+          <a:effectRef idx="2">
+            <a:schemeClr val="accent1"/>
+          </a:effectRef>
+          <a:fontRef idx="minor">
+            <a:schemeClr val="lt1"/>
+          </a:fontRef>
+        </p:style>
+        <p:txBody>
+          <a:bodyPr rtlCol="0" anchor="ctr"/>
+          <a:lstStyle/>
+          <a:p>
+            <a:pPr algn="ctr"/>
+          </a:p>
+        </p:txBody>
+      </p:sp>
+      <p:sp>
+        <p:nvSpPr>
+          <p:cNvPr id="16" name="Rectangle 15"/>
+          <p:cNvSpPr/>
+          <p:nvPr/>
+        </p:nvSpPr>
+        <p:spPr>
+          <a:xfrm>
+            <a:off x="8046720" y="1874519"/>
+            <a:ext cx="3657600" cy="594360"/>
+          </a:xfrm>
+          <a:prstGeom prst="rect">
+            <a:avLst/>
+          </a:prstGeom>
+          <a:solidFill>
+            <a:srgbClr val="7C3AED"/>
+          </a:solidFill>
+          <a:ln>
+            <a:noFill/>
+          </a:ln>
+        </p:spPr>
+        <p:style>
+          <a:lnRef idx="1">
+            <a:schemeClr val="accent1"/>
+          </a:lnRef>
+          <a:fillRef idx="3">
+            <a:schemeClr val="accent1"/>
+          </a:fillRef>
+          <a:effectRef idx="2">
+            <a:schemeClr val="accent1"/>
+          </a:effectRef>
+          <a:fontRef idx="minor">
+            <a:schemeClr val="lt1"/>
+          </a:fontRef>
+        </p:style>
+        <p:txBody>
+          <a:bodyPr rtlCol="0" anchor="ctr"/>
+          <a:lstStyle/>
+          <a:p>
+            <a:pPr algn="ctr"/>
+          </a:p>
+        </p:txBody>
+      </p:sp>
+      <p:sp>
+        <p:nvSpPr>
+          <p:cNvPr id="17" name="TextBox 16"/>
+          <p:cNvSpPr txBox="1"/>
+          <p:nvPr/>
+        </p:nvSpPr>
+        <p:spPr>
+          <a:xfrm>
+            <a:off x="8275320" y="1993391"/>
+            <a:ext cx="3200400" cy="365760"/>
+          </a:xfrm>
+          <a:prstGeom prst="rect">
+            <a:avLst/>
+          </a:prstGeom>
+          <a:noFill/>
+        </p:spPr>
+        <p:txBody>
+          <a:bodyPr wrap="square">
+            <a:spAutoFit/>
+          </a:bodyPr>
+          <a:lstStyle/>
+          <a:p>
+            <a:pPr>
+              <a:spcAft>
+                <a:spcPts val="400"/>
+              </a:spcAft>
+            </a:pPr>
+            <a:r>
+              <a:rPr sz="1400" b="1">
+                <a:solidFill>
+                  <a:srgbClr val="FFFFFF"/>
+                </a:solidFill>
+                <a:latin typeface="Calibri"/>
+              </a:rPr>
+              <a:t>#3  hav matched have</a:t>
+            </a:r>
+          </a:p>
+        </p:txBody>
+      </p:sp>
+      <p:sp>
+        <p:nvSpPr>
+          <p:cNvPr id="18" name="TextBox 17"/>
+          <p:cNvSpPr txBox="1"/>
+          <p:nvPr/>
+        </p:nvSpPr>
+        <p:spPr>
+          <a:xfrm>
+            <a:off x="8275320" y="2651759"/>
+            <a:ext cx="3200400" cy="3246120"/>
+          </a:xfrm>
+          <a:prstGeom prst="rect">
+            <a:avLst/>
+          </a:prstGeom>
+          <a:noFill/>
+        </p:spPr>
+        <p:txBody>
+          <a:bodyPr wrap="square">
+            <a:spAutoFit/>
+          </a:bodyPr>
+          <a:lstStyle/>
+          <a:p>
+            <a:pPr>
+              <a:spcAft>
+                <a:spcPts val="400"/>
+              </a:spcAft>
+            </a:pPr>
+            <a:r>
+              <a:rPr sz="1200" b="0">
+                <a:solidFill>
+                  <a:srgbClr val="1A2333"/>
+                </a:solidFill>
+                <a:latin typeface="Calibri"/>
+              </a:rPr>
+              <a:t>Disease keyword index had "hav" (Hepatitis A virus). Substring matching pulled it out of the word "have", which is in basically every passage.
+Fix: word-boundary regex for single-token keywords. Multi-word phrases stay substring. Regression test in test_disease_keywords.py.</a:t>
+            </a:r>
+          </a:p>
+        </p:txBody>
+      </p:sp>
+      <p:sp>
+        <p:nvSpPr>
+          <p:cNvPr id="19" name="Rounded Rectangle 18"/>
+          <p:cNvSpPr/>
+          <p:nvPr/>
+        </p:nvSpPr>
+        <p:spPr>
+          <a:xfrm>
+            <a:off x="457200" y="6172200"/>
+            <a:ext cx="11338560" cy="365760"/>
+          </a:xfrm>
+          <a:prstGeom prst="roundRect">
+            <a:avLst>
+              <a:gd name="adj" fmla="val 8000"/>
+            </a:avLst>
+          </a:prstGeom>
+          <a:solidFill>
+            <a:srgbClr val="E5ECF5"/>
+          </a:solidFill>
+          <a:ln>
+            <a:noFill/>
+          </a:ln>
+        </p:spPr>
+        <p:style>
+          <a:lnRef idx="1">
+            <a:schemeClr val="accent1"/>
+          </a:lnRef>
+          <a:fillRef idx="3">
+            <a:schemeClr val="accent1"/>
+          </a:fillRef>
+          <a:effectRef idx="2">
+            <a:schemeClr val="accent1"/>
+          </a:effectRef>
+          <a:fontRef idx="minor">
+            <a:schemeClr val="lt1"/>
+          </a:fontRef>
+        </p:style>
+        <p:txBody>
+          <a:bodyPr rtlCol="0" anchor="ctr"/>
+          <a:lstStyle/>
+          <a:p>
+            <a:pPr algn="ctr"/>
+          </a:p>
+        </p:txBody>
+      </p:sp>
+      <p:sp>
+        <p:nvSpPr>
+          <p:cNvPr id="20" name="TextBox 19"/>
+          <p:cNvSpPr txBox="1"/>
+          <p:nvPr/>
+        </p:nvSpPr>
+        <p:spPr>
+          <a:xfrm>
+            <a:off x="640080" y="6217920"/>
+            <a:ext cx="10972800" cy="274320"/>
+          </a:xfrm>
+          <a:prstGeom prst="rect">
+            <a:avLst/>
+          </a:prstGeom>
+          <a:noFill/>
+        </p:spPr>
+        <p:txBody>
+          <a:bodyPr wrap="square">
+            <a:spAutoFit/>
+          </a:bodyPr>
+          <a:lstStyle/>
+          <a:p>
+            <a:pPr algn="ctr">
+              <a:spcAft>
+                <a:spcPts val="400"/>
+              </a:spcAft>
+            </a:pPr>
             <a:r>
               <a:rPr sz="1000" b="0">
                 <a:solidFill>
@@ -7222,7 +10019,128 @@
                 </a:solidFill>
                 <a:latin typeface="Calibri"/>
               </a:rPr>
-              <a:t>CMPE 255 Spring 2026, Sakshat Patil, Vineet Kumar, Aishwarya Madhave, Slide 5 of 7</a:t>
+              <a:t>Also tried and dropped: always-on cross-encoder (+100 ms for marginal gain), Cohere reranker by default (403 on free Pinecone tier).</a:t>
+            </a:r>
+          </a:p>
+        </p:txBody>
+      </p:sp>
+      <p:sp>
+        <p:nvSpPr>
+          <p:cNvPr id="21" name="Rectangle 20"/>
+          <p:cNvSpPr/>
+          <p:nvPr/>
+        </p:nvSpPr>
+        <p:spPr>
+          <a:xfrm>
+            <a:off x="457200" y="6473952"/>
+            <a:ext cx="11338560" cy="13716"/>
+          </a:xfrm>
+          <a:prstGeom prst="rect">
+            <a:avLst/>
+          </a:prstGeom>
+          <a:solidFill>
+            <a:srgbClr val="E5ECF5"/>
+          </a:solidFill>
+          <a:ln>
+            <a:noFill/>
+          </a:ln>
+        </p:spPr>
+        <p:style>
+          <a:lnRef idx="1">
+            <a:schemeClr val="accent1"/>
+          </a:lnRef>
+          <a:fillRef idx="3">
+            <a:schemeClr val="accent1"/>
+          </a:fillRef>
+          <a:effectRef idx="2">
+            <a:schemeClr val="accent1"/>
+          </a:effectRef>
+          <a:fontRef idx="minor">
+            <a:schemeClr val="lt1"/>
+          </a:fontRef>
+        </p:style>
+        <p:txBody>
+          <a:bodyPr rtlCol="0" anchor="ctr"/>
+          <a:lstStyle/>
+          <a:p>
+            <a:pPr algn="ctr"/>
+          </a:p>
+        </p:txBody>
+      </p:sp>
+      <p:sp>
+        <p:nvSpPr>
+          <p:cNvPr id="22" name="TextBox 21"/>
+          <p:cNvSpPr txBox="1"/>
+          <p:nvPr/>
+        </p:nvSpPr>
+        <p:spPr>
+          <a:xfrm>
+            <a:off x="457200" y="6528816"/>
+            <a:ext cx="6400800" cy="274320"/>
+          </a:xfrm>
+          <a:prstGeom prst="rect">
+            <a:avLst/>
+          </a:prstGeom>
+          <a:noFill/>
+        </p:spPr>
+        <p:txBody>
+          <a:bodyPr wrap="square">
+            <a:spAutoFit/>
+          </a:bodyPr>
+          <a:lstStyle/>
+          <a:p>
+            <a:pPr>
+              <a:spcAft>
+                <a:spcPts val="400"/>
+              </a:spcAft>
+            </a:pPr>
+            <a:r>
+              <a:rPr sz="900" b="0">
+                <a:solidFill>
+                  <a:srgbClr val="6B7280"/>
+                </a:solidFill>
+                <a:latin typeface="Calibri"/>
+              </a:rPr>
+              <a:t>CMPE 255 Spring 2026  |  Patil, Kumar, Madhave</a:t>
+            </a:r>
+          </a:p>
+        </p:txBody>
+      </p:sp>
+      <p:sp>
+        <p:nvSpPr>
+          <p:cNvPr id="23" name="TextBox 22"/>
+          <p:cNvSpPr txBox="1"/>
+          <p:nvPr/>
+        </p:nvSpPr>
+        <p:spPr>
+          <a:xfrm>
+            <a:off x="7772400" y="6528816"/>
+            <a:ext cx="4023360" cy="274320"/>
+          </a:xfrm>
+          <a:prstGeom prst="rect">
+            <a:avLst/>
+          </a:prstGeom>
+          <a:noFill/>
+        </p:spPr>
+        <p:txBody>
+          <a:bodyPr wrap="square">
+            <a:spAutoFit/>
+          </a:bodyPr>
+          <a:lstStyle/>
+          <a:p>
+            <a:pPr algn="r">
+              <a:spcAft>
+                <a:spcPts val="400"/>
+              </a:spcAft>
+            </a:pPr>
+            <a:r>
+              <a:rPr sz="900" b="0">
+                <a:solidFill>
+                  <a:srgbClr val="6B7280"/>
+                </a:solidFill>
+                <a:latin typeface="Calibri"/>
+              </a:rPr>
+              <a:t>5 / 7</a:t>
             </a:r>
           </a:p>
         </p:txBody>
@@ -7253,14 +10171,14 @@
         </p:nvSpPr>
         <p:spPr>
           <a:xfrm>
-            <a:off x="0" y="0"/>
-            <a:ext cx="12191695" cy="411480"/>
+            <a:off x="457200" y="457200"/>
+            <a:ext cx="73152" cy="502920"/>
           </a:xfrm>
           <a:prstGeom prst="rect">
             <a:avLst/>
           </a:prstGeom>
           <a:solidFill>
-            <a:srgbClr val="0D3B66"/>
+            <a:srgbClr val="3A86FF"/>
           </a:solidFill>
           <a:ln>
             <a:noFill/>
@@ -7296,8 +10214,8 @@
         </p:nvSpPr>
         <p:spPr>
           <a:xfrm>
-            <a:off x="457200" y="502920"/>
-            <a:ext cx="10972800" cy="640080"/>
+            <a:off x="640080" y="457200"/>
+            <a:ext cx="7315200" cy="274320"/>
           </a:xfrm>
           <a:prstGeom prst="rect">
             <a:avLst/>
@@ -7310,14 +10228,19 @@
           </a:bodyPr>
           <a:lstStyle/>
           <a:p>
-            <a:r>
-              <a:rPr sz="2600" b="1">
-                <a:solidFill>
-                  <a:srgbClr val="0D3B66"/>
+            <a:pPr>
+              <a:spcAft>
+                <a:spcPts val="400"/>
+              </a:spcAft>
+            </a:pPr>
+            <a:r>
+              <a:rPr sz="1000" b="1">
+                <a:solidFill>
+                  <a:srgbClr val="3A86FF"/>
                 </a:solidFill>
                 <a:latin typeface="Calibri"/>
               </a:rPr>
-              <a:t>6. Platform Screenshots</a:t>
+              <a:t>SLIDE 06  /  CONCLUSION</a:t>
             </a:r>
           </a:p>
         </p:txBody>
@@ -7330,8 +10253,8 @@
         </p:nvSpPr>
         <p:spPr>
           <a:xfrm>
-            <a:off x="457200" y="1051560"/>
-            <a:ext cx="10972800" cy="365760"/>
+            <a:off x="640080" y="713232"/>
+            <a:ext cx="10972800" cy="502920"/>
           </a:xfrm>
           <a:prstGeom prst="rect">
             <a:avLst/>
@@ -7344,202 +10267,39 @@
           </a:bodyPr>
           <a:lstStyle/>
           <a:p>
-            <a:r>
-              <a:rPr sz="1400" b="0">
-                <a:solidFill>
-                  <a:srgbClr val="6B7280"/>
+            <a:pPr>
+              <a:spcAft>
+                <a:spcPts val="400"/>
+              </a:spcAft>
+            </a:pPr>
+            <a:r>
+              <a:rPr sz="2800" b="1">
+                <a:solidFill>
+                  <a:srgbClr val="0A2A4F"/>
                 </a:solidFill>
                 <a:latin typeface="Calibri"/>
               </a:rPr>
-              <a:t>Real captures from the running web client</a:t>
-            </a:r>
-          </a:p>
-        </p:txBody>
-      </p:sp>
-      <p:pic>
-        <p:nvPicPr>
-          <p:cNvPr id="5" name="Picture 4" descr="02-results-cardiac.png"/>
-          <p:cNvPicPr>
-            <a:picLocks noChangeAspect="1"/>
-          </p:cNvPicPr>
-          <p:nvPr/>
-        </p:nvPicPr>
-        <p:blipFill>
-          <a:blip r:embed="rId2"/>
-          <a:stretch>
-            <a:fillRect/>
-          </a:stretch>
-        </p:blipFill>
-        <p:spPr>
-          <a:xfrm>
-            <a:off x="365760" y="1554480"/>
-            <a:ext cx="1669546" cy="4846320"/>
-          </a:xfrm>
-          <a:prstGeom prst="rect">
-            <a:avLst/>
-          </a:prstGeom>
-        </p:spPr>
-      </p:pic>
-      <p:sp>
-        <p:nvSpPr>
-          <p:cNvPr id="6" name="TextBox 5"/>
-          <p:cNvSpPr txBox="1"/>
-          <p:nvPr/>
-        </p:nvSpPr>
-        <p:spPr>
-          <a:xfrm>
-            <a:off x="365760" y="6446520"/>
-            <a:ext cx="5486400" cy="365760"/>
-          </a:xfrm>
-          <a:prstGeom prst="rect">
-            <a:avLst/>
-          </a:prstGeom>
-          <a:noFill/>
-        </p:spPr>
-        <p:txBody>
-          <a:bodyPr wrap="square">
-            <a:spAutoFit/>
-          </a:bodyPr>
-          <a:lstStyle/>
-          <a:p>
-            <a:r>
-              <a:rPr sz="1100" b="1">
-                <a:solidFill>
-                  <a:srgbClr val="0D3B66"/>
-                </a:solidFill>
-                <a:latin typeface="Calibri"/>
-              </a:rPr>
-              <a:t>Results view, Cardiac event preset.</a:t>
-            </a:r>
-          </a:p>
-        </p:txBody>
-      </p:sp>
-      <p:pic>
-        <p:nvPicPr>
-          <p:cNvPr id="7" name="Picture 6" descr="13-stage-fuse.png"/>
-          <p:cNvPicPr>
-            <a:picLocks noChangeAspect="1"/>
-          </p:cNvPicPr>
-          <p:nvPr/>
-        </p:nvPicPr>
-        <p:blipFill>
-          <a:blip r:embed="rId3"/>
-          <a:stretch>
-            <a:fillRect/>
-          </a:stretch>
-        </p:blipFill>
-        <p:spPr>
-          <a:xfrm>
-            <a:off x="6400800" y="1554480"/>
-            <a:ext cx="3323900" cy="4846320"/>
-          </a:xfrm>
-          <a:prstGeom prst="rect">
-            <a:avLst/>
-          </a:prstGeom>
-        </p:spPr>
-      </p:pic>
-      <p:sp>
-        <p:nvSpPr>
-          <p:cNvPr id="8" name="TextBox 7"/>
-          <p:cNvSpPr txBox="1"/>
-          <p:nvPr/>
-        </p:nvSpPr>
-        <p:spPr>
-          <a:xfrm>
-            <a:off x="6400800" y="6446520"/>
-            <a:ext cx="5486400" cy="365760"/>
-          </a:xfrm>
-          <a:prstGeom prst="rect">
-            <a:avLst/>
-          </a:prstGeom>
-          <a:noFill/>
-        </p:spPr>
-        <p:txBody>
-          <a:bodyPr wrap="square">
-            <a:spAutoFit/>
-          </a:bodyPr>
-          <a:lstStyle/>
-          <a:p>
-            <a:r>
-              <a:rPr sz="1100" b="1">
-                <a:solidFill>
-                  <a:srgbClr val="0D3B66"/>
-                </a:solidFill>
-                <a:latin typeface="Calibri"/>
-              </a:rPr>
-              <a:t>Hybrid fusion stage of the pipeline timeline expanded.</a:t>
-            </a:r>
-          </a:p>
-        </p:txBody>
-      </p:sp>
-      <p:sp>
-        <p:nvSpPr>
-          <p:cNvPr id="9" name="TextBox 8"/>
-          <p:cNvSpPr txBox="1"/>
-          <p:nvPr/>
-        </p:nvSpPr>
-        <p:spPr>
-          <a:xfrm>
-            <a:off x="365760" y="6492240"/>
-            <a:ext cx="10058400" cy="274320"/>
-          </a:xfrm>
-          <a:prstGeom prst="rect">
-            <a:avLst/>
-          </a:prstGeom>
-          <a:noFill/>
-        </p:spPr>
-        <p:txBody>
-          <a:bodyPr wrap="square">
-            <a:spAutoFit/>
-          </a:bodyPr>
-          <a:lstStyle/>
-          <a:p>
-            <a:r>
-              <a:rPr sz="1000" b="0">
-                <a:solidFill>
-                  <a:srgbClr val="6B7280"/>
-                </a:solidFill>
-                <a:latin typeface="Calibri"/>
-              </a:rPr>
-              <a:t>CMPE 255 Spring 2026, Sakshat Patil, Vineet Kumar, Aishwarya Madhave, Slide 6 of 7</a:t>
-            </a:r>
-          </a:p>
-        </p:txBody>
-      </p:sp>
-    </p:spTree>
-  </p:cSld>
-  <p:clrMapOvr>
-    <a:masterClrMapping/>
-  </p:clrMapOvr>
-</p:sld>
-</file>
-
-<file path=ppt/slides/slide8.xml><?xml version="1.0" encoding="utf-8"?>
-<p:sld xmlns:a="http://schemas.openxmlformats.org/drawingml/2006/main" xmlns:p="http://schemas.openxmlformats.org/presentationml/2006/main" xmlns:r="http://schemas.openxmlformats.org/officeDocument/2006/relationships">
-  <p:cSld>
-    <p:spTree>
-      <p:nvGrpSpPr>
-        <p:cNvPr id="1" name=""/>
-        <p:cNvGrpSpPr/>
-        <p:nvPr/>
-      </p:nvGrpSpPr>
-      <p:grpSpPr/>
-      <p:sp>
-        <p:nvSpPr>
-          <p:cNvPr id="2" name="Rectangle 1"/>
+              <a:t>What we shipped, and where it goes next</a:t>
+            </a:r>
+          </a:p>
+        </p:txBody>
+      </p:sp>
+      <p:sp>
+        <p:nvSpPr>
+          <p:cNvPr id="5" name="Rectangle 4"/>
           <p:cNvSpPr/>
           <p:nvPr/>
         </p:nvSpPr>
         <p:spPr>
           <a:xfrm>
-            <a:off x="0" y="0"/>
-            <a:ext cx="12191695" cy="411480"/>
+            <a:off x="457200" y="1627632"/>
+            <a:ext cx="11338560" cy="13716"/>
           </a:xfrm>
           <a:prstGeom prst="rect">
             <a:avLst/>
           </a:prstGeom>
           <a:solidFill>
-            <a:srgbClr val="0D3B66"/>
+            <a:srgbClr val="E5ECF5"/>
           </a:solidFill>
           <a:ln>
             <a:noFill/>
@@ -7569,14 +10329,14 @@
       </p:sp>
       <p:sp>
         <p:nvSpPr>
-          <p:cNvPr id="3" name="TextBox 2"/>
+          <p:cNvPr id="6" name="TextBox 5"/>
           <p:cNvSpPr txBox="1"/>
           <p:nvPr/>
         </p:nvSpPr>
         <p:spPr>
           <a:xfrm>
-            <a:off x="457200" y="502920"/>
-            <a:ext cx="10972800" cy="640080"/>
+            <a:off x="457200" y="1874519"/>
+            <a:ext cx="5486400" cy="365760"/>
           </a:xfrm>
           <a:prstGeom prst="rect">
             <a:avLst/>
@@ -7589,28 +10349,33 @@
           </a:bodyPr>
           <a:lstStyle/>
           <a:p>
-            <a:r>
-              <a:rPr sz="2600" b="1">
-                <a:solidFill>
-                  <a:srgbClr val="0D3B66"/>
+            <a:pPr>
+              <a:spcAft>
+                <a:spcPts val="400"/>
+              </a:spcAft>
+            </a:pPr>
+            <a:r>
+              <a:rPr sz="1200" b="1">
+                <a:solidFill>
+                  <a:srgbClr val="10B981"/>
                 </a:solidFill>
                 <a:latin typeface="Calibri"/>
               </a:rPr>
-              <a:t>7. Conclusion and Future Work</a:t>
-            </a:r>
-          </a:p>
-        </p:txBody>
-      </p:sp>
-      <p:sp>
-        <p:nvSpPr>
-          <p:cNvPr id="4" name="TextBox 3"/>
+              <a:t>SHIPPED</a:t>
+            </a:r>
+          </a:p>
+        </p:txBody>
+      </p:sp>
+      <p:sp>
+        <p:nvSpPr>
+          <p:cNvPr id="7" name="TextBox 6"/>
           <p:cNvSpPr txBox="1"/>
           <p:nvPr/>
         </p:nvSpPr>
         <p:spPr>
           <a:xfrm>
-            <a:off x="457200" y="1051560"/>
-            <a:ext cx="10972800" cy="365760"/>
+            <a:off x="457200" y="2240280"/>
+            <a:ext cx="5486400" cy="3657600"/>
           </a:xfrm>
           <a:prstGeom prst="rect">
             <a:avLst/>
@@ -7623,27 +10388,212 @@
           </a:bodyPr>
           <a:lstStyle/>
           <a:p>
-            <a:r>
-              <a:rPr sz="1400" b="0">
-                <a:solidFill>
-                  <a:srgbClr val="6B7280"/>
+            <a:pPr>
+              <a:spcAft>
+                <a:spcPts val="700"/>
+              </a:spcAft>
+            </a:pPr>
+            <a:r>
+              <a:rPr sz="1200"/>
+              <a:t>  </a:t>
+            </a:r>
+            <a:r>
+              <a:rPr sz="1000">
+                <a:solidFill>
+                  <a:srgbClr val="10B981"/>
+                </a:solidFill>
+              </a:rPr>
+              <a:t>■  </a:t>
+            </a:r>
+            <a:r>
+              <a:rPr sz="1200">
+                <a:solidFill>
+                  <a:srgbClr val="1A2333"/>
                 </a:solidFill>
                 <a:latin typeface="Calibri"/>
               </a:rPr>
-              <a:t>What we shipped, what is next</a:t>
-            </a:r>
-          </a:p>
-        </p:txBody>
-      </p:sp>
-      <p:sp>
-        <p:nvSpPr>
-          <p:cNvPr id="5" name="TextBox 4"/>
+              <a:t>Reproducible FP-Growth pipeline, 23,839 rules, 100% disease coverage</a:t>
+            </a:r>
+          </a:p>
+          <a:p>
+            <a:pPr>
+              <a:spcAft>
+                <a:spcPts val="700"/>
+              </a:spcAft>
+            </a:pPr>
+            <a:r>
+              <a:rPr sz="1200"/>
+              <a:t>  </a:t>
+            </a:r>
+            <a:r>
+              <a:rPr sz="1000">
+                <a:solidFill>
+                  <a:srgbClr val="10B981"/>
+                </a:solidFill>
+              </a:rPr>
+              <a:t>■  </a:t>
+            </a:r>
+            <a:r>
+              <a:rPr sz="1200">
+                <a:solidFill>
+                  <a:srgbClr val="1A2333"/>
+                </a:solidFill>
+                <a:latin typeface="Calibri"/>
+              </a:rPr>
+              <a:t>Three encoder backends: MiniLM 384d, PubMedBERT 768d, Azure 3072d</a:t>
+            </a:r>
+          </a:p>
+          <a:p>
+            <a:pPr>
+              <a:spcAft>
+                <a:spcPts val="700"/>
+              </a:spcAft>
+            </a:pPr>
+            <a:r>
+              <a:rPr sz="1200"/>
+              <a:t>  </a:t>
+            </a:r>
+            <a:r>
+              <a:rPr sz="1000">
+                <a:solidFill>
+                  <a:srgbClr val="10B981"/>
+                </a:solidFill>
+              </a:rPr>
+              <a:t>■  </a:t>
+            </a:r>
+            <a:r>
+              <a:rPr sz="1200">
+                <a:solidFill>
+                  <a:srgbClr val="1A2333"/>
+                </a:solidFill>
+                <a:latin typeface="Calibri"/>
+              </a:rPr>
+              <a:t>Pinecone Serverless production index (24,063 vectors, 3072d)</a:t>
+            </a:r>
+          </a:p>
+          <a:p>
+            <a:pPr>
+              <a:spcAft>
+                <a:spcPts val="700"/>
+              </a:spcAft>
+            </a:pPr>
+            <a:r>
+              <a:rPr sz="1200"/>
+              <a:t>  </a:t>
+            </a:r>
+            <a:r>
+              <a:rPr sz="1000">
+                <a:solidFill>
+                  <a:srgbClr val="10B981"/>
+                </a:solidFill>
+              </a:rPr>
+              <a:t>■  </a:t>
+            </a:r>
+            <a:r>
+              <a:rPr sz="1200">
+                <a:solidFill>
+                  <a:srgbClr val="1A2333"/>
+                </a:solidFill>
+                <a:latin typeface="Calibri"/>
+              </a:rPr>
+              <a:t>Claim-level evidence cards with NIH source-tier badges</a:t>
+            </a:r>
+          </a:p>
+          <a:p>
+            <a:pPr>
+              <a:spcAft>
+                <a:spcPts val="700"/>
+              </a:spcAft>
+            </a:pPr>
+            <a:r>
+              <a:rPr sz="1200"/>
+              <a:t>  </a:t>
+            </a:r>
+            <a:r>
+              <a:rPr sz="1000">
+                <a:solidFill>
+                  <a:srgbClr val="10B981"/>
+                </a:solidFill>
+              </a:rPr>
+              <a:t>■  </a:t>
+            </a:r>
+            <a:r>
+              <a:rPr sz="1200">
+                <a:solidFill>
+                  <a:srgbClr val="1A2333"/>
+                </a:solidFill>
+                <a:latin typeface="Calibri"/>
+              </a:rPr>
+              <a:t>Dual explainer: deterministic template + structured OpenAI</a:t>
+            </a:r>
+          </a:p>
+          <a:p>
+            <a:pPr>
+              <a:spcAft>
+                <a:spcPts val="700"/>
+              </a:spcAft>
+            </a:pPr>
+            <a:r>
+              <a:rPr sz="1200"/>
+              <a:t>  </a:t>
+            </a:r>
+            <a:r>
+              <a:rPr sz="1000">
+                <a:solidFill>
+                  <a:srgbClr val="10B981"/>
+                </a:solidFill>
+              </a:rPr>
+              <a:t>■  </a:t>
+            </a:r>
+            <a:r>
+              <a:rPr sz="1200">
+                <a:solidFill>
+                  <a:srgbClr val="1A2333"/>
+                </a:solidFill>
+                <a:latin typeface="Calibri"/>
+              </a:rPr>
+              <a:t>155 pytest tests passing (147 unit, 8 live integration)</a:t>
+            </a:r>
+          </a:p>
+          <a:p>
+            <a:pPr>
+              <a:spcAft>
+                <a:spcPts val="700"/>
+              </a:spcAft>
+            </a:pPr>
+            <a:r>
+              <a:rPr sz="1200"/>
+              <a:t>  </a:t>
+            </a:r>
+            <a:r>
+              <a:rPr sz="1000">
+                <a:solidFill>
+                  <a:srgbClr val="10B981"/>
+                </a:solidFill>
+              </a:rPr>
+              <a:t>■  </a:t>
+            </a:r>
+            <a:r>
+              <a:rPr sz="1200">
+                <a:solidFill>
+                  <a:srgbClr val="1A2333"/>
+                </a:solidFill>
+                <a:latin typeface="Calibri"/>
+              </a:rPr>
+              <a:t>82.5% R@1, 0.857 MRR. 12 ms p50 end-to-end on the offline path.</a:t>
+            </a:r>
+          </a:p>
+        </p:txBody>
+      </p:sp>
+      <p:sp>
+        <p:nvSpPr>
+          <p:cNvPr id="8" name="TextBox 7"/>
           <p:cNvSpPr txBox="1"/>
           <p:nvPr/>
         </p:nvSpPr>
         <p:spPr>
           <a:xfrm>
-            <a:off x="457200" y="1554480"/>
+            <a:off x="6263640" y="1874519"/>
             <a:ext cx="5486400" cy="365760"/>
           </a:xfrm>
           <a:prstGeom prst="rect">
@@ -7657,28 +10607,33 @@
           </a:bodyPr>
           <a:lstStyle/>
           <a:p>
-            <a:r>
-              <a:rPr sz="2000" b="1">
-                <a:solidFill>
-                  <a:srgbClr val="0D3B66"/>
+            <a:pPr>
+              <a:spcAft>
+                <a:spcPts val="400"/>
+              </a:spcAft>
+            </a:pPr>
+            <a:r>
+              <a:rPr sz="1200" b="1">
+                <a:solidFill>
+                  <a:srgbClr val="F59E0B"/>
                 </a:solidFill>
                 <a:latin typeface="Calibri"/>
               </a:rPr>
-              <a:t>Shipped</a:t>
-            </a:r>
-          </a:p>
-        </p:txBody>
-      </p:sp>
-      <p:sp>
-        <p:nvSpPr>
-          <p:cNvPr id="6" name="TextBox 5"/>
+              <a:t>FUTURE WORK</a:t>
+            </a:r>
+          </a:p>
+        </p:txBody>
+      </p:sp>
+      <p:sp>
+        <p:nvSpPr>
+          <p:cNvPr id="9" name="TextBox 8"/>
           <p:cNvSpPr txBox="1"/>
           <p:nvPr/>
         </p:nvSpPr>
         <p:spPr>
           <a:xfrm>
-            <a:off x="457200" y="2011680"/>
-            <a:ext cx="5486400" cy="4114800"/>
+            <a:off x="6263640" y="2240280"/>
+            <a:ext cx="5486400" cy="3657600"/>
           </a:xfrm>
           <a:prstGeom prst="rect">
             <a:avLst/>
@@ -7693,159 +10648,200 @@
           <a:p>
             <a:pPr>
               <a:spcAft>
-                <a:spcPts val="600"/>
-              </a:spcAft>
-            </a:pPr>
-            <a:r>
-              <a:rPr sz="1300">
-                <a:solidFill>
-                  <a:srgbClr val="1F2A3D"/>
+                <a:spcPts val="700"/>
+              </a:spcAft>
+            </a:pPr>
+            <a:r>
+              <a:rPr sz="1200"/>
+              <a:t>  </a:t>
+            </a:r>
+            <a:r>
+              <a:rPr sz="1000">
+                <a:solidFill>
+                  <a:srgbClr val="F59E0B"/>
+                </a:solidFill>
+              </a:rPr>
+              <a:t>■  </a:t>
+            </a:r>
+            <a:r>
+              <a:rPr sz="1200">
+                <a:solidFill>
+                  <a:srgbClr val="1A2333"/>
                 </a:solidFill>
                 <a:latin typeface="Calibri"/>
               </a:rPr>
-              <a:t>  Reproducible FP-Growth pipeline (23,839 rules, 100% disease coverage)</a:t>
+              <a:t>UMLS-backed automatic synonym mining (replace curated dict)</a:t>
             </a:r>
           </a:p>
           <a:p>
             <a:pPr>
               <a:spcAft>
-                <a:spcPts val="600"/>
-              </a:spcAft>
-            </a:pPr>
-            <a:r>
-              <a:rPr sz="1300">
-                <a:solidFill>
-                  <a:srgbClr val="1F2A3D"/>
+                <a:spcPts val="700"/>
+              </a:spcAft>
+            </a:pPr>
+            <a:r>
+              <a:rPr sz="1200"/>
+              <a:t>  </a:t>
+            </a:r>
+            <a:r>
+              <a:rPr sz="1000">
+                <a:solidFill>
+                  <a:srgbClr val="F59E0B"/>
+                </a:solidFill>
+              </a:rPr>
+              <a:t>■  </a:t>
+            </a:r>
+            <a:r>
+              <a:rPr sz="1200">
+                <a:solidFill>
+                  <a:srgbClr val="1A2333"/>
                 </a:solidFill>
                 <a:latin typeface="Calibri"/>
               </a:rPr>
-              <a:t>  Three encoders: MiniLM 384d, PubMedBERT 768d, Azure OpenAI 3072d</a:t>
+              <a:t>Cross-encoder over &lt;disease, passage&gt; pairs in the default path</a:t>
             </a:r>
           </a:p>
           <a:p>
             <a:pPr>
               <a:spcAft>
-                <a:spcPts val="600"/>
-              </a:spcAft>
-            </a:pPr>
-            <a:r>
-              <a:rPr sz="1300">
-                <a:solidFill>
-                  <a:srgbClr val="1F2A3D"/>
+                <a:spcPts val="700"/>
+              </a:spcAft>
+            </a:pPr>
+            <a:r>
+              <a:rPr sz="1200"/>
+              <a:t>  </a:t>
+            </a:r>
+            <a:r>
+              <a:rPr sz="1000">
+                <a:solidFill>
+                  <a:srgbClr val="F59E0B"/>
+                </a:solidFill>
+              </a:rPr>
+              <a:t>■  </a:t>
+            </a:r>
+            <a:r>
+              <a:rPr sz="1200">
+                <a:solidFill>
+                  <a:srgbClr val="1A2333"/>
                 </a:solidFill>
                 <a:latin typeface="Calibri"/>
               </a:rPr>
-              <a:t>  Pinecone Serverless production index (255-data-mining, 24,063 vectors)</a:t>
+              <a:t>Held-out vocabulary eval on the Synthea FHIR pipeline</a:t>
             </a:r>
           </a:p>
           <a:p>
             <a:pPr>
               <a:spcAft>
-                <a:spcPts val="600"/>
-              </a:spcAft>
-            </a:pPr>
-            <a:r>
-              <a:rPr sz="1300">
-                <a:solidFill>
-                  <a:srgbClr val="1F2A3D"/>
+                <a:spcPts val="700"/>
+              </a:spcAft>
+            </a:pPr>
+            <a:r>
+              <a:rPr sz="1200"/>
+              <a:t>  </a:t>
+            </a:r>
+            <a:r>
+              <a:rPr sz="1000">
+                <a:solidFill>
+                  <a:srgbClr val="F59E0B"/>
+                </a:solidFill>
+              </a:rPr>
+              <a:t>■  </a:t>
+            </a:r>
+            <a:r>
+              <a:rPr sz="1200">
+                <a:solidFill>
+                  <a:srgbClr val="1A2333"/>
                 </a:solidFill>
                 <a:latin typeface="Calibri"/>
               </a:rPr>
-              <a:t>  Claim-level evidence with NIH source-tier badges + specificity</a:t>
+              <a:t>Open-domain disease universe via UMLS canonicalisation</a:t>
             </a:r>
           </a:p>
           <a:p>
             <a:pPr>
               <a:spcAft>
-                <a:spcPts val="600"/>
-              </a:spcAft>
-            </a:pPr>
-            <a:r>
-              <a:rPr sz="1300">
-                <a:solidFill>
-                  <a:srgbClr val="1F2A3D"/>
+                <a:spcPts val="700"/>
+              </a:spcAft>
+            </a:pPr>
+            <a:r>
+              <a:rPr sz="1200"/>
+              <a:t>  </a:t>
+            </a:r>
+            <a:r>
+              <a:rPr sz="1000">
+                <a:solidFill>
+                  <a:srgbClr val="F59E0B"/>
+                </a:solidFill>
+              </a:rPr>
+              <a:t>■  </a:t>
+            </a:r>
+            <a:r>
+              <a:rPr sz="1200">
+                <a:solidFill>
+                  <a:srgbClr val="1A2333"/>
                 </a:solidFill>
                 <a:latin typeface="Calibri"/>
               </a:rPr>
-              <a:t>  Pinecone Cohere/BGE reranker with auto-fallback (free tier safe)</a:t>
-            </a:r>
-          </a:p>
-          <a:p>
-            <a:pPr>
-              <a:spcAft>
-                <a:spcPts val="600"/>
-              </a:spcAft>
-            </a:pPr>
-            <a:r>
-              <a:rPr sz="1300">
-                <a:solidFill>
-                  <a:srgbClr val="1F2A3D"/>
-                </a:solidFill>
-                <a:latin typeface="Calibri"/>
-              </a:rPr>
-              <a:t>  Clinical-structured explainer: deterministic template + OpenAI</a:t>
-            </a:r>
-          </a:p>
-          <a:p>
-            <a:pPr>
-              <a:spcAft>
-                <a:spcPts val="600"/>
-              </a:spcAft>
-            </a:pPr>
-            <a:r>
-              <a:rPr sz="1300">
-                <a:solidFill>
-                  <a:srgbClr val="1F2A3D"/>
-                </a:solidFill>
-                <a:latin typeface="Calibri"/>
-              </a:rPr>
-              <a:t>  Next.js 14 UI + FastAPI microservice + Python data tier</a:t>
-            </a:r>
-          </a:p>
-          <a:p>
-            <a:pPr>
-              <a:spcAft>
-                <a:spcPts val="600"/>
-              </a:spcAft>
-            </a:pPr>
-            <a:r>
-              <a:rPr sz="1300">
-                <a:solidFill>
-                  <a:srgbClr val="1F2A3D"/>
-                </a:solidFill>
-                <a:latin typeface="Calibri"/>
-              </a:rPr>
-              <a:t>  82.5% R@1, 0.857 MRR. Heart Attack fused 0.831 on Azure path.</a:t>
-            </a:r>
-          </a:p>
-          <a:p>
-            <a:pPr>
-              <a:spcAft>
-                <a:spcPts val="600"/>
-              </a:spcAft>
-            </a:pPr>
-            <a:r>
-              <a:rPr sz="1300">
-                <a:solidFill>
-                  <a:srgbClr val="1F2A3D"/>
-                </a:solidFill>
-                <a:latin typeface="Calibri"/>
-              </a:rPr>
-              <a:t>  155 pytest tests passing (147 unit, 8 live integration)</a:t>
-            </a:r>
-          </a:p>
-        </p:txBody>
-      </p:sp>
-      <p:sp>
-        <p:nvSpPr>
-          <p:cNvPr id="7" name="TextBox 6"/>
+              <a:t>Learned fusion (XGBoost) using rule lift, source tier, overlap</a:t>
+            </a:r>
+          </a:p>
+        </p:txBody>
+      </p:sp>
+      <p:sp>
+        <p:nvSpPr>
+          <p:cNvPr id="10" name="Rounded Rectangle 9"/>
+          <p:cNvSpPr/>
+          <p:nvPr/>
+        </p:nvSpPr>
+        <p:spPr>
+          <a:xfrm>
+            <a:off x="457200" y="5760720"/>
+            <a:ext cx="11338560" cy="777240"/>
+          </a:xfrm>
+          <a:prstGeom prst="roundRect">
+            <a:avLst>
+              <a:gd name="adj" fmla="val 8000"/>
+            </a:avLst>
+          </a:prstGeom>
+          <a:solidFill>
+            <a:srgbClr val="0A2A4F"/>
+          </a:solidFill>
+          <a:ln>
+            <a:noFill/>
+          </a:ln>
+        </p:spPr>
+        <p:style>
+          <a:lnRef idx="1">
+            <a:schemeClr val="accent1"/>
+          </a:lnRef>
+          <a:fillRef idx="3">
+            <a:schemeClr val="accent1"/>
+          </a:fillRef>
+          <a:effectRef idx="2">
+            <a:schemeClr val="accent1"/>
+          </a:effectRef>
+          <a:fontRef idx="minor">
+            <a:schemeClr val="lt1"/>
+          </a:fontRef>
+        </p:style>
+        <p:txBody>
+          <a:bodyPr rtlCol="0" anchor="ctr"/>
+          <a:lstStyle/>
+          <a:p>
+            <a:pPr algn="ctr"/>
+          </a:p>
+        </p:txBody>
+      </p:sp>
+      <p:sp>
+        <p:nvSpPr>
+          <p:cNvPr id="11" name="TextBox 10"/>
           <p:cNvSpPr txBox="1"/>
           <p:nvPr/>
         </p:nvSpPr>
         <p:spPr>
           <a:xfrm>
-            <a:off x="6400800" y="1554480"/>
-            <a:ext cx="5486400" cy="365760"/>
+            <a:off x="457200" y="5870448"/>
+            <a:ext cx="11338560" cy="365760"/>
           </a:xfrm>
           <a:prstGeom prst="rect">
             <a:avLst/>
@@ -7858,28 +10854,33 @@
           </a:bodyPr>
           <a:lstStyle/>
           <a:p>
-            <a:r>
-              <a:rPr sz="2000" b="1">
-                <a:solidFill>
-                  <a:srgbClr val="0D3B66"/>
+            <a:pPr algn="ctr">
+              <a:spcAft>
+                <a:spcPts val="400"/>
+              </a:spcAft>
+            </a:pPr>
+            <a:r>
+              <a:rPr sz="2200" b="1">
+                <a:solidFill>
+                  <a:srgbClr val="FFFFFF"/>
                 </a:solidFill>
                 <a:latin typeface="Calibri"/>
               </a:rPr>
-              <a:t>Future Work</a:t>
-            </a:r>
-          </a:p>
-        </p:txBody>
-      </p:sp>
-      <p:sp>
-        <p:nvSpPr>
-          <p:cNvPr id="8" name="TextBox 7"/>
+              <a:t>Questions?</a:t>
+            </a:r>
+          </a:p>
+        </p:txBody>
+      </p:sp>
+      <p:sp>
+        <p:nvSpPr>
+          <p:cNvPr id="12" name="TextBox 11"/>
           <p:cNvSpPr txBox="1"/>
           <p:nvPr/>
         </p:nvSpPr>
         <p:spPr>
           <a:xfrm>
-            <a:off x="6400800" y="2011680"/>
-            <a:ext cx="5486400" cy="4114800"/>
+            <a:off x="457200" y="6263640"/>
+            <a:ext cx="11338560" cy="274320"/>
           </a:xfrm>
           <a:prstGeom prst="rect">
             <a:avLst/>
@@ -7892,97 +10893,76 @@
           </a:bodyPr>
           <a:lstStyle/>
           <a:p>
-            <a:pPr>
-              <a:spcAft>
-                <a:spcPts val="600"/>
-              </a:spcAft>
-            </a:pPr>
-            <a:r>
-              <a:rPr sz="1400">
-                <a:solidFill>
-                  <a:srgbClr val="1F2A3D"/>
+            <a:pPr algn="ctr">
+              <a:spcAft>
+                <a:spcPts val="400"/>
+              </a:spcAft>
+            </a:pPr>
+            <a:r>
+              <a:rPr sz="1100" b="0">
+                <a:solidFill>
+                  <a:srgbClr val="CBD5E1"/>
                 </a:solidFill>
                 <a:latin typeface="Calibri"/>
               </a:rPr>
-              <a:t>  UMLS-backed automatic synonym mining (replace curated dict)</a:t>
-            </a:r>
-          </a:p>
-          <a:p>
-            <a:pPr>
-              <a:spcAft>
-                <a:spcPts val="600"/>
-              </a:spcAft>
-            </a:pPr>
-            <a:r>
-              <a:rPr sz="1400">
-                <a:solidFill>
-                  <a:srgbClr val="1F2A3D"/>
-                </a:solidFill>
-                <a:latin typeface="Calibri"/>
-              </a:rPr>
-              <a:t>  Cross-encoder reranker over &lt;disease, passage&gt; pairs</a:t>
-            </a:r>
-          </a:p>
-          <a:p>
-            <a:pPr>
-              <a:spcAft>
-                <a:spcPts val="600"/>
-              </a:spcAft>
-            </a:pPr>
-            <a:r>
-              <a:rPr sz="1400">
-                <a:solidFill>
-                  <a:srgbClr val="1F2A3D"/>
-                </a:solidFill>
-                <a:latin typeface="Calibri"/>
-              </a:rPr>
-              <a:t>  Evaluate on Synthea FHIR pipeline (held-out vocabulary)</a:t>
-            </a:r>
-          </a:p>
-          <a:p>
-            <a:pPr>
-              <a:spcAft>
-                <a:spcPts val="600"/>
-              </a:spcAft>
-            </a:pPr>
-            <a:r>
-              <a:rPr sz="1400">
-                <a:solidFill>
-                  <a:srgbClr val="1F2A3D"/>
-                </a:solidFill>
-                <a:latin typeface="Calibri"/>
-              </a:rPr>
-              <a:t>  Open-domain disease universe via UMLS canonicalisation</a:t>
-            </a:r>
-          </a:p>
-          <a:p>
-            <a:pPr>
-              <a:spcAft>
-                <a:spcPts val="600"/>
-              </a:spcAft>
-            </a:pPr>
-            <a:r>
-              <a:rPr sz="1400">
-                <a:solidFill>
-                  <a:srgbClr val="1F2A3D"/>
-                </a:solidFill>
-                <a:latin typeface="Calibri"/>
-              </a:rPr>
-              <a:t>  Learned fusion (XGBoost) using rule lift, passage source, overlap</a:t>
-            </a:r>
-          </a:p>
-        </p:txBody>
-      </p:sp>
-      <p:sp>
-        <p:nvSpPr>
-          <p:cNvPr id="9" name="TextBox 8"/>
+              <a:t>github.com/sakshat-patil/Symptom-Based-Disease-Identification-via-RAG</a:t>
+            </a:r>
+          </a:p>
+        </p:txBody>
+      </p:sp>
+      <p:sp>
+        <p:nvSpPr>
+          <p:cNvPr id="13" name="Rectangle 12"/>
+          <p:cNvSpPr/>
+          <p:nvPr/>
+        </p:nvSpPr>
+        <p:spPr>
+          <a:xfrm>
+            <a:off x="457200" y="6473952"/>
+            <a:ext cx="11338560" cy="13716"/>
+          </a:xfrm>
+          <a:prstGeom prst="rect">
+            <a:avLst/>
+          </a:prstGeom>
+          <a:solidFill>
+            <a:srgbClr val="E5ECF5"/>
+          </a:solidFill>
+          <a:ln>
+            <a:noFill/>
+          </a:ln>
+        </p:spPr>
+        <p:style>
+          <a:lnRef idx="1">
+            <a:schemeClr val="accent1"/>
+          </a:lnRef>
+          <a:fillRef idx="3">
+            <a:schemeClr val="accent1"/>
+          </a:fillRef>
+          <a:effectRef idx="2">
+            <a:schemeClr val="accent1"/>
+          </a:effectRef>
+          <a:fontRef idx="minor">
+            <a:schemeClr val="lt1"/>
+          </a:fontRef>
+        </p:style>
+        <p:txBody>
+          <a:bodyPr rtlCol="0" anchor="ctr"/>
+          <a:lstStyle/>
+          <a:p>
+            <a:pPr algn="ctr"/>
+          </a:p>
+        </p:txBody>
+      </p:sp>
+      <p:sp>
+        <p:nvSpPr>
+          <p:cNvPr id="14" name="TextBox 13"/>
           <p:cNvSpPr txBox="1"/>
           <p:nvPr/>
         </p:nvSpPr>
         <p:spPr>
           <a:xfrm>
-            <a:off x="457200" y="5897880"/>
-            <a:ext cx="10972800" cy="365760"/>
+            <a:off x="457200" y="6528816"/>
+            <a:ext cx="6400800" cy="274320"/>
           </a:xfrm>
           <a:prstGeom prst="rect">
             <a:avLst/>
@@ -7995,29 +10975,33 @@
           </a:bodyPr>
           <a:lstStyle/>
           <a:p>
-            <a:pPr algn="l"/>
-            <a:r>
-              <a:rPr sz="1300" b="1">
-                <a:solidFill>
-                  <a:srgbClr val="0D3B66"/>
+            <a:pPr>
+              <a:spcAft>
+                <a:spcPts val="400"/>
+              </a:spcAft>
+            </a:pPr>
+            <a:r>
+              <a:rPr sz="900" b="0">
+                <a:solidFill>
+                  <a:srgbClr val="6B7280"/>
                 </a:solidFill>
                 <a:latin typeface="Calibri"/>
               </a:rPr>
-              <a:t>Sakshat Patil, Vineet Kumar, Aishwarya Madhave</a:t>
-            </a:r>
-          </a:p>
-        </p:txBody>
-      </p:sp>
-      <p:sp>
-        <p:nvSpPr>
-          <p:cNvPr id="10" name="TextBox 9"/>
+              <a:t>CMPE 255 Spring 2026  |  Patil, Kumar, Madhave</a:t>
+            </a:r>
+          </a:p>
+        </p:txBody>
+      </p:sp>
+      <p:sp>
+        <p:nvSpPr>
+          <p:cNvPr id="15" name="TextBox 14"/>
           <p:cNvSpPr txBox="1"/>
           <p:nvPr/>
         </p:nvSpPr>
         <p:spPr>
           <a:xfrm>
-            <a:off x="457200" y="6263640"/>
-            <a:ext cx="10972800" cy="365760"/>
+            <a:off x="7772400" y="6528816"/>
+            <a:ext cx="4023360" cy="274320"/>
           </a:xfrm>
           <a:prstGeom prst="rect">
             <a:avLst/>
@@ -8030,49 +11014,19 @@
           </a:bodyPr>
           <a:lstStyle/>
           <a:p>
-            <a:pPr algn="l"/>
-            <a:r>
-              <a:rPr sz="1100" b="0">
+            <a:pPr algn="r">
+              <a:spcAft>
+                <a:spcPts val="400"/>
+              </a:spcAft>
+            </a:pPr>
+            <a:r>
+              <a:rPr sz="900" b="0">
                 <a:solidFill>
                   <a:srgbClr val="6B7280"/>
                 </a:solidFill>
                 <a:latin typeface="Calibri"/>
               </a:rPr>
-              <a:t>Code: github.com/sakshat-patil/Symptom-Based-Disease-Identification-via-RAG</a:t>
-            </a:r>
-          </a:p>
-        </p:txBody>
-      </p:sp>
-      <p:sp>
-        <p:nvSpPr>
-          <p:cNvPr id="11" name="TextBox 10"/>
-          <p:cNvSpPr txBox="1"/>
-          <p:nvPr/>
-        </p:nvSpPr>
-        <p:spPr>
-          <a:xfrm>
-            <a:off x="365760" y="6492240"/>
-            <a:ext cx="10058400" cy="274320"/>
-          </a:xfrm>
-          <a:prstGeom prst="rect">
-            <a:avLst/>
-          </a:prstGeom>
-          <a:noFill/>
-        </p:spPr>
-        <p:txBody>
-          <a:bodyPr wrap="square">
-            <a:spAutoFit/>
-          </a:bodyPr>
-          <a:lstStyle/>
-          <a:p>
-            <a:r>
-              <a:rPr sz="1000" b="0">
-                <a:solidFill>
-                  <a:srgbClr val="6B7280"/>
-                </a:solidFill>
-                <a:latin typeface="Calibri"/>
-              </a:rPr>
-              <a:t>CMPE 255 Spring 2026, Sakshat Patil, Vineet Kumar, Aishwarya Madhave, Slide 7 of 7</a:t>
+              <a:t>6 / 7</a:t>
             </a:r>
           </a:p>
         </p:txBody>
